--- a/docs/Bends_in_INTERCONNECT.pptx
+++ b/docs/Bends_in_INTERCONNECT.pptx
@@ -28,6 +28,11 @@
     <p:sldId id="273" r:id="rId24"/>
     <p:sldId id="274" r:id="rId25"/>
     <p:sldId id="275" r:id="rId26"/>
+    <p:sldId id="276" r:id="rId27"/>
+    <p:sldId id="277" r:id="rId28"/>
+    <p:sldId id="278" r:id="rId29"/>
+    <p:sldId id="279" r:id="rId30"/>
+    <p:sldId id="280" r:id="rId31"/>
   </p:sldIdLst>
   <p:sldSz cx="12192000" cy="6858000"/>
   <p:notesSz cx="6858000" cy="9144000"/>
@@ -808,7 +813,7 @@
           <a:lstStyle/>
           <a:p>
             <a:r>
-              <a:t>The source and the termination are also small scripted blocks, with their full R + L + C frequency dependence (the TW block took one value at one frequency). Why the Compound: wired one by one, each block is a separate digital filter and each pass through it adds a processing delay; a reflection that bounces between source and termination crosses the line several times and comes back late. On a mismatched line that is a large error (red, measured in INTERCONNECT). Grouped into a Compound with 'scattering data analysis' on, INTERCONNECT first solves the whole network in frequency, reflections included, and builds a single filter from it: the error drops to 0.04 dB (blue). The source and the termination must also be scripted: the built-in electrical connector reflects with the wrong sign in this configuration.</a:t>
+              <a:t>The source and the termination are also small scripted blocks, with their full R + L + C frequency dependence (the TW block took one value at one frequency). Why the Compound: wired one by one, each block is a separate digital filter and each pass through it adds a processing delay; a reflection that bounces between source and termination crosses the line several times and comes back late. On a mismatched line that is a large error (red, measured in INTERCONNECT). Grouped into a Compound with 'scattering data analysis' on, INTERCONNECT first solves the whole network in frequency, reflections included, and builds a single filter from it: the error drops to 0.04 dB near matched and 0.10 dB mismatched (blue), against 0.44 and 2.72 dB wired one by one. The source and the termination must also be scripted: the built-in electrical connector reflects with the wrong sign in this configuration.</a:t>
             </a:r>
           </a:p>
         </p:txBody>
@@ -948,7 +953,7 @@
           <a:lstStyle/>
           <a:p>
             <a:r>
-              <a:t>Step 0 put the two blocks side by side in INTERCONNECT on the same straight 14 mm electrode, driven by a network analyser, and compared both with the exact line model. Near matched (50/55 ohm) the TW block is off by 0.16 dB and 6 degrees, the TL line by 0.04 dB and 0.4 degrees. On a deliberately mismatched line (30/80 ohm), where reflections dominate, the TW block is off by 1.06 dB and 14 degrees and loses 7 GHz of bandwidth; the TL line stays within 0.10 dB. The cause of the TW block's error is internal to it (not identified). The feature table summarises what each block can represent. The 30/80 ohm TL numbers are from the final Step 0 report.</a:t>
+              <a:t>Step 0 put the two blocks side by side in INTERCONNECT on the same straight 14 mm electrode, driven by a network analyser, and compared both with the exact line model. Near matched (50/55 ohm) the TW block is off by 0.16 dB and 6 degrees, the TL line by 0.04 dB and 0.4 degrees. On a deliberately mismatched line (30/80 ohm), where reflections dominate, the TW block is off by 1.06 dB and 14 degrees and loses 7 GHz of bandwidth; the TL line stays within 0.10 dB. The cause of the TW block's error is internal to it (not identified). The feature table summarises what each block can represent.</a:t>
             </a:r>
           </a:p>
         </p:txBody>
@@ -1088,7 +1093,7 @@
           <a:lstStyle/>
           <a:p>
             <a:r>
-              <a:t>Validation of the final EO schematic against the Python model for one to four bends (equal sections, 0.8 mm 60 ohm bends, 14 mm of modulating electrode, 50/55 ohm). Top: normalised EO responses; bottom left: the voltage across the termination, which the old TW block could not give. The INTERCONNECT traces are corrected for two read-back artefacts of INTERCONNECT's optical path (a start-up spike and a two-sample average), which are not part of the device. [INTERCONNECT curves to be filled from the 'Step 1: bends 0-4 check' run.]</a:t>
+              <a:t>Validation of the final EO schematic against the Python model, for 0 to 4 bends (equal sections, 0.8 mm 60 ohm bends, 14 mm of modulating electrode, 50/55 ohm), each run in its own INTERCONNECT session. Bandwidths agree within 0.03-0.3 GHz (0.9 GHz at N = 2, where the curve crosses -3 dB at a shallow angle, so a small level difference moves the crossing more). The largest difference between the normalised curves is 0.13 dB for every N, the same as for the straight electrode: the bends add no error. The voltage across the termination matches Python exactly (ratio 1.000). Bottom left: that voltage, from the Python model, for 0, 2 and 4 bends. The INTERCONNECT EO traces are corrected for two read-back artefacts of INTERCONNECT's optical path (appendix).</a:t>
             </a:r>
           </a:p>
         </p:txBody>
@@ -1228,7 +1233,7 @@
           <a:lstStyle/>
           <a:p>
             <a:r>
-              <a:t>Eye validation for zero to four bends. Each column: the Python eye (navy) and, once run, the INTERCONNECT eye (orange) folded by the same code. The bends close the eye slightly (height and ER drop with N), consistent with the lower EO bandwidth. [INTERCONNECT eyes to be filled from the 'Step 1: eye bends 0-4 check' run.]</a:t>
+              <a:t>Eye validation for zero to four bends. Navy: the Python eye of each device. The bends close the eye slightly (height and ER drop with N), consistent with the lower EO bandwidth. The INTERCONNECT eyes are recorded by an oscilloscope on the photodiode and folded by exactly the same code as the Python eye, so the numbers compare directly. The first INTERCONNECT run cannot be used: the folding started 8 UI into the run, inside the 32-UI start-up interval in which the electrode Compound's filter has not yet delivered any modulation; those flat traces sit between the levels and zero the eye height. The folding now starts where the modulation arrives; the saved traces will be re-analysed.</a:t>
             </a:r>
           </a:p>
         </p:txBody>
@@ -1369,6 +1374,356 @@
           <a:p>
             <a:r>
               <a:t>Summary. The bent electrode is now a block that INTERCONNECT solves itself, more accurate than the built-in TW block, with outputs the built-in block cannot give, and a schematic that does not grow with the number of bends. Limits to keep in mind: INTERCONNECT's own optical path adds two read-back artefacts to the EO trace (a start-up spike and a two-sample average); they are removed when the trace is read, and are negligible in the eye. The sample rate has to stay well above the highest frequency of interest.</a:t>
+            </a:r>
+          </a:p>
+        </p:txBody>
+      </p:sp>
+      <p:sp>
+        <p:nvSpPr>
+          <p:cNvPr id="4" name="Slide Number Placeholder 3"/>
+          <p:cNvSpPr>
+            <a:spLocks noGrp="1"/>
+          </p:cNvSpPr>
+          <p:nvPr>
+            <p:ph type="sldNum" idx="5" sz="quarter"/>
+          </p:nvPr>
+        </p:nvSpPr>
+        <p:spPr/>
+      </p:sp>
+    </p:spTree>
+  </p:cSld>
+  <p:clrMapOvr>
+    <a:masterClrMapping/>
+  </p:clrMapOvr>
+</p:notes>
+</file>
+
+<file path=ppt/notesSlides/notesSlide21.xml><?xml version="1.0" encoding="utf-8"?>
+<p:notes xmlns:a="http://schemas.openxmlformats.org/drawingml/2006/main" xmlns:p="http://schemas.openxmlformats.org/presentationml/2006/main" xmlns:r="http://schemas.openxmlformats.org/officeDocument/2006/relationships">
+  <p:cSld>
+    <p:spTree>
+      <p:nvGrpSpPr>
+        <p:cNvPr id="1" name=""/>
+        <p:cNvGrpSpPr/>
+        <p:nvPr/>
+      </p:nvGrpSpPr>
+      <p:grpSpPr>
+        <a:xfrm>
+          <a:off x="0" y="0"/>
+          <a:ext cx="0" cy="0"/>
+          <a:chOff x="0" y="0"/>
+          <a:chExt cx="0" cy="0"/>
+        </a:xfrm>
+      </p:grpSpPr>
+      <p:sp>
+        <p:nvSpPr>
+          <p:cNvPr id="2" name="Slide Image Placeholder 1"/>
+          <p:cNvSpPr>
+            <a:spLocks noGrp="1"/>
+          </p:cNvSpPr>
+          <p:nvPr>
+            <p:ph type="sldImg" idx="2"/>
+          </p:nvPr>
+        </p:nvSpPr>
+        <p:spPr/>
+      </p:sp>
+      <p:sp>
+        <p:nvSpPr>
+          <p:cNvPr id="3" name="Notes Placeholder 2"/>
+          <p:cNvSpPr>
+            <a:spLocks noGrp="1"/>
+          </p:cNvSpPr>
+          <p:nvPr>
+            <p:ph type="body" idx="3" sz="quarter"/>
+          </p:nvPr>
+        </p:nvSpPr>
+        <p:spPr/>
+        <p:txBody>
+          <a:bodyPr/>
+          <a:lstStyle/>
+          <a:p>
+            <a:r>
+              <a:t>Backup material: the formulas inside the scripted blocks, and the INTERCONNECT measurement artefacts found while developing them.</a:t>
+            </a:r>
+          </a:p>
+        </p:txBody>
+      </p:sp>
+      <p:sp>
+        <p:nvSpPr>
+          <p:cNvPr id="4" name="Slide Number Placeholder 3"/>
+          <p:cNvSpPr>
+            <a:spLocks noGrp="1"/>
+          </p:cNvSpPr>
+          <p:nvPr>
+            <p:ph type="sldNum" idx="5" sz="quarter"/>
+          </p:nvPr>
+        </p:nvSpPr>
+        <p:spPr/>
+      </p:sp>
+    </p:spTree>
+  </p:cSld>
+  <p:clrMapOvr>
+    <a:masterClrMapping/>
+  </p:clrMapOvr>
+</p:notes>
+</file>
+
+<file path=ppt/notesSlides/notesSlide22.xml><?xml version="1.0" encoding="utf-8"?>
+<p:notes xmlns:a="http://schemas.openxmlformats.org/drawingml/2006/main" xmlns:p="http://schemas.openxmlformats.org/presentationml/2006/main" xmlns:r="http://schemas.openxmlformats.org/officeDocument/2006/relationships">
+  <p:cSld>
+    <p:spTree>
+      <p:nvGrpSpPr>
+        <p:cNvPr id="1" name=""/>
+        <p:cNvGrpSpPr/>
+        <p:nvPr/>
+      </p:nvGrpSpPr>
+      <p:grpSpPr>
+        <a:xfrm>
+          <a:off x="0" y="0"/>
+          <a:ext cx="0" cy="0"/>
+          <a:chOff x="0" y="0"/>
+          <a:chExt cx="0" cy="0"/>
+        </a:xfrm>
+      </p:grpSpPr>
+      <p:sp>
+        <p:nvSpPr>
+          <p:cNvPr id="2" name="Slide Image Placeholder 1"/>
+          <p:cNvSpPr>
+            <a:spLocks noGrp="1"/>
+          </p:cNvSpPr>
+          <p:nvPr>
+            <p:ph type="sldImg" idx="2"/>
+          </p:nvPr>
+        </p:nvSpPr>
+        <p:spPr/>
+      </p:sp>
+      <p:sp>
+        <p:nvSpPr>
+          <p:cNvPr id="3" name="Notes Placeholder 2"/>
+          <p:cNvSpPr>
+            <a:spLocks noGrp="1"/>
+          </p:cNvSpPr>
+          <p:nvPr>
+            <p:ph type="body" idx="3" sz="quarter"/>
+          </p:nvPr>
+        </p:nvSpPr>
+        <p:spPr/>
+        <p:txBody>
+          <a:bodyPr/>
+          <a:lstStyle/>
+          <a:p>
+            <a:r>
+              <a:t>The formulas the setup scripts evaluate (lumerical/tl_element_setup.lsf, source_setup.lsf, termination_setup.lsf, tl_electrode_setup.lsf), mirrored line by line in scripted_line.py and checked offline against the GUI's closed-form model to 1e-5 or better. Voltage waves in reference R0; the source treats an incoming wave a1 as an EMF of 2 a1 behind Zs. INTERCONNECT works in the exp(-i w t) convention, so the scripts write conjugated phases.</a:t>
+            </a:r>
+          </a:p>
+        </p:txBody>
+      </p:sp>
+      <p:sp>
+        <p:nvSpPr>
+          <p:cNvPr id="4" name="Slide Number Placeholder 3"/>
+          <p:cNvSpPr>
+            <a:spLocks noGrp="1"/>
+          </p:cNvSpPr>
+          <p:nvPr>
+            <p:ph type="sldNum" idx="5" sz="quarter"/>
+          </p:nvPr>
+        </p:nvSpPr>
+        <p:spPr/>
+      </p:sp>
+    </p:spTree>
+  </p:cSld>
+  <p:clrMapOvr>
+    <a:masterClrMapping/>
+  </p:clrMapOvr>
+</p:notes>
+</file>
+
+<file path=ppt/notesSlides/notesSlide23.xml><?xml version="1.0" encoding="utf-8"?>
+<p:notes xmlns:a="http://schemas.openxmlformats.org/drawingml/2006/main" xmlns:p="http://schemas.openxmlformats.org/presentationml/2006/main" xmlns:r="http://schemas.openxmlformats.org/officeDocument/2006/relationships">
+  <p:cSld>
+    <p:spTree>
+      <p:nvGrpSpPr>
+        <p:cNvPr id="1" name=""/>
+        <p:cNvGrpSpPr/>
+        <p:nvPr/>
+      </p:nvGrpSpPr>
+      <p:grpSpPr>
+        <a:xfrm>
+          <a:off x="0" y="0"/>
+          <a:ext cx="0" cy="0"/>
+          <a:chOff x="0" y="0"/>
+          <a:chExt cx="0" cy="0"/>
+        </a:xfrm>
+      </p:grpSpPr>
+      <p:sp>
+        <p:nvSpPr>
+          <p:cNvPr id="2" name="Slide Image Placeholder 1"/>
+          <p:cNvSpPr>
+            <a:spLocks noGrp="1"/>
+          </p:cNvSpPr>
+          <p:nvPr>
+            <p:ph type="sldImg" idx="2"/>
+          </p:nvPr>
+        </p:nvSpPr>
+        <p:spPr/>
+      </p:sp>
+      <p:sp>
+        <p:nvSpPr>
+          <p:cNvPr id="3" name="Notes Placeholder 2"/>
+          <p:cNvSpPr>
+            <a:spLocks noGrp="1"/>
+          </p:cNvSpPr>
+          <p:nvPr>
+            <p:ph type="body" idx="3" sz="quarter"/>
+          </p:nvPr>
+        </p:nvSpPr>
+        <p:spPr/>
+        <p:txBody>
+          <a:bodyPr/>
+          <a:lstStyle/>
+          <a:p>
+            <a:r>
+              <a:t>Found when the first TL build gave a flat EO trace (the TW build did too). The voltage driving the modulators was right to 0.01 dB; the photodiode trace was not. In time, the trace has a spike at t = 0, before any signal can cross the electrode (whose delay is 0.4-1.7 ns), about ten times the real response. With the spike removed, what remains equals the Python response times |cos(pi f / fs)| to 0.1 dB from 20 to 140 GHz: some element on the optical path outputs the average of two consecutive samples. Both are removed when the EO trace is read (time gate around t = 0, division by the cosine; the trace stops at 0.95 x Nyquist). In the eye they are negligible.</a:t>
+            </a:r>
+          </a:p>
+        </p:txBody>
+      </p:sp>
+      <p:sp>
+        <p:nvSpPr>
+          <p:cNvPr id="4" name="Slide Number Placeholder 3"/>
+          <p:cNvSpPr>
+            <a:spLocks noGrp="1"/>
+          </p:cNvSpPr>
+          <p:nvPr>
+            <p:ph type="sldNum" idx="5" sz="quarter"/>
+          </p:nvPr>
+        </p:nvSpPr>
+        <p:spPr/>
+      </p:sp>
+    </p:spTree>
+  </p:cSld>
+  <p:clrMapOvr>
+    <a:masterClrMapping/>
+  </p:clrMapOvr>
+</p:notes>
+</file>
+
+<file path=ppt/notesSlides/notesSlide24.xml><?xml version="1.0" encoding="utf-8"?>
+<p:notes xmlns:a="http://schemas.openxmlformats.org/drawingml/2006/main" xmlns:p="http://schemas.openxmlformats.org/presentationml/2006/main" xmlns:r="http://schemas.openxmlformats.org/officeDocument/2006/relationships">
+  <p:cSld>
+    <p:spTree>
+      <p:nvGrpSpPr>
+        <p:cNvPr id="1" name=""/>
+        <p:cNvGrpSpPr/>
+        <p:nvPr/>
+      </p:nvGrpSpPr>
+      <p:grpSpPr>
+        <a:xfrm>
+          <a:off x="0" y="0"/>
+          <a:ext cx="0" cy="0"/>
+          <a:chOff x="0" y="0"/>
+          <a:chExt cx="0" cy="0"/>
+        </a:xfrm>
+      </p:grpSpPr>
+      <p:sp>
+        <p:nvSpPr>
+          <p:cNvPr id="2" name="Slide Image Placeholder 1"/>
+          <p:cNvSpPr>
+            <a:spLocks noGrp="1"/>
+          </p:cNvSpPr>
+          <p:nvPr>
+            <p:ph type="sldImg" idx="2"/>
+          </p:nvPr>
+        </p:nvSpPr>
+        <p:spPr/>
+      </p:sp>
+      <p:sp>
+        <p:nvSpPr>
+          <p:cNvPr id="3" name="Notes Placeholder 2"/>
+          <p:cNvSpPr>
+            <a:spLocks noGrp="1"/>
+          </p:cNvSpPr>
+          <p:nvPr>
+            <p:ph type="body" idx="3" sz="quarter"/>
+          </p:nvPr>
+        </p:nvSpPr>
+        <p:spPr/>
+        <p:txBody>
+          <a:bodyPr/>
+          <a:lstStyle/>
+          <a:p>
+            <a:r>
+              <a:t>In the first bend build each arm had two modulators separated by an Optical Delay of 59 ps (the light's transit through the bend and the second section). An Optical Delay emits nothing for its first tau, so the photodiode received no light for 59 ps at the start of the run. After the analyser's DC removal that is a 59 ps rectangle, about 400 times the real EO response; its spectrum is a sinc with nulls every 16.9 GHz, which is exactly what the run showed (dots). The electrode was right; the measurement was swamped. The TL electrode block puts these delays inside its outputs as phases, so no Optical Delay is needed. The TW-block build with bends keeps its Optical Delays, and its read-back gates out the dark interval.</a:t>
+            </a:r>
+          </a:p>
+        </p:txBody>
+      </p:sp>
+      <p:sp>
+        <p:nvSpPr>
+          <p:cNvPr id="4" name="Slide Number Placeholder 3"/>
+          <p:cNvSpPr>
+            <a:spLocks noGrp="1"/>
+          </p:cNvSpPr>
+          <p:nvPr>
+            <p:ph type="sldNum" idx="5" sz="quarter"/>
+          </p:nvPr>
+        </p:nvSpPr>
+        <p:spPr/>
+      </p:sp>
+    </p:spTree>
+  </p:cSld>
+  <p:clrMapOvr>
+    <a:masterClrMapping/>
+  </p:clrMapOvr>
+</p:notes>
+</file>
+
+<file path=ppt/notesSlides/notesSlide25.xml><?xml version="1.0" encoding="utf-8"?>
+<p:notes xmlns:a="http://schemas.openxmlformats.org/drawingml/2006/main" xmlns:p="http://schemas.openxmlformats.org/presentationml/2006/main" xmlns:r="http://schemas.openxmlformats.org/officeDocument/2006/relationships">
+  <p:cSld>
+    <p:spTree>
+      <p:nvGrpSpPr>
+        <p:cNvPr id="1" name=""/>
+        <p:cNvGrpSpPr/>
+        <p:nvPr/>
+      </p:nvGrpSpPr>
+      <p:grpSpPr>
+        <a:xfrm>
+          <a:off x="0" y="0"/>
+          <a:ext cx="0" cy="0"/>
+          <a:chOff x="0" y="0"/>
+          <a:chExt cx="0" cy="0"/>
+        </a:xfrm>
+      </p:grpSpPr>
+      <p:sp>
+        <p:nvSpPr>
+          <p:cNvPr id="2" name="Slide Image Placeholder 1"/>
+          <p:cNvSpPr>
+            <a:spLocks noGrp="1"/>
+          </p:cNvSpPr>
+          <p:nvPr>
+            <p:ph type="sldImg" idx="2"/>
+          </p:nvPr>
+        </p:nvSpPr>
+        <p:spPr/>
+      </p:sp>
+      <p:sp>
+        <p:nvSpPr>
+          <p:cNvPr id="3" name="Notes Placeholder 2"/>
+          <p:cNvSpPr>
+            <a:spLocks noGrp="1"/>
+          </p:cNvSpPr>
+          <p:nvPr>
+            <p:ph type="body" idx="3" sz="quarter"/>
+          </p:nvPr>
+        </p:nvSpPr>
+        <p:spPr/>
+        <p:txBody>
+          <a:bodyPr/>
+          <a:lstStyle/>
+          <a:p>
+            <a:r>
+              <a:t>The first INTERCONNECT eye check reported eye heights of 0.000-0.003 of Python's. Cause: the electrode Compound is one digital filter with a latency of half its length, 512 samples, which is 32 symbols at 16 samples per symbol. Until then the photodiode sits at the bias level. The folding started after 8 symbols, so about 24 flat traces at the bias level were folded into the eye, right between the levels: the height drops to zero and the ER is pulled down. The folding now starts where the photocurrent first moves, plus 4 symbols.</a:t>
             </a:r>
           </a:p>
         </p:txBody>
@@ -8939,7 +9294,7 @@
         <p:spPr>
           <a:xfrm>
             <a:off x="3474720" y="3154680"/>
-            <a:ext cx="0" cy="1188720"/>
+            <a:ext cx="0" cy="914400"/>
           </a:xfrm>
           <a:prstGeom prst="line">
             <a:avLst/>
@@ -9013,8 +9368,8 @@
         </p:nvSpPr>
         <p:spPr>
           <a:xfrm>
-            <a:off x="2788920" y="4343400"/>
-            <a:ext cx="1371600" cy="274320"/>
+            <a:off x="3566160" y="3703320"/>
+            <a:ext cx="1097280" cy="274320"/>
           </a:xfrm>
           <a:prstGeom prst="rect">
             <a:avLst/>
@@ -9060,8 +9415,8 @@
         </p:blipFill>
         <p:spPr>
           <a:xfrm>
-            <a:off x="6812280" y="1554480"/>
-            <a:ext cx="4937760" cy="3113420"/>
+            <a:off x="640080" y="4297680"/>
+            <a:ext cx="6045782" cy="2377440"/>
           </a:xfrm>
           <a:prstGeom prst="rect">
             <a:avLst/>
@@ -9076,8 +9431,8 @@
         </p:nvSpPr>
         <p:spPr>
           <a:xfrm>
-            <a:off x="731520" y="4892040"/>
-            <a:ext cx="2560320" cy="457200"/>
+            <a:off x="7223760" y="1783080"/>
+            <a:ext cx="2743200" cy="457200"/>
           </a:xfrm>
           <a:prstGeom prst="roundRect">
             <a:avLst>
@@ -9112,7 +9467,7 @@
           <a:p>
             <a:pPr algn="ctr"/>
             <a:r>
-              <a:rPr sz="1200" b="1" i="0">
+              <a:rPr sz="1300" b="1" i="0">
                 <a:solidFill>
                   <a:srgbClr val="F20013"/>
                 </a:solidFill>
@@ -9131,8 +9486,8 @@
         </p:nvSpPr>
         <p:spPr>
           <a:xfrm>
-            <a:off x="3429000" y="4919472"/>
-            <a:ext cx="3200400" cy="411480"/>
+            <a:off x="7269480" y="2286000"/>
+            <a:ext cx="4480560" cy="411480"/>
           </a:xfrm>
           <a:prstGeom prst="rect">
             <a:avLst/>
@@ -9151,7 +9506,7 @@
               </a:spcAft>
             </a:pPr>
             <a:r>
-              <a:rPr sz="1200" b="0" i="0">
+              <a:rPr sz="1300" b="0" i="0">
                 <a:solidFill>
                   <a:srgbClr val="1A1A1A"/>
                 </a:solidFill>
@@ -9170,8 +9525,8 @@
         </p:nvSpPr>
         <p:spPr>
           <a:xfrm>
-            <a:off x="731520" y="5532120"/>
-            <a:ext cx="2560320" cy="457200"/>
+            <a:off x="7223760" y="2926080"/>
+            <a:ext cx="2743200" cy="457200"/>
           </a:xfrm>
           <a:prstGeom prst="roundRect">
             <a:avLst>
@@ -9206,7 +9561,7 @@
           <a:p>
             <a:pPr algn="ctr"/>
             <a:r>
-              <a:rPr sz="1200" b="1" i="0">
+              <a:rPr sz="1300" b="1" i="0">
                 <a:solidFill>
                   <a:srgbClr val="0E2268"/>
                 </a:solidFill>
@@ -9225,8 +9580,8 @@
         </p:nvSpPr>
         <p:spPr>
           <a:xfrm>
-            <a:off x="3429000" y="5559552"/>
-            <a:ext cx="3200400" cy="411480"/>
+            <a:off x="7269480" y="3429000"/>
+            <a:ext cx="4480560" cy="411480"/>
           </a:xfrm>
           <a:prstGeom prst="rect">
             <a:avLst/>
@@ -9245,7 +9600,7 @@
               </a:spcAft>
             </a:pPr>
             <a:r>
-              <a:rPr sz="1200" b="0" i="0">
+              <a:rPr sz="1300" b="0" i="0">
                 <a:solidFill>
                   <a:srgbClr val="1A1A1A"/>
                 </a:solidFill>
@@ -14224,14 +14579,14 @@
                 </a:solidFill>
                 <a:latin typeface="Arial"/>
               </a:rPr>
-              <a:t>INTERCONNECT (TL electrode) vs Python, 1 to 4 bends</a:t>
+              <a:t>INTERCONNECT (TL electrode) vs Python, 0 to 4 bends, same device</a:t>
             </a:r>
           </a:p>
         </p:txBody>
       </p:sp>
       <p:pic>
         <p:nvPicPr>
-          <p:cNvPr id="5" name="Picture 4" descr="final_eo.png"/>
+          <p:cNvPr id="5" name="Picture 4" descr="final_bw.png"/>
           <p:cNvPicPr>
             <a:picLocks noChangeAspect="1"/>
           </p:cNvPicPr>
@@ -14245,32 +14600,8 @@
         </p:blipFill>
         <p:spPr>
           <a:xfrm>
-            <a:off x="1188720" y="1371600"/>
-            <a:ext cx="9692640" cy="3080034"/>
-          </a:xfrm>
-          <a:prstGeom prst="rect">
-            <a:avLst/>
-          </a:prstGeom>
-        </p:spPr>
-      </p:pic>
-      <p:pic>
-        <p:nvPicPr>
-          <p:cNvPr id="6" name="Picture 5" descr="far_end_bends.png"/>
-          <p:cNvPicPr>
-            <a:picLocks noChangeAspect="1"/>
-          </p:cNvPicPr>
-          <p:nvPr/>
-        </p:nvPicPr>
-        <p:blipFill>
-          <a:blip r:embed="rId3"/>
-          <a:stretch>
-            <a:fillRect/>
-          </a:stretch>
-        </p:blipFill>
-        <p:spPr>
-          <a:xfrm>
-            <a:off x="548640" y="4543073"/>
-            <a:ext cx="2891286" cy="2086326"/>
+            <a:off x="502920" y="1463040"/>
+            <a:ext cx="7406640" cy="2756824"/>
           </a:xfrm>
           <a:prstGeom prst="rect">
             <a:avLst/>
@@ -14279,26 +14610,28 @@
       </p:pic>
       <p:graphicFrame>
         <p:nvGraphicFramePr>
-          <p:cNvPr id="7" name="Table 6"/>
+          <p:cNvPr id="6" name="Table 5"/>
           <p:cNvGraphicFramePr>
             <a:graphicFrameLocks noGrp="1"/>
           </p:cNvGraphicFramePr>
           <p:nvPr/>
         </p:nvGraphicFramePr>
         <p:xfrm>
-          <a:off x="4572000" y="4588793"/>
-          <a:ext cx="4023359" cy="2040606"/>
+          <a:off x="8183879" y="1600200"/>
+          <a:ext cx="3611877" cy="2304288"/>
         </p:xfrm>
         <a:graphic>
           <a:graphicData uri="http://schemas.openxmlformats.org/drawingml/2006/table">
             <a:tbl>
               <a:tblPr firstRow="0" bandRow="0"/>
               <a:tblGrid>
-                <a:gridCol w="635267"/>
-                <a:gridCol w="1482290"/>
-                <a:gridCol w="1905802"/>
+                <a:gridCol w="314076"/>
+                <a:gridCol w="863710"/>
+                <a:gridCol w="1020748"/>
+                <a:gridCol w="745931"/>
+                <a:gridCol w="667412"/>
               </a:tblGrid>
-              <a:tr h="340101">
+              <a:tr h="384048">
                 <a:tc>
                   <a:txBody>
                     <a:bodyPr wrap="square"/>
@@ -14306,7 +14639,7 @@
                     <a:p>
                       <a:pPr algn="l"/>
                       <a:r>
-                        <a:rPr sz="1100" b="1" i="0">
+                        <a:rPr sz="1050" b="1" i="0">
                           <a:solidFill>
                             <a:srgbClr val="FFFFFF"/>
                           </a:solidFill>
@@ -14329,13 +14662,13 @@
                     <a:p>
                       <a:pPr algn="ctr"/>
                       <a:r>
-                        <a:rPr sz="1100" b="1" i="0">
+                        <a:rPr sz="1050" b="1" i="0">
                           <a:solidFill>
                             <a:srgbClr val="FFFFFF"/>
                           </a:solidFill>
                           <a:latin typeface="Arial"/>
                         </a:rPr>
-                        <a:t>Python BW</a:t>
+                        <a:t>Python</a:t>
                       </a:r>
                     </a:p>
                   </a:txBody>
@@ -14352,13 +14685,59 @@
                     <a:p>
                       <a:pPr algn="ctr"/>
                       <a:r>
-                        <a:rPr sz="1100" b="1" i="0">
+                        <a:rPr sz="1050" b="1" i="0">
                           <a:solidFill>
                             <a:srgbClr val="FFFFFF"/>
                           </a:solidFill>
                           <a:latin typeface="Arial"/>
                         </a:rPr>
-                        <a:t>INTERCONNECT BW</a:t>
+                        <a:t>IC</a:t>
+                      </a:r>
+                    </a:p>
+                  </a:txBody>
+                  <a:tcPr marL="54864" marR="54864" marT="18288" marB="18288" anchor="ctr">
+                    <a:solidFill>
+                      <a:srgbClr val="0E2268"/>
+                    </a:solidFill>
+                  </a:tcPr>
+                </a:tc>
+                <a:tc>
+                  <a:txBody>
+                    <a:bodyPr wrap="square"/>
+                    <a:lstStyle/>
+                    <a:p>
+                      <a:pPr algn="ctr"/>
+                      <a:r>
+                        <a:rPr sz="1050" b="1" i="0">
+                          <a:solidFill>
+                            <a:srgbClr val="FFFFFF"/>
+                          </a:solidFill>
+                          <a:latin typeface="Arial"/>
+                        </a:rPr>
+                        <a:t>max diff</a:t>
+                      </a:r>
+                    </a:p>
+                  </a:txBody>
+                  <a:tcPr marL="54864" marR="54864" marT="18288" marB="18288" anchor="ctr">
+                    <a:solidFill>
+                      <a:srgbClr val="0E2268"/>
+                    </a:solidFill>
+                  </a:tcPr>
+                </a:tc>
+                <a:tc>
+                  <a:txBody>
+                    <a:bodyPr wrap="square"/>
+                    <a:lstStyle/>
+                    <a:p>
+                      <a:pPr algn="ctr"/>
+                      <a:r>
+                        <a:rPr sz="1050" b="1" i="0">
+                          <a:solidFill>
+                            <a:srgbClr val="FFFFFF"/>
+                          </a:solidFill>
+                          <a:latin typeface="Arial"/>
+                        </a:rPr>
+                        <a:t>far end</a:t>
                       </a:r>
                     </a:p>
                   </a:txBody>
@@ -14369,7 +14748,7 @@
                   </a:tcPr>
                 </a:tc>
               </a:tr>
-              <a:tr h="340101">
+              <a:tr h="384048">
                 <a:tc>
                   <a:txBody>
                     <a:bodyPr wrap="square"/>
@@ -14377,7 +14756,7 @@
                     <a:p>
                       <a:pPr algn="l"/>
                       <a:r>
-                        <a:rPr sz="1100" b="1" i="0">
+                        <a:rPr sz="1050" b="1" i="0">
                           <a:solidFill>
                             <a:srgbClr val="1A1A1A"/>
                           </a:solidFill>
@@ -14400,13 +14779,13 @@
                     <a:p>
                       <a:pPr algn="ctr"/>
                       <a:r>
-                        <a:rPr sz="1100" b="0" i="0">
+                        <a:rPr sz="1050" b="0" i="0">
                           <a:solidFill>
                             <a:srgbClr val="1A1A1A"/>
                           </a:solidFill>
                           <a:latin typeface="Arial"/>
                         </a:rPr>
-                        <a:t>94.1 GHz</a:t>
+                        <a:t>94.15 GHz</a:t>
                       </a:r>
                     </a:p>
                   </a:txBody>
@@ -14423,13 +14802,59 @@
                     <a:p>
                       <a:pPr algn="ctr"/>
                       <a:r>
-                        <a:rPr sz="1100" b="0" i="0">
+                        <a:rPr sz="1050" b="0" i="0">
                           <a:solidFill>
                             <a:srgbClr val="1A1A1A"/>
                           </a:solidFill>
                           <a:latin typeface="Arial"/>
                         </a:rPr>
-                        <a:t>run pending</a:t>
+                        <a:t>94.09 GHz</a:t>
+                      </a:r>
+                    </a:p>
+                  </a:txBody>
+                  <a:tcPr marL="54864" marR="54864" marT="18288" marB="18288" anchor="ctr">
+                    <a:solidFill>
+                      <a:srgbClr val="F1F3F8"/>
+                    </a:solidFill>
+                  </a:tcPr>
+                </a:tc>
+                <a:tc>
+                  <a:txBody>
+                    <a:bodyPr wrap="square"/>
+                    <a:lstStyle/>
+                    <a:p>
+                      <a:pPr algn="ctr"/>
+                      <a:r>
+                        <a:rPr sz="1050" b="0" i="0">
+                          <a:solidFill>
+                            <a:srgbClr val="1A1A1A"/>
+                          </a:solidFill>
+                          <a:latin typeface="Arial"/>
+                        </a:rPr>
+                        <a:t>0.13 dB</a:t>
+                      </a:r>
+                    </a:p>
+                  </a:txBody>
+                  <a:tcPr marL="54864" marR="54864" marT="18288" marB="18288" anchor="ctr">
+                    <a:solidFill>
+                      <a:srgbClr val="F1F3F8"/>
+                    </a:solidFill>
+                  </a:tcPr>
+                </a:tc>
+                <a:tc>
+                  <a:txBody>
+                    <a:bodyPr wrap="square"/>
+                    <a:lstStyle/>
+                    <a:p>
+                      <a:pPr algn="ctr"/>
+                      <a:r>
+                        <a:rPr sz="1050" b="0" i="0">
+                          <a:solidFill>
+                            <a:srgbClr val="1A1A1A"/>
+                          </a:solidFill>
+                          <a:latin typeface="Arial"/>
+                        </a:rPr>
+                        <a:t>1.000</a:t>
                       </a:r>
                     </a:p>
                   </a:txBody>
@@ -14440,7 +14865,7 @@
                   </a:tcPr>
                 </a:tc>
               </a:tr>
-              <a:tr h="340101">
+              <a:tr h="384048">
                 <a:tc>
                   <a:txBody>
                     <a:bodyPr wrap="square"/>
@@ -14448,7 +14873,7 @@
                     <a:p>
                       <a:pPr algn="l"/>
                       <a:r>
-                        <a:rPr sz="1100" b="1" i="0">
+                        <a:rPr sz="1050" b="1" i="0">
                           <a:solidFill>
                             <a:srgbClr val="1A1A1A"/>
                           </a:solidFill>
@@ -14471,13 +14896,13 @@
                     <a:p>
                       <a:pPr algn="ctr"/>
                       <a:r>
-                        <a:rPr sz="1100" b="0" i="0">
+                        <a:rPr sz="1050" b="0" i="0">
                           <a:solidFill>
                             <a:srgbClr val="1A1A1A"/>
                           </a:solidFill>
                           <a:latin typeface="Arial"/>
                         </a:rPr>
-                        <a:t>88.8 GHz</a:t>
+                        <a:t>88.79 GHz</a:t>
                       </a:r>
                     </a:p>
                   </a:txBody>
@@ -14494,13 +14919,59 @@
                     <a:p>
                       <a:pPr algn="ctr"/>
                       <a:r>
-                        <a:rPr sz="1100" b="0" i="0">
+                        <a:rPr sz="1050" b="0" i="0">
                           <a:solidFill>
                             <a:srgbClr val="1A1A1A"/>
                           </a:solidFill>
                           <a:latin typeface="Arial"/>
                         </a:rPr>
-                        <a:t>run pending</a:t>
+                        <a:t>88.48 GHz</a:t>
+                      </a:r>
+                    </a:p>
+                  </a:txBody>
+                  <a:tcPr marL="54864" marR="54864" marT="18288" marB="18288" anchor="ctr">
+                    <a:solidFill>
+                      <a:srgbClr val="FFFFFF"/>
+                    </a:solidFill>
+                  </a:tcPr>
+                </a:tc>
+                <a:tc>
+                  <a:txBody>
+                    <a:bodyPr wrap="square"/>
+                    <a:lstStyle/>
+                    <a:p>
+                      <a:pPr algn="ctr"/>
+                      <a:r>
+                        <a:rPr sz="1050" b="0" i="0">
+                          <a:solidFill>
+                            <a:srgbClr val="1A1A1A"/>
+                          </a:solidFill>
+                          <a:latin typeface="Arial"/>
+                        </a:rPr>
+                        <a:t>0.13 dB</a:t>
+                      </a:r>
+                    </a:p>
+                  </a:txBody>
+                  <a:tcPr marL="54864" marR="54864" marT="18288" marB="18288" anchor="ctr">
+                    <a:solidFill>
+                      <a:srgbClr val="FFFFFF"/>
+                    </a:solidFill>
+                  </a:tcPr>
+                </a:tc>
+                <a:tc>
+                  <a:txBody>
+                    <a:bodyPr wrap="square"/>
+                    <a:lstStyle/>
+                    <a:p>
+                      <a:pPr algn="ctr"/>
+                      <a:r>
+                        <a:rPr sz="1050" b="0" i="0">
+                          <a:solidFill>
+                            <a:srgbClr val="1A1A1A"/>
+                          </a:solidFill>
+                          <a:latin typeface="Arial"/>
+                        </a:rPr>
+                        <a:t>1.000</a:t>
                       </a:r>
                     </a:p>
                   </a:txBody>
@@ -14511,7 +14982,7 @@
                   </a:tcPr>
                 </a:tc>
               </a:tr>
-              <a:tr h="340101">
+              <a:tr h="384048">
                 <a:tc>
                   <a:txBody>
                     <a:bodyPr wrap="square"/>
@@ -14519,7 +14990,7 @@
                     <a:p>
                       <a:pPr algn="l"/>
                       <a:r>
-                        <a:rPr sz="1100" b="1" i="0">
+                        <a:rPr sz="1050" b="1" i="0">
                           <a:solidFill>
                             <a:srgbClr val="1A1A1A"/>
                           </a:solidFill>
@@ -14542,13 +15013,13 @@
                     <a:p>
                       <a:pPr algn="ctr"/>
                       <a:r>
-                        <a:rPr sz="1100" b="0" i="0">
+                        <a:rPr sz="1050" b="0" i="0">
                           <a:solidFill>
                             <a:srgbClr val="1A1A1A"/>
                           </a:solidFill>
                           <a:latin typeface="Arial"/>
                         </a:rPr>
-                        <a:t>83.3 GHz</a:t>
+                        <a:t>83.33 GHz</a:t>
                       </a:r>
                     </a:p>
                   </a:txBody>
@@ -14565,13 +15036,59 @@
                     <a:p>
                       <a:pPr algn="ctr"/>
                       <a:r>
-                        <a:rPr sz="1100" b="0" i="0">
+                        <a:rPr sz="1050" b="0" i="0">
                           <a:solidFill>
                             <a:srgbClr val="1A1A1A"/>
                           </a:solidFill>
                           <a:latin typeface="Arial"/>
                         </a:rPr>
-                        <a:t>run pending</a:t>
+                        <a:t>82.40 GHz</a:t>
+                      </a:r>
+                    </a:p>
+                  </a:txBody>
+                  <a:tcPr marL="54864" marR="54864" marT="18288" marB="18288" anchor="ctr">
+                    <a:solidFill>
+                      <a:srgbClr val="F1F3F8"/>
+                    </a:solidFill>
+                  </a:tcPr>
+                </a:tc>
+                <a:tc>
+                  <a:txBody>
+                    <a:bodyPr wrap="square"/>
+                    <a:lstStyle/>
+                    <a:p>
+                      <a:pPr algn="ctr"/>
+                      <a:r>
+                        <a:rPr sz="1050" b="0" i="0">
+                          <a:solidFill>
+                            <a:srgbClr val="1A1A1A"/>
+                          </a:solidFill>
+                          <a:latin typeface="Arial"/>
+                        </a:rPr>
+                        <a:t>0.13 dB</a:t>
+                      </a:r>
+                    </a:p>
+                  </a:txBody>
+                  <a:tcPr marL="54864" marR="54864" marT="18288" marB="18288" anchor="ctr">
+                    <a:solidFill>
+                      <a:srgbClr val="F1F3F8"/>
+                    </a:solidFill>
+                  </a:tcPr>
+                </a:tc>
+                <a:tc>
+                  <a:txBody>
+                    <a:bodyPr wrap="square"/>
+                    <a:lstStyle/>
+                    <a:p>
+                      <a:pPr algn="ctr"/>
+                      <a:r>
+                        <a:rPr sz="1050" b="0" i="0">
+                          <a:solidFill>
+                            <a:srgbClr val="1A1A1A"/>
+                          </a:solidFill>
+                          <a:latin typeface="Arial"/>
+                        </a:rPr>
+                        <a:t>1.000</a:t>
                       </a:r>
                     </a:p>
                   </a:txBody>
@@ -14582,7 +15099,7 @@
                   </a:tcPr>
                 </a:tc>
               </a:tr>
-              <a:tr h="340101">
+              <a:tr h="384048">
                 <a:tc>
                   <a:txBody>
                     <a:bodyPr wrap="square"/>
@@ -14590,7 +15107,7 @@
                     <a:p>
                       <a:pPr algn="l"/>
                       <a:r>
-                        <a:rPr sz="1100" b="1" i="0">
+                        <a:rPr sz="1050" b="1" i="0">
                           <a:solidFill>
                             <a:srgbClr val="1A1A1A"/>
                           </a:solidFill>
@@ -14613,13 +15130,13 @@
                     <a:p>
                       <a:pPr algn="ctr"/>
                       <a:r>
-                        <a:rPr sz="1100" b="0" i="0">
+                        <a:rPr sz="1050" b="0" i="0">
                           <a:solidFill>
                             <a:srgbClr val="1A1A1A"/>
                           </a:solidFill>
                           <a:latin typeface="Arial"/>
                         </a:rPr>
-                        <a:t>77.6 GHz</a:t>
+                        <a:t>77.59 GHz</a:t>
                       </a:r>
                     </a:p>
                   </a:txBody>
@@ -14636,13 +15153,59 @@
                     <a:p>
                       <a:pPr algn="ctr"/>
                       <a:r>
-                        <a:rPr sz="1100" b="0" i="0">
+                        <a:rPr sz="1050" b="0" i="0">
                           <a:solidFill>
                             <a:srgbClr val="1A1A1A"/>
                           </a:solidFill>
                           <a:latin typeface="Arial"/>
                         </a:rPr>
-                        <a:t>run pending</a:t>
+                        <a:t>77.49 GHz</a:t>
+                      </a:r>
+                    </a:p>
+                  </a:txBody>
+                  <a:tcPr marL="54864" marR="54864" marT="18288" marB="18288" anchor="ctr">
+                    <a:solidFill>
+                      <a:srgbClr val="FFFFFF"/>
+                    </a:solidFill>
+                  </a:tcPr>
+                </a:tc>
+                <a:tc>
+                  <a:txBody>
+                    <a:bodyPr wrap="square"/>
+                    <a:lstStyle/>
+                    <a:p>
+                      <a:pPr algn="ctr"/>
+                      <a:r>
+                        <a:rPr sz="1050" b="0" i="0">
+                          <a:solidFill>
+                            <a:srgbClr val="1A1A1A"/>
+                          </a:solidFill>
+                          <a:latin typeface="Arial"/>
+                        </a:rPr>
+                        <a:t>0.14 dB</a:t>
+                      </a:r>
+                    </a:p>
+                  </a:txBody>
+                  <a:tcPr marL="54864" marR="54864" marT="18288" marB="18288" anchor="ctr">
+                    <a:solidFill>
+                      <a:srgbClr val="FFFFFF"/>
+                    </a:solidFill>
+                  </a:tcPr>
+                </a:tc>
+                <a:tc>
+                  <a:txBody>
+                    <a:bodyPr wrap="square"/>
+                    <a:lstStyle/>
+                    <a:p>
+                      <a:pPr algn="ctr"/>
+                      <a:r>
+                        <a:rPr sz="1050" b="0" i="0">
+                          <a:solidFill>
+                            <a:srgbClr val="1A1A1A"/>
+                          </a:solidFill>
+                          <a:latin typeface="Arial"/>
+                        </a:rPr>
+                        <a:t>1.000</a:t>
                       </a:r>
                     </a:p>
                   </a:txBody>
@@ -14653,7 +15216,7 @@
                   </a:tcPr>
                 </a:tc>
               </a:tr>
-              <a:tr h="340101">
+              <a:tr h="384048">
                 <a:tc>
                   <a:txBody>
                     <a:bodyPr wrap="square"/>
@@ -14661,7 +15224,7 @@
                     <a:p>
                       <a:pPr algn="l"/>
                       <a:r>
-                        <a:rPr sz="1100" b="1" i="0">
+                        <a:rPr sz="1050" b="1" i="0">
                           <a:solidFill>
                             <a:srgbClr val="1A1A1A"/>
                           </a:solidFill>
@@ -14684,13 +15247,13 @@
                     <a:p>
                       <a:pPr algn="ctr"/>
                       <a:r>
-                        <a:rPr sz="1100" b="0" i="0">
+                        <a:rPr sz="1050" b="0" i="0">
                           <a:solidFill>
                             <a:srgbClr val="1A1A1A"/>
                           </a:solidFill>
                           <a:latin typeface="Arial"/>
                         </a:rPr>
-                        <a:t>73.0 GHz</a:t>
+                        <a:t>73.05 GHz</a:t>
                       </a:r>
                     </a:p>
                   </a:txBody>
@@ -14707,13 +15270,59 @@
                     <a:p>
                       <a:pPr algn="ctr"/>
                       <a:r>
-                        <a:rPr sz="1100" b="0" i="0">
+                        <a:rPr sz="1050" b="0" i="0">
                           <a:solidFill>
                             <a:srgbClr val="1A1A1A"/>
                           </a:solidFill>
                           <a:latin typeface="Arial"/>
                         </a:rPr>
-                        <a:t>run pending</a:t>
+                        <a:t>73.02 GHz</a:t>
+                      </a:r>
+                    </a:p>
+                  </a:txBody>
+                  <a:tcPr marL="54864" marR="54864" marT="18288" marB="18288" anchor="ctr">
+                    <a:solidFill>
+                      <a:srgbClr val="F1F3F8"/>
+                    </a:solidFill>
+                  </a:tcPr>
+                </a:tc>
+                <a:tc>
+                  <a:txBody>
+                    <a:bodyPr wrap="square"/>
+                    <a:lstStyle/>
+                    <a:p>
+                      <a:pPr algn="ctr"/>
+                      <a:r>
+                        <a:rPr sz="1050" b="0" i="0">
+                          <a:solidFill>
+                            <a:srgbClr val="1A1A1A"/>
+                          </a:solidFill>
+                          <a:latin typeface="Arial"/>
+                        </a:rPr>
+                        <a:t>0.13 dB</a:t>
+                      </a:r>
+                    </a:p>
+                  </a:txBody>
+                  <a:tcPr marL="54864" marR="54864" marT="18288" marB="18288" anchor="ctr">
+                    <a:solidFill>
+                      <a:srgbClr val="F1F3F8"/>
+                    </a:solidFill>
+                  </a:tcPr>
+                </a:tc>
+                <a:tc>
+                  <a:txBody>
+                    <a:bodyPr wrap="square"/>
+                    <a:lstStyle/>
+                    <a:p>
+                      <a:pPr algn="ctr"/>
+                      <a:r>
+                        <a:rPr sz="1050" b="0" i="0">
+                          <a:solidFill>
+                            <a:srgbClr val="1A1A1A"/>
+                          </a:solidFill>
+                          <a:latin typeface="Arial"/>
+                        </a:rPr>
+                        <a:t>1.000</a:t>
                       </a:r>
                     </a:p>
                   </a:txBody>
@@ -14728,57 +15337,223 @@
           </a:graphicData>
         </a:graphic>
       </p:graphicFrame>
-      <p:sp>
-        <p:nvSpPr>
-          <p:cNvPr id="8" name="Rounded Rectangle 7"/>
-          <p:cNvSpPr/>
-          <p:nvPr/>
-        </p:nvSpPr>
-        <p:spPr>
-          <a:xfrm>
-            <a:off x="8915400" y="4572000"/>
-            <a:ext cx="2834640" cy="1097280"/>
-          </a:xfrm>
-          <a:prstGeom prst="roundRect">
-            <a:avLst>
-              <a:gd name="adj" fmla="val 50000"/>
-            </a:avLst>
-          </a:prstGeom>
-          <a:solidFill>
-            <a:srgbClr val="FDEBEC"/>
-          </a:solidFill>
-          <a:ln>
-            <a:noFill/>
-          </a:ln>
-          <a:effectLst/>
-        </p:spPr>
-        <p:style>
-          <a:lnRef idx="1">
-            <a:schemeClr val="accent1"/>
-          </a:lnRef>
-          <a:fillRef idx="3">
-            <a:schemeClr val="accent1"/>
-          </a:fillRef>
-          <a:effectRef idx="2">
-            <a:schemeClr val="accent1"/>
-          </a:effectRef>
-          <a:fontRef idx="minor">
-            <a:schemeClr val="lt1"/>
-          </a:fontRef>
-        </p:style>
-        <p:txBody>
-          <a:bodyPr rtlCol="0" anchor="ctr" lIns="27432" rIns="27432" tIns="9144" bIns="9144" wrap="square"/>
-          <a:lstStyle/>
-          <a:p>
-            <a:pPr algn="ctr"/>
-            <a:r>
-              <a:rPr sz="1200" b="1" i="0">
+      <p:pic>
+        <p:nvPicPr>
+          <p:cNvPr id="7" name="Picture 6" descr="far_end_bends.png"/>
+          <p:cNvPicPr>
+            <a:picLocks noChangeAspect="1"/>
+          </p:cNvPicPr>
+          <p:nvPr/>
+        </p:nvPicPr>
+        <p:blipFill>
+          <a:blip r:embed="rId3"/>
+          <a:stretch>
+            <a:fillRect/>
+          </a:stretch>
+        </p:blipFill>
+        <p:spPr>
+          <a:xfrm>
+            <a:off x="685800" y="4160520"/>
+            <a:ext cx="3421440" cy="2468880"/>
+          </a:xfrm>
+          <a:prstGeom prst="rect">
+            <a:avLst/>
+          </a:prstGeom>
+        </p:spPr>
+      </p:pic>
+      <p:sp>
+        <p:nvSpPr>
+          <p:cNvPr id="8" name="TextBox 7"/>
+          <p:cNvSpPr txBox="1"/>
+          <p:nvPr/>
+        </p:nvSpPr>
+        <p:spPr>
+          <a:xfrm>
+            <a:off x="8183879" y="3931920"/>
+            <a:ext cx="3611880" cy="274320"/>
+          </a:xfrm>
+          <a:prstGeom prst="rect">
+            <a:avLst/>
+          </a:prstGeom>
+          <a:noFill/>
+        </p:spPr>
+        <p:txBody>
+          <a:bodyPr wrap="square" lIns="27432" rIns="27432" tIns="18288" bIns="18288" anchor="t">
+            <a:spAutoFit/>
+          </a:bodyPr>
+          <a:lstStyle/>
+          <a:p>
+            <a:pPr algn="l">
+              <a:spcAft>
+                <a:spcPts val="400"/>
+              </a:spcAft>
+            </a:pPr>
+            <a:r>
+              <a:rPr sz="950" b="0" i="1">
                 <a:solidFill>
-                  <a:srgbClr val="F20013"/>
+                  <a:srgbClr val="5A606E"/>
                 </a:solidFill>
                 <a:latin typeface="Arial"/>
               </a:rPr>
-              <a:t>INTERCONNECT curves: run 'Step 1: bends 0-4 check'</a:t>
+              <a:t>BW in GHz · IC = INTERCONNECT · max diff of the normalised curves</a:t>
+            </a:r>
+          </a:p>
+        </p:txBody>
+      </p:sp>
+      <p:sp>
+        <p:nvSpPr>
+          <p:cNvPr id="9" name="TextBox 8"/>
+          <p:cNvSpPr txBox="1"/>
+          <p:nvPr/>
+        </p:nvSpPr>
+        <p:spPr>
+          <a:xfrm>
+            <a:off x="4937760" y="4297680"/>
+            <a:ext cx="3017520" cy="731520"/>
+          </a:xfrm>
+          <a:prstGeom prst="rect">
+            <a:avLst/>
+          </a:prstGeom>
+          <a:noFill/>
+        </p:spPr>
+        <p:txBody>
+          <a:bodyPr wrap="square" lIns="27432" rIns="27432" tIns="18288" bIns="18288" anchor="t">
+            <a:spAutoFit/>
+          </a:bodyPr>
+          <a:lstStyle/>
+          <a:p>
+            <a:pPr algn="l">
+              <a:spcAft>
+                <a:spcPts val="0"/>
+              </a:spcAft>
+            </a:pPr>
+            <a:r>
+              <a:rPr sz="4000" b="1" i="0">
+                <a:solidFill>
+                  <a:srgbClr val="0E2268"/>
+                </a:solidFill>
+                <a:latin typeface="Arial"/>
+              </a:rPr>
+              <a:t>≤ 0.13 dB</a:t>
+            </a:r>
+          </a:p>
+        </p:txBody>
+      </p:sp>
+      <p:sp>
+        <p:nvSpPr>
+          <p:cNvPr id="10" name="TextBox 9"/>
+          <p:cNvSpPr txBox="1"/>
+          <p:nvPr/>
+        </p:nvSpPr>
+        <p:spPr>
+          <a:xfrm>
+            <a:off x="4937760" y="5010912"/>
+            <a:ext cx="3017520" cy="457200"/>
+          </a:xfrm>
+          <a:prstGeom prst="rect">
+            <a:avLst/>
+          </a:prstGeom>
+          <a:noFill/>
+        </p:spPr>
+        <p:txBody>
+          <a:bodyPr wrap="square" lIns="27432" rIns="27432" tIns="18288" bIns="18288" anchor="t">
+            <a:spAutoFit/>
+          </a:bodyPr>
+          <a:lstStyle/>
+          <a:p>
+            <a:pPr algn="l">
+              <a:spcAft>
+                <a:spcPts val="0"/>
+              </a:spcAft>
+            </a:pPr>
+            <a:r>
+              <a:rPr sz="1100" b="0" i="0">
+                <a:solidFill>
+                  <a:srgbClr val="5A606E"/>
+                </a:solidFill>
+                <a:latin typeface="Arial"/>
+              </a:rPr>
+              <a:t>INTERCONNECT − Python,
+every N (straight: 0.13 dB)</a:t>
+            </a:r>
+          </a:p>
+        </p:txBody>
+      </p:sp>
+      <p:sp>
+        <p:nvSpPr>
+          <p:cNvPr id="11" name="TextBox 10"/>
+          <p:cNvSpPr txBox="1"/>
+          <p:nvPr/>
+        </p:nvSpPr>
+        <p:spPr>
+          <a:xfrm>
+            <a:off x="8229600" y="4297680"/>
+            <a:ext cx="3017520" cy="731520"/>
+          </a:xfrm>
+          <a:prstGeom prst="rect">
+            <a:avLst/>
+          </a:prstGeom>
+          <a:noFill/>
+        </p:spPr>
+        <p:txBody>
+          <a:bodyPr wrap="square" lIns="27432" rIns="27432" tIns="18288" bIns="18288" anchor="t">
+            <a:spAutoFit/>
+          </a:bodyPr>
+          <a:lstStyle/>
+          <a:p>
+            <a:pPr algn="l">
+              <a:spcAft>
+                <a:spcPts val="0"/>
+              </a:spcAft>
+            </a:pPr>
+            <a:r>
+              <a:rPr sz="4000" b="1" i="0">
+                <a:solidFill>
+                  <a:srgbClr val="1C8C82"/>
+                </a:solidFill>
+                <a:latin typeface="Arial"/>
+              </a:rPr>
+              <a:t>1.000</a:t>
+            </a:r>
+          </a:p>
+        </p:txBody>
+      </p:sp>
+      <p:sp>
+        <p:nvSpPr>
+          <p:cNvPr id="12" name="TextBox 11"/>
+          <p:cNvSpPr txBox="1"/>
+          <p:nvPr/>
+        </p:nvSpPr>
+        <p:spPr>
+          <a:xfrm>
+            <a:off x="8229600" y="5010912"/>
+            <a:ext cx="3017520" cy="457200"/>
+          </a:xfrm>
+          <a:prstGeom prst="rect">
+            <a:avLst/>
+          </a:prstGeom>
+          <a:noFill/>
+        </p:spPr>
+        <p:txBody>
+          <a:bodyPr wrap="square" lIns="27432" rIns="27432" tIns="18288" bIns="18288" anchor="t">
+            <a:spAutoFit/>
+          </a:bodyPr>
+          <a:lstStyle/>
+          <a:p>
+            <a:pPr algn="l">
+              <a:spcAft>
+                <a:spcPts val="0"/>
+              </a:spcAft>
+            </a:pPr>
+            <a:r>
+              <a:rPr sz="1100" b="0" i="0">
+                <a:solidFill>
+                  <a:srgbClr val="5A606E"/>
+                </a:solidFill>
+                <a:latin typeface="Arial"/>
+              </a:rPr>
+              <a:t>far-end voltage ratio,
+every N</a:t>
             </a:r>
           </a:p>
         </p:txBody>
@@ -17192,7 +17967,7 @@
                 </a:solidFill>
                 <a:latin typeface="Arial"/>
               </a:rPr>
-              <a:t>100 Gb/s NRZ, 2 Vpp, noise off</a:t>
+              <a:t>100 Gb/s NRZ, 2 Vpp, noise off, no receiver filter</a:t>
             </a:r>
           </a:p>
         </p:txBody>
@@ -17444,7 +18219,7 @@
                           </a:solidFill>
                           <a:latin typeface="Arial"/>
                         </a:rPr>
-                        <a:t>run pending</a:t>
+                        <a:t>re-analysis</a:t>
                       </a:r>
                     </a:p>
                   </a:txBody>
@@ -17467,7 +18242,7 @@
                           </a:solidFill>
                           <a:latin typeface="Arial"/>
                         </a:rPr>
-                        <a:t>run pending</a:t>
+                        <a:t>re-analysis</a:t>
                       </a:r>
                     </a:p>
                   </a:txBody>
@@ -17561,7 +18336,7 @@
                           </a:solidFill>
                           <a:latin typeface="Arial"/>
                         </a:rPr>
-                        <a:t>run pending</a:t>
+                        <a:t>re-analysis</a:t>
                       </a:r>
                     </a:p>
                   </a:txBody>
@@ -17584,7 +18359,7 @@
                           </a:solidFill>
                           <a:latin typeface="Arial"/>
                         </a:rPr>
-                        <a:t>run pending</a:t>
+                        <a:t>re-analysis</a:t>
                       </a:r>
                     </a:p>
                   </a:txBody>
@@ -17678,7 +18453,7 @@
                           </a:solidFill>
                           <a:latin typeface="Arial"/>
                         </a:rPr>
-                        <a:t>run pending</a:t>
+                        <a:t>re-analysis</a:t>
                       </a:r>
                     </a:p>
                   </a:txBody>
@@ -17701,7 +18476,7 @@
                           </a:solidFill>
                           <a:latin typeface="Arial"/>
                         </a:rPr>
-                        <a:t>run pending</a:t>
+                        <a:t>re-analysis</a:t>
                       </a:r>
                     </a:p>
                   </a:txBody>
@@ -17795,7 +18570,7 @@
                           </a:solidFill>
                           <a:latin typeface="Arial"/>
                         </a:rPr>
-                        <a:t>run pending</a:t>
+                        <a:t>re-analysis</a:t>
                       </a:r>
                     </a:p>
                   </a:txBody>
@@ -17818,7 +18593,7 @@
                           </a:solidFill>
                           <a:latin typeface="Arial"/>
                         </a:rPr>
-                        <a:t>run pending</a:t>
+                        <a:t>re-analysis</a:t>
                       </a:r>
                     </a:p>
                   </a:txBody>
@@ -17912,7 +18687,7 @@
                           </a:solidFill>
                           <a:latin typeface="Arial"/>
                         </a:rPr>
-                        <a:t>run pending</a:t>
+                        <a:t>re-analysis</a:t>
                       </a:r>
                     </a:p>
                   </a:txBody>
@@ -17935,7 +18710,7 @@
                           </a:solidFill>
                           <a:latin typeface="Arial"/>
                         </a:rPr>
-                        <a:t>run pending</a:t>
+                        <a:t>re-analysis</a:t>
                       </a:r>
                     </a:p>
                   </a:txBody>
@@ -17958,8 +18733,8 @@
         </p:nvSpPr>
         <p:spPr>
           <a:xfrm>
-            <a:off x="8503920" y="4572000"/>
-            <a:ext cx="3200400" cy="1097280"/>
+            <a:off x="8503920" y="4434840"/>
+            <a:ext cx="3246120" cy="1371600"/>
           </a:xfrm>
           <a:prstGeom prst="roundRect">
             <a:avLst>
@@ -17994,13 +18769,13 @@
           <a:p>
             <a:pPr algn="ctr"/>
             <a:r>
-              <a:rPr sz="1200" b="1" i="0">
+              <a:rPr sz="1100" b="1" i="0">
                 <a:solidFill>
                   <a:srgbClr val="F20013"/>
                 </a:solidFill>
                 <a:latin typeface="Arial"/>
               </a:rPr>
-              <a:t>INTERCONNECT eyes: run 'Step 1: eye bends 0-4 check'</a:t>
+              <a:t>INTERCONNECT eyes: the first run folded the start-up interval; fixed, re-analysis pending</a:t>
             </a:r>
           </a:p>
         </p:txBody>
@@ -19664,6 +20439,5726 @@
                 <a:latin typeface="Arial"/>
               </a:rPr>
               <a:t>EO read-back corrected for INTERCONNECT artefacts · sample rate ≥ 2.5 × top frequency</a:t>
+            </a:r>
+          </a:p>
+        </p:txBody>
+      </p:sp>
+    </p:spTree>
+  </p:cSld>
+  <p:clrMapOvr>
+    <a:masterClrMapping/>
+  </p:clrMapOvr>
+</p:sld>
+</file>
+
+<file path=ppt/slides/slide21.xml><?xml version="1.0" encoding="utf-8"?>
+<p:sld xmlns:a="http://schemas.openxmlformats.org/drawingml/2006/main" xmlns:p="http://schemas.openxmlformats.org/presentationml/2006/main" xmlns:r="http://schemas.openxmlformats.org/officeDocument/2006/relationships">
+  <p:cSld>
+    <p:spTree>
+      <p:nvGrpSpPr>
+        <p:cNvPr id="1" name=""/>
+        <p:cNvGrpSpPr/>
+        <p:nvPr/>
+      </p:nvGrpSpPr>
+      <p:grpSpPr/>
+      <p:sp>
+        <p:nvSpPr>
+          <p:cNvPr id="2" name="TextBox 1"/>
+          <p:cNvSpPr txBox="1"/>
+          <p:nvPr/>
+        </p:nvSpPr>
+        <p:spPr>
+          <a:xfrm>
+            <a:off x="822960" y="2560320"/>
+            <a:ext cx="10058400" cy="914400"/>
+          </a:xfrm>
+          <a:prstGeom prst="rect">
+            <a:avLst/>
+          </a:prstGeom>
+          <a:noFill/>
+        </p:spPr>
+        <p:txBody>
+          <a:bodyPr wrap="square" lIns="27432" rIns="27432" tIns="18288" bIns="18288" anchor="t">
+            <a:spAutoFit/>
+          </a:bodyPr>
+          <a:lstStyle/>
+          <a:p>
+            <a:pPr algn="l">
+              <a:spcAft>
+                <a:spcPts val="400"/>
+              </a:spcAft>
+            </a:pPr>
+            <a:r>
+              <a:rPr sz="4000" b="1" i="0">
+                <a:solidFill>
+                  <a:srgbClr val="0E2268"/>
+                </a:solidFill>
+                <a:latin typeface="Arial"/>
+              </a:rPr>
+              <a:t>Appendix</a:t>
+            </a:r>
+          </a:p>
+        </p:txBody>
+      </p:sp>
+      <p:sp>
+        <p:nvSpPr>
+          <p:cNvPr id="3" name="TextBox 2"/>
+          <p:cNvSpPr txBox="1"/>
+          <p:nvPr/>
+        </p:nvSpPr>
+        <p:spPr>
+          <a:xfrm>
+            <a:off x="822960" y="3474720"/>
+            <a:ext cx="10058400" cy="548640"/>
+          </a:xfrm>
+          <a:prstGeom prst="rect">
+            <a:avLst/>
+          </a:prstGeom>
+          <a:noFill/>
+        </p:spPr>
+        <p:txBody>
+          <a:bodyPr wrap="square" lIns="27432" rIns="27432" tIns="18288" bIns="18288" anchor="t">
+            <a:spAutoFit/>
+          </a:bodyPr>
+          <a:lstStyle/>
+          <a:p>
+            <a:pPr algn="l">
+              <a:spcAft>
+                <a:spcPts val="400"/>
+              </a:spcAft>
+            </a:pPr>
+            <a:r>
+              <a:rPr sz="1600" b="0" i="0">
+                <a:solidFill>
+                  <a:srgbClr val="5A606E"/>
+                </a:solidFill>
+                <a:latin typeface="Arial"/>
+              </a:rPr>
+              <a:t>A1  Equations   ·   A2  EO read-back artefacts   ·   A3  Optical Delay start-up   ·   A4  Eye check start-up</a:t>
+            </a:r>
+          </a:p>
+        </p:txBody>
+      </p:sp>
+    </p:spTree>
+  </p:cSld>
+  <p:clrMapOvr>
+    <a:masterClrMapping/>
+  </p:clrMapOvr>
+</p:sld>
+</file>
+
+<file path=ppt/slides/slide22.xml><?xml version="1.0" encoding="utf-8"?>
+<p:sld xmlns:a="http://schemas.openxmlformats.org/drawingml/2006/main" xmlns:p="http://schemas.openxmlformats.org/presentationml/2006/main" xmlns:r="http://schemas.openxmlformats.org/officeDocument/2006/relationships">
+  <p:cSld>
+    <p:spTree>
+      <p:nvGrpSpPr>
+        <p:cNvPr id="1" name=""/>
+        <p:cNvGrpSpPr/>
+        <p:nvPr/>
+      </p:nvGrpSpPr>
+      <p:grpSpPr/>
+      <p:sp>
+        <p:nvSpPr>
+          <p:cNvPr id="2" name="TextBox 1"/>
+          <p:cNvSpPr txBox="1"/>
+          <p:nvPr/>
+        </p:nvSpPr>
+        <p:spPr>
+          <a:xfrm>
+            <a:off x="502920" y="411480"/>
+            <a:ext cx="9509760" cy="685800"/>
+          </a:xfrm>
+          <a:prstGeom prst="rect">
+            <a:avLst/>
+          </a:prstGeom>
+          <a:noFill/>
+        </p:spPr>
+        <p:txBody>
+          <a:bodyPr wrap="square" lIns="27432" rIns="27432" tIns="18288" bIns="18288" anchor="t">
+            <a:spAutoFit/>
+          </a:bodyPr>
+          <a:lstStyle/>
+          <a:p>
+            <a:pPr algn="l">
+              <a:spcAft>
+                <a:spcPts val="400"/>
+              </a:spcAft>
+            </a:pPr>
+            <a:r>
+              <a:rPr sz="3000" b="0" i="0">
+                <a:solidFill>
+                  <a:srgbClr val="1A1A1A"/>
+                </a:solidFill>
+                <a:latin typeface="Arial"/>
+              </a:rPr>
+              <a:t>A1  The equations inside the blocks</a:t>
+            </a:r>
+          </a:p>
+        </p:txBody>
+      </p:sp>
+      <p:sp>
+        <p:nvSpPr>
+          <p:cNvPr id="3" name="TextBox 2"/>
+          <p:cNvSpPr txBox="1"/>
+          <p:nvPr/>
+        </p:nvSpPr>
+        <p:spPr>
+          <a:xfrm>
+            <a:off x="685800" y="1417320"/>
+            <a:ext cx="10515600" cy="274320"/>
+          </a:xfrm>
+          <a:prstGeom prst="rect">
+            <a:avLst/>
+          </a:prstGeom>
+          <a:noFill/>
+        </p:spPr>
+        <p:txBody>
+          <a:bodyPr wrap="square" lIns="27432" rIns="27432" tIns="18288" bIns="18288" anchor="t">
+            <a:spAutoFit/>
+          </a:bodyPr>
+          <a:lstStyle/>
+          <a:p>
+            <a:pPr algn="l">
+              <a:spcAft>
+                <a:spcPts val="400"/>
+              </a:spcAft>
+            </a:pPr>
+            <a:r>
+              <a:rPr sz="1300" b="1" i="0">
+                <a:solidFill>
+                  <a:srgbClr val="0E2268"/>
+                </a:solidFill>
+                <a:latin typeface="Arial"/>
+              </a:rPr>
+              <a:t>TL line: exact two-port (reference R</a:t>
+            </a:r>
+            <a:r>
+              <a:rPr sz="1300" b="1" i="0" baseline="-25000">
+                <a:solidFill>
+                  <a:srgbClr val="0E2268"/>
+                </a:solidFill>
+                <a:latin typeface="Arial"/>
+              </a:rPr>
+              <a:t>0</a:t>
+            </a:r>
+            <a:r>
+              <a:rPr sz="1300" b="1" i="0">
+                <a:solidFill>
+                  <a:srgbClr val="0E2268"/>
+                </a:solidFill>
+                <a:latin typeface="Arial"/>
+              </a:rPr>
+              <a:t> = 50 Ω)</a:t>
+            </a:r>
+          </a:p>
+        </p:txBody>
+      </p:sp>
+      <mc:AlternateContent xmlns:mc="http://schemas.openxmlformats.org/markup-compatibility/2006" xmlns:a14="http://schemas.microsoft.com/office/drawing/2010/main">
+        <mc:Choice Requires="a14">
+          <p:sp>
+            <p:nvSpPr>
+              <p:cNvPr id="4" name="Equation 4"/>
+              <p:cNvSpPr txBox="1"/>
+              <p:nvPr/>
+            </p:nvSpPr>
+            <p:spPr>
+              <a:xfrm>
+                <a:off x="914400" y="1746504"/>
+                <a:ext cx="2093976" cy="451103"/>
+              </a:xfrm>
+              <a:prstGeom prst="rect">
+                <a:avLst/>
+              </a:prstGeom>
+              <a:noFill/>
+            </p:spPr>
+            <p:txBody>
+              <a:bodyPr wrap="none" lIns="0" tIns="0" rIns="0" bIns="0">
+                <a:spAutoFit/>
+              </a:bodyPr>
+              <a:lstStyle/>
+              <a:p>
+                <a:pPr algn="l"/>
+                <a14:m>
+                  <m:oMathPara xmlns:m="http://schemas.openxmlformats.org/officeDocument/2006/math">
+                    <m:oMathParaPr>
+                      <m:jc m:val="left"/>
+                    </m:oMathParaPr>
+                    <m:oMath>
+                      <m:r>
+                        <a:rPr lang="en-US" sz="1400" i="1">
+                          <a:solidFill>
+                            <a:srgbClr val="1A1A1A"/>
+                          </a:solidFill>
+                          <a:latin typeface="Cambria Math" panose="02040503050406030204" pitchFamily="18" charset="0"/>
+                        </a:rPr>
+                        <m:t>𝛾</m:t>
+                      </m:r>
+                      <m:r>
+                        <m:rPr>
+                          <m:sty m:val="p"/>
+                        </m:rPr>
+                        <a:rPr lang="en-US" sz="1400" i="0">
+                          <a:solidFill>
+                            <a:srgbClr val="1A1A1A"/>
+                          </a:solidFill>
+                          <a:latin typeface="Cambria Math" panose="02040503050406030204" pitchFamily="18" charset="0"/>
+                        </a:rPr>
+                        <m:t>=</m:t>
+                      </m:r>
+                      <m:r>
+                        <a:rPr lang="en-US" sz="1400" i="1">
+                          <a:solidFill>
+                            <a:srgbClr val="1A1A1A"/>
+                          </a:solidFill>
+                          <a:latin typeface="Cambria Math" panose="02040503050406030204" pitchFamily="18" charset="0"/>
+                        </a:rPr>
+                        <m:t>𝛼</m:t>
+                      </m:r>
+                      <m:r>
+                        <m:rPr>
+                          <m:sty m:val="p"/>
+                        </m:rPr>
+                        <a:rPr lang="en-US" sz="1400" i="0">
+                          <a:solidFill>
+                            <a:srgbClr val="1A1A1A"/>
+                          </a:solidFill>
+                          <a:latin typeface="Cambria Math" panose="02040503050406030204" pitchFamily="18" charset="0"/>
+                        </a:rPr>
+                        <m:t>+</m:t>
+                      </m:r>
+                      <m:r>
+                        <a:rPr lang="en-US" sz="1400" i="1">
+                          <a:solidFill>
+                            <a:srgbClr val="1A1A1A"/>
+                          </a:solidFill>
+                          <a:latin typeface="Cambria Math" panose="02040503050406030204" pitchFamily="18" charset="0"/>
+                        </a:rPr>
+                        <m:t>𝑗</m:t>
+                      </m:r>
+                      <m:f>
+                        <m:fPr>
+                          <m:type m:val="bar"/>
+                        </m:fPr>
+                        <m:num>
+                          <m:r>
+                            <a:rPr lang="en-US" sz="1400" i="1">
+                              <a:solidFill>
+                                <a:srgbClr val="1A1A1A"/>
+                              </a:solidFill>
+                              <a:latin typeface="Cambria Math" panose="02040503050406030204" pitchFamily="18" charset="0"/>
+                            </a:rPr>
+                            <m:t>𝜔</m:t>
+                          </m:r>
+                          <m:sSub>
+                            <m:e>
+                              <m:r>
+                                <a:rPr lang="en-US" sz="1400" i="1">
+                                  <a:solidFill>
+                                    <a:srgbClr val="1A1A1A"/>
+                                  </a:solidFill>
+                                  <a:latin typeface="Cambria Math" panose="02040503050406030204" pitchFamily="18" charset="0"/>
+                                </a:rPr>
+                                <m:t>𝑛</m:t>
+                              </m:r>
+                            </m:e>
+                            <m:sub>
+                              <m:r>
+                                <a:rPr lang="en-US" sz="1400" i="1">
+                                  <a:solidFill>
+                                    <a:srgbClr val="1A1A1A"/>
+                                  </a:solidFill>
+                                  <a:latin typeface="Cambria Math" panose="02040503050406030204" pitchFamily="18" charset="0"/>
+                                </a:rPr>
+                                <m:t>𝑚</m:t>
+                              </m:r>
+                            </m:sub>
+                          </m:sSub>
+                        </m:num>
+                        <m:den>
+                          <m:r>
+                            <a:rPr lang="en-US" sz="1400" i="1">
+                              <a:solidFill>
+                                <a:srgbClr val="1A1A1A"/>
+                              </a:solidFill>
+                              <a:latin typeface="Cambria Math" panose="02040503050406030204" pitchFamily="18" charset="0"/>
+                            </a:rPr>
+                            <m:t>𝑐</m:t>
+                          </m:r>
+                        </m:den>
+                      </m:f>
+                      <m:r>
+                        <m:rPr>
+                          <m:sty m:val="p"/>
+                        </m:rPr>
+                        <a:rPr lang="en-US" sz="1400" i="0">
+                          <a:solidFill>
+                            <a:srgbClr val="1A1A1A"/>
+                          </a:solidFill>
+                          <a:latin typeface="Cambria Math" panose="02040503050406030204" pitchFamily="18" charset="0"/>
+                        </a:rPr>
+                        <m:t>,</m:t>
+                      </m:r>
+                      <m:r>
+                        <a:rPr lang="en-US" sz="1400" i="0">
+                          <a:solidFill>
+                            <a:srgbClr val="1A1A1A"/>
+                          </a:solidFill>
+                          <a:latin typeface="Cambria Math" panose="02040503050406030204" pitchFamily="18" charset="0"/>
+                        </a:rPr>
+                        <m:t> </m:t>
+                      </m:r>
+                      <m:r>
+                        <m:rPr>
+                          <m:sty m:val="p"/>
+                        </m:rPr>
+                        <a:rPr lang="en-US" sz="1400" i="0">
+                          <a:solidFill>
+                            <a:srgbClr val="1A1A1A"/>
+                          </a:solidFill>
+                          <a:latin typeface="Cambria Math" panose="02040503050406030204" pitchFamily="18" charset="0"/>
+                        </a:rPr>
+                        <m:t>Γ</m:t>
+                      </m:r>
+                      <m:r>
+                        <m:rPr>
+                          <m:sty m:val="p"/>
+                        </m:rPr>
+                        <a:rPr lang="en-US" sz="1400" i="0">
+                          <a:solidFill>
+                            <a:srgbClr val="1A1A1A"/>
+                          </a:solidFill>
+                          <a:latin typeface="Cambria Math" panose="02040503050406030204" pitchFamily="18" charset="0"/>
+                        </a:rPr>
+                        <m:t>=</m:t>
+                      </m:r>
+                      <m:f>
+                        <m:fPr>
+                          <m:type m:val="bar"/>
+                        </m:fPr>
+                        <m:num>
+                          <m:sSub>
+                            <m:e>
+                              <m:r>
+                                <a:rPr lang="en-US" sz="1400" i="1">
+                                  <a:solidFill>
+                                    <a:srgbClr val="1A1A1A"/>
+                                  </a:solidFill>
+                                  <a:latin typeface="Cambria Math" panose="02040503050406030204" pitchFamily="18" charset="0"/>
+                                </a:rPr>
+                                <m:t>𝑍</m:t>
+                              </m:r>
+                            </m:e>
+                            <m:sub>
+                              <m:r>
+                                <a:rPr lang="en-US" sz="1400" i="0">
+                                  <a:solidFill>
+                                    <a:srgbClr val="1A1A1A"/>
+                                  </a:solidFill>
+                                  <a:latin typeface="Cambria Math" panose="02040503050406030204" pitchFamily="18" charset="0"/>
+                                </a:rPr>
+                                <m:t>0</m:t>
+                              </m:r>
+                            </m:sub>
+                          </m:sSub>
+                          <m:r>
+                            <m:rPr>
+                              <m:sty m:val="p"/>
+                            </m:rPr>
+                            <a:rPr lang="en-US" sz="1400" i="0">
+                              <a:solidFill>
+                                <a:srgbClr val="1A1A1A"/>
+                              </a:solidFill>
+                              <a:latin typeface="Cambria Math" panose="02040503050406030204" pitchFamily="18" charset="0"/>
+                            </a:rPr>
+                            <m:t>−</m:t>
+                          </m:r>
+                          <m:sSub>
+                            <m:e>
+                              <m:r>
+                                <a:rPr lang="en-US" sz="1400" i="1">
+                                  <a:solidFill>
+                                    <a:srgbClr val="1A1A1A"/>
+                                  </a:solidFill>
+                                  <a:latin typeface="Cambria Math" panose="02040503050406030204" pitchFamily="18" charset="0"/>
+                                </a:rPr>
+                                <m:t>𝑅</m:t>
+                              </m:r>
+                            </m:e>
+                            <m:sub>
+                              <m:r>
+                                <a:rPr lang="en-US" sz="1400" i="0">
+                                  <a:solidFill>
+                                    <a:srgbClr val="1A1A1A"/>
+                                  </a:solidFill>
+                                  <a:latin typeface="Cambria Math" panose="02040503050406030204" pitchFamily="18" charset="0"/>
+                                </a:rPr>
+                                <m:t>0</m:t>
+                              </m:r>
+                            </m:sub>
+                          </m:sSub>
+                        </m:num>
+                        <m:den>
+                          <m:sSub>
+                            <m:e>
+                              <m:r>
+                                <a:rPr lang="en-US" sz="1400" i="1">
+                                  <a:solidFill>
+                                    <a:srgbClr val="1A1A1A"/>
+                                  </a:solidFill>
+                                  <a:latin typeface="Cambria Math" panose="02040503050406030204" pitchFamily="18" charset="0"/>
+                                </a:rPr>
+                                <m:t>𝑍</m:t>
+                              </m:r>
+                            </m:e>
+                            <m:sub>
+                              <m:r>
+                                <a:rPr lang="en-US" sz="1400" i="0">
+                                  <a:solidFill>
+                                    <a:srgbClr val="1A1A1A"/>
+                                  </a:solidFill>
+                                  <a:latin typeface="Cambria Math" panose="02040503050406030204" pitchFamily="18" charset="0"/>
+                                </a:rPr>
+                                <m:t>0</m:t>
+                              </m:r>
+                            </m:sub>
+                          </m:sSub>
+                          <m:r>
+                            <m:rPr>
+                              <m:sty m:val="p"/>
+                            </m:rPr>
+                            <a:rPr lang="en-US" sz="1400" i="0">
+                              <a:solidFill>
+                                <a:srgbClr val="1A1A1A"/>
+                              </a:solidFill>
+                              <a:latin typeface="Cambria Math" panose="02040503050406030204" pitchFamily="18" charset="0"/>
+                            </a:rPr>
+                            <m:t>+</m:t>
+                          </m:r>
+                          <m:sSub>
+                            <m:e>
+                              <m:r>
+                                <a:rPr lang="en-US" sz="1400" i="1">
+                                  <a:solidFill>
+                                    <a:srgbClr val="1A1A1A"/>
+                                  </a:solidFill>
+                                  <a:latin typeface="Cambria Math" panose="02040503050406030204" pitchFamily="18" charset="0"/>
+                                </a:rPr>
+                                <m:t>𝑅</m:t>
+                              </m:r>
+                            </m:e>
+                            <m:sub>
+                              <m:r>
+                                <a:rPr lang="en-US" sz="1400" i="0">
+                                  <a:solidFill>
+                                    <a:srgbClr val="1A1A1A"/>
+                                  </a:solidFill>
+                                  <a:latin typeface="Cambria Math" panose="02040503050406030204" pitchFamily="18" charset="0"/>
+                                </a:rPr>
+                                <m:t>0</m:t>
+                              </m:r>
+                            </m:sub>
+                          </m:sSub>
+                        </m:den>
+                      </m:f>
+                    </m:oMath>
+                  </m:oMathPara>
+                </a14:m>
+                <a:endParaRPr lang="en-US" sz="1400"/>
+              </a:p>
+            </p:txBody>
+          </p:sp>
+        </mc:Choice>
+        <mc:Fallback>
+          <p:sp>
+            <p:nvSpPr>
+              <p:cNvPr id="4" name="Equation 4"/>
+              <p:cNvSpPr txBox="1">
+                <a:spLocks noRot="1" noChangeAspect="1" noMove="1" noResize="1" noEditPoints="1" noAdjustHandles="1" noChangeArrowheads="1" noChangeShapeType="1" noTextEdit="1"/>
+              </p:cNvSpPr>
+              <p:nvPr/>
+            </p:nvSpPr>
+            <p:spPr>
+              <a:xfrm>
+                <a:off x="914400" y="1746504"/>
+                <a:ext cx="2093976" cy="451103"/>
+              </a:xfrm>
+              <a:prstGeom prst="rect">
+                <a:avLst/>
+              </a:prstGeom>
+              <a:blipFill>
+                <a:blip r:embed="rId2"/>
+                <a:stretch>
+                  <a:fillRect/>
+                </a:stretch>
+              </a:blipFill>
+            </p:spPr>
+            <p:txBody>
+              <a:bodyPr/>
+              <a:lstStyle/>
+              <a:p>
+                <a:r>
+                  <a:rPr lang="en-GB">
+                    <a:noFill/>
+                  </a:rPr>
+                  <a:t> </a:t>
+                </a:r>
+              </a:p>
+            </p:txBody>
+          </p:sp>
+        </mc:Fallback>
+      </mc:AlternateContent>
+      <mc:AlternateContent xmlns:mc="http://schemas.openxmlformats.org/markup-compatibility/2006" xmlns:a14="http://schemas.microsoft.com/office/drawing/2010/main">
+        <mc:Choice Requires="a14">
+          <p:sp>
+            <p:nvSpPr>
+              <p:cNvPr id="5" name="Equation 5"/>
+              <p:cNvSpPr txBox="1"/>
+              <p:nvPr/>
+            </p:nvSpPr>
+            <p:spPr>
+              <a:xfrm>
+                <a:off x="914400" y="2270760"/>
+                <a:ext cx="3986784" cy="484632"/>
+              </a:xfrm>
+              <a:prstGeom prst="rect">
+                <a:avLst/>
+              </a:prstGeom>
+              <a:noFill/>
+            </p:spPr>
+            <p:txBody>
+              <a:bodyPr wrap="none" lIns="0" tIns="0" rIns="0" bIns="0">
+                <a:spAutoFit/>
+              </a:bodyPr>
+              <a:lstStyle/>
+              <a:p>
+                <a:pPr algn="l"/>
+                <a14:m>
+                  <m:oMathPara xmlns:m="http://schemas.openxmlformats.org/officeDocument/2006/math">
+                    <m:oMathParaPr>
+                      <m:jc m:val="left"/>
+                    </m:oMathParaPr>
+                    <m:oMath>
+                      <m:sSub>
+                        <m:e>
+                          <m:r>
+                            <a:rPr lang="en-US" sz="1400" i="1">
+                              <a:solidFill>
+                                <a:srgbClr val="1A1A1A"/>
+                              </a:solidFill>
+                              <a:latin typeface="Cambria Math" panose="02040503050406030204" pitchFamily="18" charset="0"/>
+                            </a:rPr>
+                            <m:t>𝑆</m:t>
+                          </m:r>
+                        </m:e>
+                        <m:sub>
+                          <m:r>
+                            <a:rPr lang="en-US" sz="1400" i="0">
+                              <a:solidFill>
+                                <a:srgbClr val="1A1A1A"/>
+                              </a:solidFill>
+                              <a:latin typeface="Cambria Math" panose="02040503050406030204" pitchFamily="18" charset="0"/>
+                            </a:rPr>
+                            <m:t>11</m:t>
+                          </m:r>
+                        </m:sub>
+                      </m:sSub>
+                      <m:r>
+                        <m:rPr>
+                          <m:sty m:val="p"/>
+                        </m:rPr>
+                        <a:rPr lang="en-US" sz="1400" i="0">
+                          <a:solidFill>
+                            <a:srgbClr val="1A1A1A"/>
+                          </a:solidFill>
+                          <a:latin typeface="Cambria Math" panose="02040503050406030204" pitchFamily="18" charset="0"/>
+                        </a:rPr>
+                        <m:t>=</m:t>
+                      </m:r>
+                      <m:sSub>
+                        <m:e>
+                          <m:r>
+                            <a:rPr lang="en-US" sz="1400" i="1">
+                              <a:solidFill>
+                                <a:srgbClr val="1A1A1A"/>
+                              </a:solidFill>
+                              <a:latin typeface="Cambria Math" panose="02040503050406030204" pitchFamily="18" charset="0"/>
+                            </a:rPr>
+                            <m:t>𝑆</m:t>
+                          </m:r>
+                        </m:e>
+                        <m:sub>
+                          <m:r>
+                            <a:rPr lang="en-US" sz="1400" i="0">
+                              <a:solidFill>
+                                <a:srgbClr val="1A1A1A"/>
+                              </a:solidFill>
+                              <a:latin typeface="Cambria Math" panose="02040503050406030204" pitchFamily="18" charset="0"/>
+                            </a:rPr>
+                            <m:t>22</m:t>
+                          </m:r>
+                        </m:sub>
+                      </m:sSub>
+                      <m:r>
+                        <m:rPr>
+                          <m:sty m:val="p"/>
+                        </m:rPr>
+                        <a:rPr lang="en-US" sz="1400" i="0">
+                          <a:solidFill>
+                            <a:srgbClr val="1A1A1A"/>
+                          </a:solidFill>
+                          <a:latin typeface="Cambria Math" panose="02040503050406030204" pitchFamily="18" charset="0"/>
+                        </a:rPr>
+                        <m:t>=</m:t>
+                      </m:r>
+                      <m:f>
+                        <m:fPr>
+                          <m:type m:val="bar"/>
+                        </m:fPr>
+                        <m:num>
+                          <m:r>
+                            <m:rPr>
+                              <m:sty m:val="p"/>
+                            </m:rPr>
+                            <a:rPr lang="en-US" sz="1400" i="0">
+                              <a:solidFill>
+                                <a:srgbClr val="1A1A1A"/>
+                              </a:solidFill>
+                              <a:latin typeface="Cambria Math" panose="02040503050406030204" pitchFamily="18" charset="0"/>
+                            </a:rPr>
+                            <m:t>Γ</m:t>
+                          </m:r>
+                          <m:r>
+                            <a:rPr lang="en-US" sz="1400" i="0">
+                              <a:solidFill>
+                                <a:srgbClr val="1A1A1A"/>
+                              </a:solidFill>
+                              <a:latin typeface="Cambria Math" panose="02040503050406030204" pitchFamily="18" charset="0"/>
+                            </a:rPr>
+                            <m:t> </m:t>
+                          </m:r>
+                          <m:r>
+                            <m:rPr>
+                              <m:sty m:val="p"/>
+                            </m:rPr>
+                            <a:rPr lang="en-US" sz="1400" i="0">
+                              <a:solidFill>
+                                <a:srgbClr val="1A1A1A"/>
+                              </a:solidFill>
+                              <a:latin typeface="Cambria Math" panose="02040503050406030204" pitchFamily="18" charset="0"/>
+                            </a:rPr>
+                            <m:t>(</m:t>
+                          </m:r>
+                          <m:r>
+                            <a:rPr lang="en-US" sz="1400" i="0">
+                              <a:solidFill>
+                                <a:srgbClr val="1A1A1A"/>
+                              </a:solidFill>
+                              <a:latin typeface="Cambria Math" panose="02040503050406030204" pitchFamily="18" charset="0"/>
+                            </a:rPr>
+                            <m:t>1</m:t>
+                          </m:r>
+                          <m:r>
+                            <m:rPr>
+                              <m:sty m:val="p"/>
+                            </m:rPr>
+                            <a:rPr lang="en-US" sz="1400" i="0">
+                              <a:solidFill>
+                                <a:srgbClr val="1A1A1A"/>
+                              </a:solidFill>
+                              <a:latin typeface="Cambria Math" panose="02040503050406030204" pitchFamily="18" charset="0"/>
+                            </a:rPr>
+                            <m:t>−</m:t>
+                          </m:r>
+                          <m:sSup>
+                            <m:e>
+                              <m:r>
+                                <a:rPr lang="en-US" sz="1400" i="1">
+                                  <a:solidFill>
+                                    <a:srgbClr val="1A1A1A"/>
+                                  </a:solidFill>
+                                  <a:latin typeface="Cambria Math" panose="02040503050406030204" pitchFamily="18" charset="0"/>
+                                </a:rPr>
+                                <m:t>𝑒</m:t>
+                              </m:r>
+                            </m:e>
+                            <m:sup>
+                              <m:r>
+                                <m:rPr>
+                                  <m:sty m:val="p"/>
+                                </m:rPr>
+                                <a:rPr lang="en-US" sz="1400" i="0">
+                                  <a:solidFill>
+                                    <a:srgbClr val="1A1A1A"/>
+                                  </a:solidFill>
+                                  <a:latin typeface="Cambria Math" panose="02040503050406030204" pitchFamily="18" charset="0"/>
+                                </a:rPr>
+                                <m:t>−</m:t>
+                              </m:r>
+                              <m:r>
+                                <a:rPr lang="en-US" sz="1400" i="0">
+                                  <a:solidFill>
+                                    <a:srgbClr val="1A1A1A"/>
+                                  </a:solidFill>
+                                  <a:latin typeface="Cambria Math" panose="02040503050406030204" pitchFamily="18" charset="0"/>
+                                </a:rPr>
+                                <m:t>2</m:t>
+                              </m:r>
+                              <m:r>
+                                <a:rPr lang="en-US" sz="1400" i="1">
+                                  <a:solidFill>
+                                    <a:srgbClr val="1A1A1A"/>
+                                  </a:solidFill>
+                                  <a:latin typeface="Cambria Math" panose="02040503050406030204" pitchFamily="18" charset="0"/>
+                                </a:rPr>
+                                <m:t>𝛾</m:t>
+                              </m:r>
+                              <m:r>
+                                <a:rPr lang="en-US" sz="1400" i="1">
+                                  <a:solidFill>
+                                    <a:srgbClr val="1A1A1A"/>
+                                  </a:solidFill>
+                                  <a:latin typeface="Cambria Math" panose="02040503050406030204" pitchFamily="18" charset="0"/>
+                                </a:rPr>
+                                <m:t>𝐿</m:t>
+                              </m:r>
+                            </m:sup>
+                          </m:sSup>
+                          <m:r>
+                            <m:rPr>
+                              <m:sty m:val="p"/>
+                            </m:rPr>
+                            <a:rPr lang="en-US" sz="1400" i="0">
+                              <a:solidFill>
+                                <a:srgbClr val="1A1A1A"/>
+                              </a:solidFill>
+                              <a:latin typeface="Cambria Math" panose="02040503050406030204" pitchFamily="18" charset="0"/>
+                            </a:rPr>
+                            <m:t>)</m:t>
+                          </m:r>
+                        </m:num>
+                        <m:den>
+                          <m:r>
+                            <a:rPr lang="en-US" sz="1400" i="0">
+                              <a:solidFill>
+                                <a:srgbClr val="1A1A1A"/>
+                              </a:solidFill>
+                              <a:latin typeface="Cambria Math" panose="02040503050406030204" pitchFamily="18" charset="0"/>
+                            </a:rPr>
+                            <m:t>1</m:t>
+                          </m:r>
+                          <m:r>
+                            <m:rPr>
+                              <m:sty m:val="p"/>
+                            </m:rPr>
+                            <a:rPr lang="en-US" sz="1400" i="0">
+                              <a:solidFill>
+                                <a:srgbClr val="1A1A1A"/>
+                              </a:solidFill>
+                              <a:latin typeface="Cambria Math" panose="02040503050406030204" pitchFamily="18" charset="0"/>
+                            </a:rPr>
+                            <m:t>−</m:t>
+                          </m:r>
+                          <m:sSup>
+                            <m:e>
+                              <m:r>
+                                <m:rPr>
+                                  <m:sty m:val="p"/>
+                                </m:rPr>
+                                <a:rPr lang="en-US" sz="1400" i="0">
+                                  <a:solidFill>
+                                    <a:srgbClr val="1A1A1A"/>
+                                  </a:solidFill>
+                                  <a:latin typeface="Cambria Math" panose="02040503050406030204" pitchFamily="18" charset="0"/>
+                                </a:rPr>
+                                <m:t>Γ</m:t>
+                              </m:r>
+                            </m:e>
+                            <m:sup>
+                              <m:r>
+                                <a:rPr lang="en-US" sz="1400" i="0">
+                                  <a:solidFill>
+                                    <a:srgbClr val="1A1A1A"/>
+                                  </a:solidFill>
+                                  <a:latin typeface="Cambria Math" panose="02040503050406030204" pitchFamily="18" charset="0"/>
+                                </a:rPr>
+                                <m:t>2</m:t>
+                              </m:r>
+                            </m:sup>
+                          </m:sSup>
+                          <m:sSup>
+                            <m:e>
+                              <m:r>
+                                <a:rPr lang="en-US" sz="1400" i="1">
+                                  <a:solidFill>
+                                    <a:srgbClr val="1A1A1A"/>
+                                  </a:solidFill>
+                                  <a:latin typeface="Cambria Math" panose="02040503050406030204" pitchFamily="18" charset="0"/>
+                                </a:rPr>
+                                <m:t>𝑒</m:t>
+                              </m:r>
+                            </m:e>
+                            <m:sup>
+                              <m:r>
+                                <m:rPr>
+                                  <m:sty m:val="p"/>
+                                </m:rPr>
+                                <a:rPr lang="en-US" sz="1400" i="0">
+                                  <a:solidFill>
+                                    <a:srgbClr val="1A1A1A"/>
+                                  </a:solidFill>
+                                  <a:latin typeface="Cambria Math" panose="02040503050406030204" pitchFamily="18" charset="0"/>
+                                </a:rPr>
+                                <m:t>−</m:t>
+                              </m:r>
+                              <m:r>
+                                <a:rPr lang="en-US" sz="1400" i="0">
+                                  <a:solidFill>
+                                    <a:srgbClr val="1A1A1A"/>
+                                  </a:solidFill>
+                                  <a:latin typeface="Cambria Math" panose="02040503050406030204" pitchFamily="18" charset="0"/>
+                                </a:rPr>
+                                <m:t>2</m:t>
+                              </m:r>
+                              <m:r>
+                                <a:rPr lang="en-US" sz="1400" i="1">
+                                  <a:solidFill>
+                                    <a:srgbClr val="1A1A1A"/>
+                                  </a:solidFill>
+                                  <a:latin typeface="Cambria Math" panose="02040503050406030204" pitchFamily="18" charset="0"/>
+                                </a:rPr>
+                                <m:t>𝛾</m:t>
+                              </m:r>
+                              <m:r>
+                                <a:rPr lang="en-US" sz="1400" i="1">
+                                  <a:solidFill>
+                                    <a:srgbClr val="1A1A1A"/>
+                                  </a:solidFill>
+                                  <a:latin typeface="Cambria Math" panose="02040503050406030204" pitchFamily="18" charset="0"/>
+                                </a:rPr>
+                                <m:t>𝐿</m:t>
+                              </m:r>
+                            </m:sup>
+                          </m:sSup>
+                        </m:den>
+                      </m:f>
+                      <m:r>
+                        <m:rPr>
+                          <m:sty m:val="p"/>
+                        </m:rPr>
+                        <a:rPr lang="en-US" sz="1400" i="0">
+                          <a:solidFill>
+                            <a:srgbClr val="1A1A1A"/>
+                          </a:solidFill>
+                          <a:latin typeface="Cambria Math" panose="02040503050406030204" pitchFamily="18" charset="0"/>
+                        </a:rPr>
+                        <m:t>,</m:t>
+                      </m:r>
+                      <m:r>
+                        <a:rPr lang="en-US" sz="1400" i="0">
+                          <a:solidFill>
+                            <a:srgbClr val="1A1A1A"/>
+                          </a:solidFill>
+                          <a:latin typeface="Cambria Math" panose="02040503050406030204" pitchFamily="18" charset="0"/>
+                        </a:rPr>
+                        <m:t>  </m:t>
+                      </m:r>
+                      <m:sSub>
+                        <m:e>
+                          <m:r>
+                            <a:rPr lang="en-US" sz="1400" i="1">
+                              <a:solidFill>
+                                <a:srgbClr val="1A1A1A"/>
+                              </a:solidFill>
+                              <a:latin typeface="Cambria Math" panose="02040503050406030204" pitchFamily="18" charset="0"/>
+                            </a:rPr>
+                            <m:t>𝑆</m:t>
+                          </m:r>
+                        </m:e>
+                        <m:sub>
+                          <m:r>
+                            <a:rPr lang="en-US" sz="1400" i="0">
+                              <a:solidFill>
+                                <a:srgbClr val="1A1A1A"/>
+                              </a:solidFill>
+                              <a:latin typeface="Cambria Math" panose="02040503050406030204" pitchFamily="18" charset="0"/>
+                            </a:rPr>
+                            <m:t>21</m:t>
+                          </m:r>
+                        </m:sub>
+                      </m:sSub>
+                      <m:r>
+                        <m:rPr>
+                          <m:sty m:val="p"/>
+                        </m:rPr>
+                        <a:rPr lang="en-US" sz="1400" i="0">
+                          <a:solidFill>
+                            <a:srgbClr val="1A1A1A"/>
+                          </a:solidFill>
+                          <a:latin typeface="Cambria Math" panose="02040503050406030204" pitchFamily="18" charset="0"/>
+                        </a:rPr>
+                        <m:t>=</m:t>
+                      </m:r>
+                      <m:sSub>
+                        <m:e>
+                          <m:r>
+                            <a:rPr lang="en-US" sz="1400" i="1">
+                              <a:solidFill>
+                                <a:srgbClr val="1A1A1A"/>
+                              </a:solidFill>
+                              <a:latin typeface="Cambria Math" panose="02040503050406030204" pitchFamily="18" charset="0"/>
+                            </a:rPr>
+                            <m:t>𝑆</m:t>
+                          </m:r>
+                        </m:e>
+                        <m:sub>
+                          <m:r>
+                            <a:rPr lang="en-US" sz="1400" i="0">
+                              <a:solidFill>
+                                <a:srgbClr val="1A1A1A"/>
+                              </a:solidFill>
+                              <a:latin typeface="Cambria Math" panose="02040503050406030204" pitchFamily="18" charset="0"/>
+                            </a:rPr>
+                            <m:t>12</m:t>
+                          </m:r>
+                        </m:sub>
+                      </m:sSub>
+                      <m:r>
+                        <m:rPr>
+                          <m:sty m:val="p"/>
+                        </m:rPr>
+                        <a:rPr lang="en-US" sz="1400" i="0">
+                          <a:solidFill>
+                            <a:srgbClr val="1A1A1A"/>
+                          </a:solidFill>
+                          <a:latin typeface="Cambria Math" panose="02040503050406030204" pitchFamily="18" charset="0"/>
+                        </a:rPr>
+                        <m:t>=</m:t>
+                      </m:r>
+                      <m:f>
+                        <m:fPr>
+                          <m:type m:val="bar"/>
+                        </m:fPr>
+                        <m:num>
+                          <m:r>
+                            <m:rPr>
+                              <m:sty m:val="p"/>
+                            </m:rPr>
+                            <a:rPr lang="en-US" sz="1400" i="0">
+                              <a:solidFill>
+                                <a:srgbClr val="1A1A1A"/>
+                              </a:solidFill>
+                              <a:latin typeface="Cambria Math" panose="02040503050406030204" pitchFamily="18" charset="0"/>
+                            </a:rPr>
+                            <m:t>(</m:t>
+                          </m:r>
+                          <m:r>
+                            <a:rPr lang="en-US" sz="1400" i="0">
+                              <a:solidFill>
+                                <a:srgbClr val="1A1A1A"/>
+                              </a:solidFill>
+                              <a:latin typeface="Cambria Math" panose="02040503050406030204" pitchFamily="18" charset="0"/>
+                            </a:rPr>
+                            <m:t>1</m:t>
+                          </m:r>
+                          <m:r>
+                            <m:rPr>
+                              <m:sty m:val="p"/>
+                            </m:rPr>
+                            <a:rPr lang="en-US" sz="1400" i="0">
+                              <a:solidFill>
+                                <a:srgbClr val="1A1A1A"/>
+                              </a:solidFill>
+                              <a:latin typeface="Cambria Math" panose="02040503050406030204" pitchFamily="18" charset="0"/>
+                            </a:rPr>
+                            <m:t>−</m:t>
+                          </m:r>
+                          <m:sSup>
+                            <m:e>
+                              <m:r>
+                                <m:rPr>
+                                  <m:sty m:val="p"/>
+                                </m:rPr>
+                                <a:rPr lang="en-US" sz="1400" i="0">
+                                  <a:solidFill>
+                                    <a:srgbClr val="1A1A1A"/>
+                                  </a:solidFill>
+                                  <a:latin typeface="Cambria Math" panose="02040503050406030204" pitchFamily="18" charset="0"/>
+                                </a:rPr>
+                                <m:t>Γ</m:t>
+                              </m:r>
+                            </m:e>
+                            <m:sup>
+                              <m:r>
+                                <a:rPr lang="en-US" sz="1400" i="0">
+                                  <a:solidFill>
+                                    <a:srgbClr val="1A1A1A"/>
+                                  </a:solidFill>
+                                  <a:latin typeface="Cambria Math" panose="02040503050406030204" pitchFamily="18" charset="0"/>
+                                </a:rPr>
+                                <m:t>2</m:t>
+                              </m:r>
+                            </m:sup>
+                          </m:sSup>
+                          <m:r>
+                            <m:rPr>
+                              <m:sty m:val="p"/>
+                            </m:rPr>
+                            <a:rPr lang="en-US" sz="1400" i="0">
+                              <a:solidFill>
+                                <a:srgbClr val="1A1A1A"/>
+                              </a:solidFill>
+                              <a:latin typeface="Cambria Math" panose="02040503050406030204" pitchFamily="18" charset="0"/>
+                            </a:rPr>
+                            <m:t>)</m:t>
+                          </m:r>
+                          <m:r>
+                            <a:rPr lang="en-US" sz="1400" i="0">
+                              <a:solidFill>
+                                <a:srgbClr val="1A1A1A"/>
+                              </a:solidFill>
+                              <a:latin typeface="Cambria Math" panose="02040503050406030204" pitchFamily="18" charset="0"/>
+                            </a:rPr>
+                            <m:t> </m:t>
+                          </m:r>
+                          <m:sSup>
+                            <m:e>
+                              <m:r>
+                                <a:rPr lang="en-US" sz="1400" i="1">
+                                  <a:solidFill>
+                                    <a:srgbClr val="1A1A1A"/>
+                                  </a:solidFill>
+                                  <a:latin typeface="Cambria Math" panose="02040503050406030204" pitchFamily="18" charset="0"/>
+                                </a:rPr>
+                                <m:t>𝑒</m:t>
+                              </m:r>
+                            </m:e>
+                            <m:sup>
+                              <m:r>
+                                <m:rPr>
+                                  <m:sty m:val="p"/>
+                                </m:rPr>
+                                <a:rPr lang="en-US" sz="1400" i="0">
+                                  <a:solidFill>
+                                    <a:srgbClr val="1A1A1A"/>
+                                  </a:solidFill>
+                                  <a:latin typeface="Cambria Math" panose="02040503050406030204" pitchFamily="18" charset="0"/>
+                                </a:rPr>
+                                <m:t>−</m:t>
+                              </m:r>
+                              <m:r>
+                                <a:rPr lang="en-US" sz="1400" i="1">
+                                  <a:solidFill>
+                                    <a:srgbClr val="1A1A1A"/>
+                                  </a:solidFill>
+                                  <a:latin typeface="Cambria Math" panose="02040503050406030204" pitchFamily="18" charset="0"/>
+                                </a:rPr>
+                                <m:t>𝛾</m:t>
+                              </m:r>
+                              <m:r>
+                                <a:rPr lang="en-US" sz="1400" i="1">
+                                  <a:solidFill>
+                                    <a:srgbClr val="1A1A1A"/>
+                                  </a:solidFill>
+                                  <a:latin typeface="Cambria Math" panose="02040503050406030204" pitchFamily="18" charset="0"/>
+                                </a:rPr>
+                                <m:t>𝐿</m:t>
+                              </m:r>
+                            </m:sup>
+                          </m:sSup>
+                        </m:num>
+                        <m:den>
+                          <m:r>
+                            <a:rPr lang="en-US" sz="1400" i="0">
+                              <a:solidFill>
+                                <a:srgbClr val="1A1A1A"/>
+                              </a:solidFill>
+                              <a:latin typeface="Cambria Math" panose="02040503050406030204" pitchFamily="18" charset="0"/>
+                            </a:rPr>
+                            <m:t>1</m:t>
+                          </m:r>
+                          <m:r>
+                            <m:rPr>
+                              <m:sty m:val="p"/>
+                            </m:rPr>
+                            <a:rPr lang="en-US" sz="1400" i="0">
+                              <a:solidFill>
+                                <a:srgbClr val="1A1A1A"/>
+                              </a:solidFill>
+                              <a:latin typeface="Cambria Math" panose="02040503050406030204" pitchFamily="18" charset="0"/>
+                            </a:rPr>
+                            <m:t>−</m:t>
+                          </m:r>
+                          <m:sSup>
+                            <m:e>
+                              <m:r>
+                                <m:rPr>
+                                  <m:sty m:val="p"/>
+                                </m:rPr>
+                                <a:rPr lang="en-US" sz="1400" i="0">
+                                  <a:solidFill>
+                                    <a:srgbClr val="1A1A1A"/>
+                                  </a:solidFill>
+                                  <a:latin typeface="Cambria Math" panose="02040503050406030204" pitchFamily="18" charset="0"/>
+                                </a:rPr>
+                                <m:t>Γ</m:t>
+                              </m:r>
+                            </m:e>
+                            <m:sup>
+                              <m:r>
+                                <a:rPr lang="en-US" sz="1400" i="0">
+                                  <a:solidFill>
+                                    <a:srgbClr val="1A1A1A"/>
+                                  </a:solidFill>
+                                  <a:latin typeface="Cambria Math" panose="02040503050406030204" pitchFamily="18" charset="0"/>
+                                </a:rPr>
+                                <m:t>2</m:t>
+                              </m:r>
+                            </m:sup>
+                          </m:sSup>
+                          <m:sSup>
+                            <m:e>
+                              <m:r>
+                                <a:rPr lang="en-US" sz="1400" i="1">
+                                  <a:solidFill>
+                                    <a:srgbClr val="1A1A1A"/>
+                                  </a:solidFill>
+                                  <a:latin typeface="Cambria Math" panose="02040503050406030204" pitchFamily="18" charset="0"/>
+                                </a:rPr>
+                                <m:t>𝑒</m:t>
+                              </m:r>
+                            </m:e>
+                            <m:sup>
+                              <m:r>
+                                <m:rPr>
+                                  <m:sty m:val="p"/>
+                                </m:rPr>
+                                <a:rPr lang="en-US" sz="1400" i="0">
+                                  <a:solidFill>
+                                    <a:srgbClr val="1A1A1A"/>
+                                  </a:solidFill>
+                                  <a:latin typeface="Cambria Math" panose="02040503050406030204" pitchFamily="18" charset="0"/>
+                                </a:rPr>
+                                <m:t>−</m:t>
+                              </m:r>
+                              <m:r>
+                                <a:rPr lang="en-US" sz="1400" i="0">
+                                  <a:solidFill>
+                                    <a:srgbClr val="1A1A1A"/>
+                                  </a:solidFill>
+                                  <a:latin typeface="Cambria Math" panose="02040503050406030204" pitchFamily="18" charset="0"/>
+                                </a:rPr>
+                                <m:t>2</m:t>
+                              </m:r>
+                              <m:r>
+                                <a:rPr lang="en-US" sz="1400" i="1">
+                                  <a:solidFill>
+                                    <a:srgbClr val="1A1A1A"/>
+                                  </a:solidFill>
+                                  <a:latin typeface="Cambria Math" panose="02040503050406030204" pitchFamily="18" charset="0"/>
+                                </a:rPr>
+                                <m:t>𝛾</m:t>
+                              </m:r>
+                              <m:r>
+                                <a:rPr lang="en-US" sz="1400" i="1">
+                                  <a:solidFill>
+                                    <a:srgbClr val="1A1A1A"/>
+                                  </a:solidFill>
+                                  <a:latin typeface="Cambria Math" panose="02040503050406030204" pitchFamily="18" charset="0"/>
+                                </a:rPr>
+                                <m:t>𝐿</m:t>
+                              </m:r>
+                            </m:sup>
+                          </m:sSup>
+                        </m:den>
+                      </m:f>
+                    </m:oMath>
+                  </m:oMathPara>
+                </a14:m>
+                <a:endParaRPr lang="en-US" sz="1400"/>
+              </a:p>
+            </p:txBody>
+          </p:sp>
+        </mc:Choice>
+        <mc:Fallback>
+          <p:sp>
+            <p:nvSpPr>
+              <p:cNvPr id="5" name="Equation 5"/>
+              <p:cNvSpPr txBox="1">
+                <a:spLocks noRot="1" noChangeAspect="1" noMove="1" noResize="1" noEditPoints="1" noAdjustHandles="1" noChangeArrowheads="1" noChangeShapeType="1" noTextEdit="1"/>
+              </p:cNvSpPr>
+              <p:nvPr/>
+            </p:nvSpPr>
+            <p:spPr>
+              <a:xfrm>
+                <a:off x="914400" y="2270760"/>
+                <a:ext cx="3986784" cy="484632"/>
+              </a:xfrm>
+              <a:prstGeom prst="rect">
+                <a:avLst/>
+              </a:prstGeom>
+              <a:blipFill>
+                <a:blip r:embed="rId3"/>
+                <a:stretch>
+                  <a:fillRect/>
+                </a:stretch>
+              </a:blipFill>
+            </p:spPr>
+            <p:txBody>
+              <a:bodyPr/>
+              <a:lstStyle/>
+              <a:p>
+                <a:r>
+                  <a:rPr lang="en-GB">
+                    <a:noFill/>
+                  </a:rPr>
+                  <a:t> </a:t>
+                </a:r>
+              </a:p>
+            </p:txBody>
+          </p:sp>
+        </mc:Fallback>
+      </mc:AlternateContent>
+      <p:sp>
+        <p:nvSpPr>
+          <p:cNvPr id="6" name="TextBox 5"/>
+          <p:cNvSpPr txBox="1"/>
+          <p:nvPr/>
+        </p:nvSpPr>
+        <p:spPr>
+          <a:xfrm>
+            <a:off x="685800" y="2938272"/>
+            <a:ext cx="10515600" cy="274320"/>
+          </a:xfrm>
+          <a:prstGeom prst="rect">
+            <a:avLst/>
+          </a:prstGeom>
+          <a:noFill/>
+        </p:spPr>
+        <p:txBody>
+          <a:bodyPr wrap="square" lIns="27432" rIns="27432" tIns="18288" bIns="18288" anchor="t">
+            <a:spAutoFit/>
+          </a:bodyPr>
+          <a:lstStyle/>
+          <a:p>
+            <a:pPr algn="l">
+              <a:spcAft>
+                <a:spcPts val="400"/>
+              </a:spcAft>
+            </a:pPr>
+            <a:r>
+              <a:rPr sz="1300" b="1" i="0">
+                <a:solidFill>
+                  <a:srgbClr val="0E2268"/>
+                </a:solidFill>
+                <a:latin typeface="Arial"/>
+              </a:rPr>
+              <a:t>Voltage seen by the light (one per arm, its own n</a:t>
+            </a:r>
+            <a:r>
+              <a:rPr sz="1300" b="1" i="0" baseline="-25000">
+                <a:solidFill>
+                  <a:srgbClr val="0E2268"/>
+                </a:solidFill>
+                <a:latin typeface="Arial"/>
+              </a:rPr>
+              <a:t>g</a:t>
+            </a:r>
+            <a:r>
+              <a:rPr sz="1300" b="1" i="0">
+                <a:solidFill>
+                  <a:srgbClr val="0E2268"/>
+                </a:solidFill>
+                <a:latin typeface="Arial"/>
+              </a:rPr>
+              <a:t>) and far end</a:t>
+            </a:r>
+          </a:p>
+        </p:txBody>
+      </p:sp>
+      <mc:AlternateContent xmlns:mc="http://schemas.openxmlformats.org/markup-compatibility/2006" xmlns:a14="http://schemas.microsoft.com/office/drawing/2010/main">
+        <mc:Choice Requires="a14">
+          <p:sp>
+            <p:nvSpPr>
+              <p:cNvPr id="7" name="Equation 7"/>
+              <p:cNvSpPr txBox="1"/>
+              <p:nvPr/>
+            </p:nvSpPr>
+            <p:spPr>
+              <a:xfrm>
+                <a:off x="914400" y="3267456"/>
+                <a:ext cx="2916936" cy="390144"/>
+              </a:xfrm>
+              <a:prstGeom prst="rect">
+                <a:avLst/>
+              </a:prstGeom>
+              <a:noFill/>
+            </p:spPr>
+            <p:txBody>
+              <a:bodyPr wrap="none" lIns="0" tIns="0" rIns="0" bIns="0">
+                <a:spAutoFit/>
+              </a:bodyPr>
+              <a:lstStyle/>
+              <a:p>
+                <a:pPr algn="l"/>
+                <a14:m>
+                  <m:oMathPara xmlns:m="http://schemas.openxmlformats.org/officeDocument/2006/math">
+                    <m:oMathParaPr>
+                      <m:jc m:val="left"/>
+                    </m:oMathParaPr>
+                    <m:oMath>
+                      <m:r>
+                        <a:rPr lang="en-US" sz="1400" i="1">
+                          <a:solidFill>
+                            <a:srgbClr val="1A1A1A"/>
+                          </a:solidFill>
+                          <a:latin typeface="Cambria Math" panose="02040503050406030204" pitchFamily="18" charset="0"/>
+                        </a:rPr>
+                        <m:t>𝑉</m:t>
+                      </m:r>
+                      <m:r>
+                        <m:rPr>
+                          <m:sty m:val="p"/>
+                        </m:rPr>
+                        <a:rPr lang="en-US" sz="1400" i="0">
+                          <a:solidFill>
+                            <a:srgbClr val="1A1A1A"/>
+                          </a:solidFill>
+                          <a:latin typeface="Cambria Math" panose="02040503050406030204" pitchFamily="18" charset="0"/>
+                        </a:rPr>
+                        <m:t>(</m:t>
+                      </m:r>
+                      <m:r>
+                        <a:rPr lang="en-US" sz="1400" i="1">
+                          <a:solidFill>
+                            <a:srgbClr val="1A1A1A"/>
+                          </a:solidFill>
+                          <a:latin typeface="Cambria Math" panose="02040503050406030204" pitchFamily="18" charset="0"/>
+                        </a:rPr>
+                        <m:t>𝑧</m:t>
+                      </m:r>
+                      <m:r>
+                        <m:rPr>
+                          <m:sty m:val="p"/>
+                        </m:rPr>
+                        <a:rPr lang="en-US" sz="1400" i="0">
+                          <a:solidFill>
+                            <a:srgbClr val="1A1A1A"/>
+                          </a:solidFill>
+                          <a:latin typeface="Cambria Math" panose="02040503050406030204" pitchFamily="18" charset="0"/>
+                        </a:rPr>
+                        <m:t>)</m:t>
+                      </m:r>
+                      <m:r>
+                        <m:rPr>
+                          <m:sty m:val="p"/>
+                        </m:rPr>
+                        <a:rPr lang="en-US" sz="1400" i="0">
+                          <a:solidFill>
+                            <a:srgbClr val="1A1A1A"/>
+                          </a:solidFill>
+                          <a:latin typeface="Cambria Math" panose="02040503050406030204" pitchFamily="18" charset="0"/>
+                        </a:rPr>
+                        <m:t>=</m:t>
+                      </m:r>
+                      <m:sSup>
+                        <m:e>
+                          <m:r>
+                            <a:rPr lang="en-US" sz="1400" i="1">
+                              <a:solidFill>
+                                <a:srgbClr val="1A1A1A"/>
+                              </a:solidFill>
+                              <a:latin typeface="Cambria Math" panose="02040503050406030204" pitchFamily="18" charset="0"/>
+                            </a:rPr>
+                            <m:t>𝑉</m:t>
+                          </m:r>
+                        </m:e>
+                        <m:sup>
+                          <m:r>
+                            <m:rPr>
+                              <m:sty m:val="p"/>
+                            </m:rPr>
+                            <a:rPr lang="en-US" sz="1400" i="0">
+                              <a:solidFill>
+                                <a:srgbClr val="1A1A1A"/>
+                              </a:solidFill>
+                              <a:latin typeface="Cambria Math" panose="02040503050406030204" pitchFamily="18" charset="0"/>
+                            </a:rPr>
+                            <m:t>+</m:t>
+                          </m:r>
+                        </m:sup>
+                      </m:sSup>
+                      <m:sSup>
+                        <m:e>
+                          <m:r>
+                            <a:rPr lang="en-US" sz="1400" i="1">
+                              <a:solidFill>
+                                <a:srgbClr val="1A1A1A"/>
+                              </a:solidFill>
+                              <a:latin typeface="Cambria Math" panose="02040503050406030204" pitchFamily="18" charset="0"/>
+                            </a:rPr>
+                            <m:t>𝑒</m:t>
+                          </m:r>
+                        </m:e>
+                        <m:sup>
+                          <m:r>
+                            <m:rPr>
+                              <m:sty m:val="p"/>
+                            </m:rPr>
+                            <a:rPr lang="en-US" sz="1400" i="0">
+                              <a:solidFill>
+                                <a:srgbClr val="1A1A1A"/>
+                              </a:solidFill>
+                              <a:latin typeface="Cambria Math" panose="02040503050406030204" pitchFamily="18" charset="0"/>
+                            </a:rPr>
+                            <m:t>−</m:t>
+                          </m:r>
+                          <m:r>
+                            <a:rPr lang="en-US" sz="1400" i="1">
+                              <a:solidFill>
+                                <a:srgbClr val="1A1A1A"/>
+                              </a:solidFill>
+                              <a:latin typeface="Cambria Math" panose="02040503050406030204" pitchFamily="18" charset="0"/>
+                            </a:rPr>
+                            <m:t>𝛾</m:t>
+                          </m:r>
+                          <m:r>
+                            <a:rPr lang="en-US" sz="1400" i="1">
+                              <a:solidFill>
+                                <a:srgbClr val="1A1A1A"/>
+                              </a:solidFill>
+                              <a:latin typeface="Cambria Math" panose="02040503050406030204" pitchFamily="18" charset="0"/>
+                            </a:rPr>
+                            <m:t>𝑧</m:t>
+                          </m:r>
+                        </m:sup>
+                      </m:sSup>
+                      <m:r>
+                        <m:rPr>
+                          <m:sty m:val="p"/>
+                        </m:rPr>
+                        <a:rPr lang="en-US" sz="1400" i="0">
+                          <a:solidFill>
+                            <a:srgbClr val="1A1A1A"/>
+                          </a:solidFill>
+                          <a:latin typeface="Cambria Math" panose="02040503050406030204" pitchFamily="18" charset="0"/>
+                        </a:rPr>
+                        <m:t>+</m:t>
+                      </m:r>
+                      <m:sSup>
+                        <m:e>
+                          <m:r>
+                            <a:rPr lang="en-US" sz="1400" i="1">
+                              <a:solidFill>
+                                <a:srgbClr val="1A1A1A"/>
+                              </a:solidFill>
+                              <a:latin typeface="Cambria Math" panose="02040503050406030204" pitchFamily="18" charset="0"/>
+                            </a:rPr>
+                            <m:t>𝑉</m:t>
+                          </m:r>
+                        </m:e>
+                        <m:sup>
+                          <m:r>
+                            <m:rPr>
+                              <m:sty m:val="p"/>
+                            </m:rPr>
+                            <a:rPr lang="en-US" sz="1400" i="0">
+                              <a:solidFill>
+                                <a:srgbClr val="1A1A1A"/>
+                              </a:solidFill>
+                              <a:latin typeface="Cambria Math" panose="02040503050406030204" pitchFamily="18" charset="0"/>
+                            </a:rPr>
+                            <m:t>−</m:t>
+                          </m:r>
+                        </m:sup>
+                      </m:sSup>
+                      <m:sSup>
+                        <m:e>
+                          <m:r>
+                            <a:rPr lang="en-US" sz="1400" i="1">
+                              <a:solidFill>
+                                <a:srgbClr val="1A1A1A"/>
+                              </a:solidFill>
+                              <a:latin typeface="Cambria Math" panose="02040503050406030204" pitchFamily="18" charset="0"/>
+                            </a:rPr>
+                            <m:t>𝑒</m:t>
+                          </m:r>
+                        </m:e>
+                        <m:sup>
+                          <m:r>
+                            <m:rPr>
+                              <m:sty m:val="p"/>
+                            </m:rPr>
+                            <a:rPr lang="en-US" sz="1400" i="0">
+                              <a:solidFill>
+                                <a:srgbClr val="1A1A1A"/>
+                              </a:solidFill>
+                              <a:latin typeface="Cambria Math" panose="02040503050406030204" pitchFamily="18" charset="0"/>
+                            </a:rPr>
+                            <m:t>+</m:t>
+                          </m:r>
+                          <m:r>
+                            <a:rPr lang="en-US" sz="1400" i="1">
+                              <a:solidFill>
+                                <a:srgbClr val="1A1A1A"/>
+                              </a:solidFill>
+                              <a:latin typeface="Cambria Math" panose="02040503050406030204" pitchFamily="18" charset="0"/>
+                            </a:rPr>
+                            <m:t>𝛾</m:t>
+                          </m:r>
+                          <m:r>
+                            <a:rPr lang="en-US" sz="1400" i="1">
+                              <a:solidFill>
+                                <a:srgbClr val="1A1A1A"/>
+                              </a:solidFill>
+                              <a:latin typeface="Cambria Math" panose="02040503050406030204" pitchFamily="18" charset="0"/>
+                            </a:rPr>
+                            <m:t>𝑧</m:t>
+                          </m:r>
+                        </m:sup>
+                      </m:sSup>
+                      <m:r>
+                        <m:rPr>
+                          <m:sty m:val="p"/>
+                        </m:rPr>
+                        <a:rPr lang="en-US" sz="1400" i="0">
+                          <a:solidFill>
+                            <a:srgbClr val="1A1A1A"/>
+                          </a:solidFill>
+                          <a:latin typeface="Cambria Math" panose="02040503050406030204" pitchFamily="18" charset="0"/>
+                        </a:rPr>
+                        <m:t>,</m:t>
+                      </m:r>
+                      <m:r>
+                        <a:rPr lang="en-US" sz="1400" i="0">
+                          <a:solidFill>
+                            <a:srgbClr val="1A1A1A"/>
+                          </a:solidFill>
+                          <a:latin typeface="Cambria Math" panose="02040503050406030204" pitchFamily="18" charset="0"/>
+                        </a:rPr>
+                        <m:t>  </m:t>
+                      </m:r>
+                      <m:sSub>
+                        <m:e>
+                          <m:r>
+                            <a:rPr lang="en-US" sz="1400" i="1">
+                              <a:solidFill>
+                                <a:srgbClr val="1A1A1A"/>
+                              </a:solidFill>
+                              <a:latin typeface="Cambria Math" panose="02040503050406030204" pitchFamily="18" charset="0"/>
+                            </a:rPr>
+                            <m:t>𝛽</m:t>
+                          </m:r>
+                        </m:e>
+                        <m:sub>
+                          <m:r>
+                            <a:rPr lang="en-US" sz="1400" i="1">
+                              <a:solidFill>
+                                <a:srgbClr val="1A1A1A"/>
+                              </a:solidFill>
+                              <a:latin typeface="Cambria Math" panose="02040503050406030204" pitchFamily="18" charset="0"/>
+                            </a:rPr>
+                            <m:t>𝑜</m:t>
+                          </m:r>
+                        </m:sub>
+                      </m:sSub>
+                      <m:r>
+                        <m:rPr>
+                          <m:sty m:val="p"/>
+                        </m:rPr>
+                        <a:rPr lang="en-US" sz="1400" i="0">
+                          <a:solidFill>
+                            <a:srgbClr val="1A1A1A"/>
+                          </a:solidFill>
+                          <a:latin typeface="Cambria Math" panose="02040503050406030204" pitchFamily="18" charset="0"/>
+                        </a:rPr>
+                        <m:t>=</m:t>
+                      </m:r>
+                      <m:f>
+                        <m:fPr>
+                          <m:type m:val="bar"/>
+                        </m:fPr>
+                        <m:num>
+                          <m:r>
+                            <a:rPr lang="en-US" sz="1400" i="1">
+                              <a:solidFill>
+                                <a:srgbClr val="1A1A1A"/>
+                              </a:solidFill>
+                              <a:latin typeface="Cambria Math" panose="02040503050406030204" pitchFamily="18" charset="0"/>
+                            </a:rPr>
+                            <m:t>𝜔</m:t>
+                          </m:r>
+                          <m:sSub>
+                            <m:e>
+                              <m:r>
+                                <a:rPr lang="en-US" sz="1400" i="1">
+                                  <a:solidFill>
+                                    <a:srgbClr val="1A1A1A"/>
+                                  </a:solidFill>
+                                  <a:latin typeface="Cambria Math" panose="02040503050406030204" pitchFamily="18" charset="0"/>
+                                </a:rPr>
+                                <m:t>𝑛</m:t>
+                              </m:r>
+                            </m:e>
+                            <m:sub>
+                              <m:r>
+                                <a:rPr lang="en-US" sz="1400" i="1">
+                                  <a:solidFill>
+                                    <a:srgbClr val="1A1A1A"/>
+                                  </a:solidFill>
+                                  <a:latin typeface="Cambria Math" panose="02040503050406030204" pitchFamily="18" charset="0"/>
+                                </a:rPr>
+                                <m:t>𝑔</m:t>
+                              </m:r>
+                            </m:sub>
+                          </m:sSub>
+                        </m:num>
+                        <m:den>
+                          <m:r>
+                            <a:rPr lang="en-US" sz="1400" i="1">
+                              <a:solidFill>
+                                <a:srgbClr val="1A1A1A"/>
+                              </a:solidFill>
+                              <a:latin typeface="Cambria Math" panose="02040503050406030204" pitchFamily="18" charset="0"/>
+                            </a:rPr>
+                            <m:t>𝑐</m:t>
+                          </m:r>
+                        </m:den>
+                      </m:f>
+                    </m:oMath>
+                  </m:oMathPara>
+                </a14:m>
+                <a:endParaRPr lang="en-US" sz="1400"/>
+              </a:p>
+            </p:txBody>
+          </p:sp>
+        </mc:Choice>
+        <mc:Fallback>
+          <p:sp>
+            <p:nvSpPr>
+              <p:cNvPr id="7" name="Equation 7"/>
+              <p:cNvSpPr txBox="1">
+                <a:spLocks noRot="1" noChangeAspect="1" noMove="1" noResize="1" noEditPoints="1" noAdjustHandles="1" noChangeArrowheads="1" noChangeShapeType="1" noTextEdit="1"/>
+              </p:cNvSpPr>
+              <p:nvPr/>
+            </p:nvSpPr>
+            <p:spPr>
+              <a:xfrm>
+                <a:off x="914400" y="3267456"/>
+                <a:ext cx="2916936" cy="390144"/>
+              </a:xfrm>
+              <a:prstGeom prst="rect">
+                <a:avLst/>
+              </a:prstGeom>
+              <a:blipFill>
+                <a:blip r:embed="rId4"/>
+                <a:stretch>
+                  <a:fillRect/>
+                </a:stretch>
+              </a:blipFill>
+            </p:spPr>
+            <p:txBody>
+              <a:bodyPr/>
+              <a:lstStyle/>
+              <a:p>
+                <a:r>
+                  <a:rPr lang="en-GB">
+                    <a:noFill/>
+                  </a:rPr>
+                  <a:t> </a:t>
+                </a:r>
+              </a:p>
+            </p:txBody>
+          </p:sp>
+        </mc:Fallback>
+      </mc:AlternateContent>
+      <mc:AlternateContent xmlns:mc="http://schemas.openxmlformats.org/markup-compatibility/2006" xmlns:a14="http://schemas.microsoft.com/office/drawing/2010/main">
+        <mc:Choice Requires="a14">
+          <p:sp>
+            <p:nvSpPr>
+              <p:cNvPr id="8" name="Equation 8"/>
+              <p:cNvSpPr txBox="1"/>
+              <p:nvPr/>
+            </p:nvSpPr>
+            <p:spPr>
+              <a:xfrm>
+                <a:off x="914400" y="3730752"/>
+                <a:ext cx="3203448" cy="466344"/>
+              </a:xfrm>
+              <a:prstGeom prst="rect">
+                <a:avLst/>
+              </a:prstGeom>
+              <a:noFill/>
+            </p:spPr>
+            <p:txBody>
+              <a:bodyPr wrap="none" lIns="0" tIns="0" rIns="0" bIns="0">
+                <a:spAutoFit/>
+              </a:bodyPr>
+              <a:lstStyle/>
+              <a:p>
+                <a:pPr algn="l"/>
+                <a14:m>
+                  <m:oMathPara xmlns:m="http://schemas.openxmlformats.org/officeDocument/2006/math">
+                    <m:oMathParaPr>
+                      <m:jc m:val="left"/>
+                    </m:oMathParaPr>
+                    <m:oMath>
+                      <m:sSub>
+                        <m:e>
+                          <m:r>
+                            <a:rPr lang="en-US" sz="1400" i="1">
+                              <a:solidFill>
+                                <a:srgbClr val="1A1A1A"/>
+                              </a:solidFill>
+                              <a:latin typeface="Cambria Math" panose="02040503050406030204" pitchFamily="18" charset="0"/>
+                            </a:rPr>
+                            <m:t>𝑉</m:t>
+                          </m:r>
+                        </m:e>
+                        <m:sub>
+                          <m:r>
+                            <a:rPr lang="en-US" sz="1400" i="1">
+                              <a:solidFill>
+                                <a:srgbClr val="1A1A1A"/>
+                              </a:solidFill>
+                              <a:latin typeface="Cambria Math" panose="02040503050406030204" pitchFamily="18" charset="0"/>
+                            </a:rPr>
+                            <m:t>𝑚</m:t>
+                          </m:r>
+                          <m:r>
+                            <a:rPr lang="en-US" sz="1400" i="1">
+                              <a:solidFill>
+                                <a:srgbClr val="1A1A1A"/>
+                              </a:solidFill>
+                              <a:latin typeface="Cambria Math" panose="02040503050406030204" pitchFamily="18" charset="0"/>
+                            </a:rPr>
+                            <m:t>𝑜</m:t>
+                          </m:r>
+                          <m:r>
+                            <a:rPr lang="en-US" sz="1400" i="1">
+                              <a:solidFill>
+                                <a:srgbClr val="1A1A1A"/>
+                              </a:solidFill>
+                              <a:latin typeface="Cambria Math" panose="02040503050406030204" pitchFamily="18" charset="0"/>
+                            </a:rPr>
+                            <m:t>𝑑</m:t>
+                          </m:r>
+                        </m:sub>
+                      </m:sSub>
+                      <m:r>
+                        <m:rPr>
+                          <m:sty m:val="p"/>
+                        </m:rPr>
+                        <a:rPr lang="en-US" sz="1400" i="0">
+                          <a:solidFill>
+                            <a:srgbClr val="1A1A1A"/>
+                          </a:solidFill>
+                          <a:latin typeface="Cambria Math" panose="02040503050406030204" pitchFamily="18" charset="0"/>
+                        </a:rPr>
+                        <m:t>=</m:t>
+                      </m:r>
+                      <m:f>
+                        <m:fPr>
+                          <m:type m:val="bar"/>
+                        </m:fPr>
+                        <m:num>
+                          <m:sSup>
+                            <m:e>
+                              <m:r>
+                                <a:rPr lang="en-US" sz="1400" i="1">
+                                  <a:solidFill>
+                                    <a:srgbClr val="1A1A1A"/>
+                                  </a:solidFill>
+                                  <a:latin typeface="Cambria Math" panose="02040503050406030204" pitchFamily="18" charset="0"/>
+                                </a:rPr>
+                                <m:t>𝑒</m:t>
+                              </m:r>
+                            </m:e>
+                            <m:sup>
+                              <m:r>
+                                <m:rPr>
+                                  <m:sty m:val="p"/>
+                                </m:rPr>
+                                <a:rPr lang="en-US" sz="1400" i="0">
+                                  <a:solidFill>
+                                    <a:srgbClr val="1A1A1A"/>
+                                  </a:solidFill>
+                                  <a:latin typeface="Cambria Math" panose="02040503050406030204" pitchFamily="18" charset="0"/>
+                                </a:rPr>
+                                <m:t>−</m:t>
+                              </m:r>
+                              <m:r>
+                                <a:rPr lang="en-US" sz="1400" i="1">
+                                  <a:solidFill>
+                                    <a:srgbClr val="1A1A1A"/>
+                                  </a:solidFill>
+                                  <a:latin typeface="Cambria Math" panose="02040503050406030204" pitchFamily="18" charset="0"/>
+                                </a:rPr>
+                                <m:t>𝑗</m:t>
+                              </m:r>
+                              <m:sSub>
+                                <m:e>
+                                  <m:r>
+                                    <a:rPr lang="en-US" sz="1400" i="1">
+                                      <a:solidFill>
+                                        <a:srgbClr val="1A1A1A"/>
+                                      </a:solidFill>
+                                      <a:latin typeface="Cambria Math" panose="02040503050406030204" pitchFamily="18" charset="0"/>
+                                    </a:rPr>
+                                    <m:t>𝛽</m:t>
+                                  </m:r>
+                                </m:e>
+                                <m:sub>
+                                  <m:r>
+                                    <a:rPr lang="en-US" sz="1400" i="1">
+                                      <a:solidFill>
+                                        <a:srgbClr val="1A1A1A"/>
+                                      </a:solidFill>
+                                      <a:latin typeface="Cambria Math" panose="02040503050406030204" pitchFamily="18" charset="0"/>
+                                    </a:rPr>
+                                    <m:t>𝑜</m:t>
+                                  </m:r>
+                                </m:sub>
+                              </m:sSub>
+                              <m:r>
+                                <a:rPr lang="en-US" sz="1400" i="1">
+                                  <a:solidFill>
+                                    <a:srgbClr val="1A1A1A"/>
+                                  </a:solidFill>
+                                  <a:latin typeface="Cambria Math" panose="02040503050406030204" pitchFamily="18" charset="0"/>
+                                </a:rPr>
+                                <m:t>𝐿</m:t>
+                              </m:r>
+                            </m:sup>
+                          </m:sSup>
+                        </m:num>
+                        <m:den>
+                          <m:r>
+                            <a:rPr lang="en-US" sz="1400" i="1">
+                              <a:solidFill>
+                                <a:srgbClr val="1A1A1A"/>
+                              </a:solidFill>
+                              <a:latin typeface="Cambria Math" panose="02040503050406030204" pitchFamily="18" charset="0"/>
+                            </a:rPr>
+                            <m:t>𝐿</m:t>
+                          </m:r>
+                        </m:den>
+                      </m:f>
+                      <m:nary>
+                        <m:naryPr>
+                          <m:chr m:val="∫"/>
+                          <m:limLoc m:val="subSup"/>
+                          <m:subHide m:val="off"/>
+                          <m:supHide m:val="off"/>
+                        </m:naryPr>
+                        <m:sub>
+                          <m:r>
+                            <a:rPr lang="en-US" sz="1400" i="0">
+                              <a:solidFill>
+                                <a:srgbClr val="1A1A1A"/>
+                              </a:solidFill>
+                              <a:latin typeface="Cambria Math" panose="02040503050406030204" pitchFamily="18" charset="0"/>
+                            </a:rPr>
+                            <m:t>0</m:t>
+                          </m:r>
+                        </m:sub>
+                        <m:sup>
+                          <m:r>
+                            <a:rPr lang="en-US" sz="1400" i="1">
+                              <a:solidFill>
+                                <a:srgbClr val="1A1A1A"/>
+                              </a:solidFill>
+                              <a:latin typeface="Cambria Math" panose="02040503050406030204" pitchFamily="18" charset="0"/>
+                            </a:rPr>
+                            <m:t>𝐿</m:t>
+                          </m:r>
+                        </m:sup>
+                        <m:e>
+                          <m:r>
+                            <a:rPr lang="en-US" sz="1400" i="1">
+                              <a:solidFill>
+                                <a:srgbClr val="1A1A1A"/>
+                              </a:solidFill>
+                              <a:latin typeface="Cambria Math" panose="02040503050406030204" pitchFamily="18" charset="0"/>
+                            </a:rPr>
+                            <m:t>𝑉</m:t>
+                          </m:r>
+                        </m:e>
+                      </m:nary>
+                      <m:r>
+                        <m:rPr>
+                          <m:sty m:val="p"/>
+                        </m:rPr>
+                        <a:rPr lang="en-US" sz="1400" i="0">
+                          <a:solidFill>
+                            <a:srgbClr val="1A1A1A"/>
+                          </a:solidFill>
+                          <a:latin typeface="Cambria Math" panose="02040503050406030204" pitchFamily="18" charset="0"/>
+                        </a:rPr>
+                        <m:t>(</m:t>
+                      </m:r>
+                      <m:r>
+                        <a:rPr lang="en-US" sz="1400" i="1">
+                          <a:solidFill>
+                            <a:srgbClr val="1A1A1A"/>
+                          </a:solidFill>
+                          <a:latin typeface="Cambria Math" panose="02040503050406030204" pitchFamily="18" charset="0"/>
+                        </a:rPr>
+                        <m:t>𝑧</m:t>
+                      </m:r>
+                      <m:r>
+                        <m:rPr>
+                          <m:sty m:val="p"/>
+                        </m:rPr>
+                        <a:rPr lang="en-US" sz="1400" i="0">
+                          <a:solidFill>
+                            <a:srgbClr val="1A1A1A"/>
+                          </a:solidFill>
+                          <a:latin typeface="Cambria Math" panose="02040503050406030204" pitchFamily="18" charset="0"/>
+                        </a:rPr>
+                        <m:t>)</m:t>
+                      </m:r>
+                      <m:r>
+                        <a:rPr lang="en-US" sz="1400" i="0">
+                          <a:solidFill>
+                            <a:srgbClr val="1A1A1A"/>
+                          </a:solidFill>
+                          <a:latin typeface="Cambria Math" panose="02040503050406030204" pitchFamily="18" charset="0"/>
+                        </a:rPr>
+                        <m:t> </m:t>
+                      </m:r>
+                      <m:sSup>
+                        <m:e>
+                          <m:r>
+                            <a:rPr lang="en-US" sz="1400" i="1">
+                              <a:solidFill>
+                                <a:srgbClr val="1A1A1A"/>
+                              </a:solidFill>
+                              <a:latin typeface="Cambria Math" panose="02040503050406030204" pitchFamily="18" charset="0"/>
+                            </a:rPr>
+                            <m:t>𝑒</m:t>
+                          </m:r>
+                        </m:e>
+                        <m:sup>
+                          <m:r>
+                            <a:rPr lang="en-US" sz="1400" i="1">
+                              <a:solidFill>
+                                <a:srgbClr val="1A1A1A"/>
+                              </a:solidFill>
+                              <a:latin typeface="Cambria Math" panose="02040503050406030204" pitchFamily="18" charset="0"/>
+                            </a:rPr>
+                            <m:t>𝑗</m:t>
+                          </m:r>
+                          <m:sSub>
+                            <m:e>
+                              <m:r>
+                                <a:rPr lang="en-US" sz="1400" i="1">
+                                  <a:solidFill>
+                                    <a:srgbClr val="1A1A1A"/>
+                                  </a:solidFill>
+                                  <a:latin typeface="Cambria Math" panose="02040503050406030204" pitchFamily="18" charset="0"/>
+                                </a:rPr>
+                                <m:t>𝛽</m:t>
+                              </m:r>
+                            </m:e>
+                            <m:sub>
+                              <m:r>
+                                <a:rPr lang="en-US" sz="1400" i="1">
+                                  <a:solidFill>
+                                    <a:srgbClr val="1A1A1A"/>
+                                  </a:solidFill>
+                                  <a:latin typeface="Cambria Math" panose="02040503050406030204" pitchFamily="18" charset="0"/>
+                                </a:rPr>
+                                <m:t>𝑜</m:t>
+                              </m:r>
+                            </m:sub>
+                          </m:sSub>
+                          <m:r>
+                            <a:rPr lang="en-US" sz="1400" i="1">
+                              <a:solidFill>
+                                <a:srgbClr val="1A1A1A"/>
+                              </a:solidFill>
+                              <a:latin typeface="Cambria Math" panose="02040503050406030204" pitchFamily="18" charset="0"/>
+                            </a:rPr>
+                            <m:t>𝑧</m:t>
+                          </m:r>
+                        </m:sup>
+                      </m:sSup>
+                      <m:r>
+                        <a:rPr lang="en-US" sz="1400" i="0">
+                          <a:solidFill>
+                            <a:srgbClr val="1A1A1A"/>
+                          </a:solidFill>
+                          <a:latin typeface="Cambria Math" panose="02040503050406030204" pitchFamily="18" charset="0"/>
+                        </a:rPr>
+                        <m:t> </m:t>
+                      </m:r>
+                      <m:r>
+                        <a:rPr lang="en-US" sz="1400" i="1">
+                          <a:solidFill>
+                            <a:srgbClr val="1A1A1A"/>
+                          </a:solidFill>
+                          <a:latin typeface="Cambria Math" panose="02040503050406030204" pitchFamily="18" charset="0"/>
+                        </a:rPr>
+                        <m:t>𝑑</m:t>
+                      </m:r>
+                      <m:r>
+                        <a:rPr lang="en-US" sz="1400" i="1">
+                          <a:solidFill>
+                            <a:srgbClr val="1A1A1A"/>
+                          </a:solidFill>
+                          <a:latin typeface="Cambria Math" panose="02040503050406030204" pitchFamily="18" charset="0"/>
+                        </a:rPr>
+                        <m:t>𝑧</m:t>
+                      </m:r>
+                      <m:r>
+                        <m:rPr>
+                          <m:sty m:val="p"/>
+                        </m:rPr>
+                        <a:rPr lang="en-US" sz="1400" i="0">
+                          <a:solidFill>
+                            <a:srgbClr val="1A1A1A"/>
+                          </a:solidFill>
+                          <a:latin typeface="Cambria Math" panose="02040503050406030204" pitchFamily="18" charset="0"/>
+                        </a:rPr>
+                        <m:t>,</m:t>
+                      </m:r>
+                      <m:r>
+                        <a:rPr lang="en-US" sz="1400" i="0">
+                          <a:solidFill>
+                            <a:srgbClr val="1A1A1A"/>
+                          </a:solidFill>
+                          <a:latin typeface="Cambria Math" panose="02040503050406030204" pitchFamily="18" charset="0"/>
+                        </a:rPr>
+                        <m:t>  </m:t>
+                      </m:r>
+                      <m:sSub>
+                        <m:e>
+                          <m:r>
+                            <a:rPr lang="en-US" sz="1400" i="1">
+                              <a:solidFill>
+                                <a:srgbClr val="1A1A1A"/>
+                              </a:solidFill>
+                              <a:latin typeface="Cambria Math" panose="02040503050406030204" pitchFamily="18" charset="0"/>
+                            </a:rPr>
+                            <m:t>𝑉</m:t>
+                          </m:r>
+                        </m:e>
+                        <m:sub>
+                          <m:r>
+                            <a:rPr lang="en-US" sz="1400" i="1">
+                              <a:solidFill>
+                                <a:srgbClr val="1A1A1A"/>
+                              </a:solidFill>
+                              <a:latin typeface="Cambria Math" panose="02040503050406030204" pitchFamily="18" charset="0"/>
+                            </a:rPr>
+                            <m:t>𝑓</m:t>
+                          </m:r>
+                          <m:r>
+                            <a:rPr lang="en-US" sz="1400" i="1">
+                              <a:solidFill>
+                                <a:srgbClr val="1A1A1A"/>
+                              </a:solidFill>
+                              <a:latin typeface="Cambria Math" panose="02040503050406030204" pitchFamily="18" charset="0"/>
+                            </a:rPr>
+                            <m:t>𝑎</m:t>
+                          </m:r>
+                          <m:r>
+                            <a:rPr lang="en-US" sz="1400" i="1">
+                              <a:solidFill>
+                                <a:srgbClr val="1A1A1A"/>
+                              </a:solidFill>
+                              <a:latin typeface="Cambria Math" panose="02040503050406030204" pitchFamily="18" charset="0"/>
+                            </a:rPr>
+                            <m:t>𝑟</m:t>
+                          </m:r>
+                        </m:sub>
+                      </m:sSub>
+                      <m:r>
+                        <m:rPr>
+                          <m:sty m:val="p"/>
+                        </m:rPr>
+                        <a:rPr lang="en-US" sz="1400" i="0">
+                          <a:solidFill>
+                            <a:srgbClr val="1A1A1A"/>
+                          </a:solidFill>
+                          <a:latin typeface="Cambria Math" panose="02040503050406030204" pitchFamily="18" charset="0"/>
+                        </a:rPr>
+                        <m:t>=</m:t>
+                      </m:r>
+                      <m:r>
+                        <a:rPr lang="en-US" sz="1400" i="1">
+                          <a:solidFill>
+                            <a:srgbClr val="1A1A1A"/>
+                          </a:solidFill>
+                          <a:latin typeface="Cambria Math" panose="02040503050406030204" pitchFamily="18" charset="0"/>
+                        </a:rPr>
+                        <m:t>𝑉</m:t>
+                      </m:r>
+                      <m:r>
+                        <m:rPr>
+                          <m:sty m:val="p"/>
+                        </m:rPr>
+                        <a:rPr lang="en-US" sz="1400" i="0">
+                          <a:solidFill>
+                            <a:srgbClr val="1A1A1A"/>
+                          </a:solidFill>
+                          <a:latin typeface="Cambria Math" panose="02040503050406030204" pitchFamily="18" charset="0"/>
+                        </a:rPr>
+                        <m:t>(</m:t>
+                      </m:r>
+                      <m:r>
+                        <a:rPr lang="en-US" sz="1400" i="1">
+                          <a:solidFill>
+                            <a:srgbClr val="1A1A1A"/>
+                          </a:solidFill>
+                          <a:latin typeface="Cambria Math" panose="02040503050406030204" pitchFamily="18" charset="0"/>
+                        </a:rPr>
+                        <m:t>𝐿</m:t>
+                      </m:r>
+                      <m:r>
+                        <m:rPr>
+                          <m:sty m:val="p"/>
+                        </m:rPr>
+                        <a:rPr lang="en-US" sz="1400" i="0">
+                          <a:solidFill>
+                            <a:srgbClr val="1A1A1A"/>
+                          </a:solidFill>
+                          <a:latin typeface="Cambria Math" panose="02040503050406030204" pitchFamily="18" charset="0"/>
+                        </a:rPr>
+                        <m:t>)</m:t>
+                      </m:r>
+                    </m:oMath>
+                  </m:oMathPara>
+                </a14:m>
+                <a:endParaRPr lang="en-US" sz="1400"/>
+              </a:p>
+            </p:txBody>
+          </p:sp>
+        </mc:Choice>
+        <mc:Fallback>
+          <p:sp>
+            <p:nvSpPr>
+              <p:cNvPr id="8" name="Equation 8"/>
+              <p:cNvSpPr txBox="1">
+                <a:spLocks noRot="1" noChangeAspect="1" noMove="1" noResize="1" noEditPoints="1" noAdjustHandles="1" noChangeArrowheads="1" noChangeShapeType="1" noTextEdit="1"/>
+              </p:cNvSpPr>
+              <p:nvPr/>
+            </p:nvSpPr>
+            <p:spPr>
+              <a:xfrm>
+                <a:off x="914400" y="3730752"/>
+                <a:ext cx="3203448" cy="466344"/>
+              </a:xfrm>
+              <a:prstGeom prst="rect">
+                <a:avLst/>
+              </a:prstGeom>
+              <a:blipFill>
+                <a:blip r:embed="rId5"/>
+                <a:stretch>
+                  <a:fillRect/>
+                </a:stretch>
+              </a:blipFill>
+            </p:spPr>
+            <p:txBody>
+              <a:bodyPr/>
+              <a:lstStyle/>
+              <a:p>
+                <a:r>
+                  <a:rPr lang="en-GB">
+                    <a:noFill/>
+                  </a:rPr>
+                  <a:t> </a:t>
+                </a:r>
+              </a:p>
+            </p:txBody>
+          </p:sp>
+        </mc:Fallback>
+      </mc:AlternateContent>
+      <p:sp>
+        <p:nvSpPr>
+          <p:cNvPr id="9" name="TextBox 8"/>
+          <p:cNvSpPr txBox="1"/>
+          <p:nvPr/>
+        </p:nvSpPr>
+        <p:spPr>
+          <a:xfrm>
+            <a:off x="685800" y="4379976"/>
+            <a:ext cx="10515600" cy="274320"/>
+          </a:xfrm>
+          <a:prstGeom prst="rect">
+            <a:avLst/>
+          </a:prstGeom>
+          <a:noFill/>
+        </p:spPr>
+        <p:txBody>
+          <a:bodyPr wrap="square" lIns="27432" rIns="27432" tIns="18288" bIns="18288" anchor="t">
+            <a:spAutoFit/>
+          </a:bodyPr>
+          <a:lstStyle/>
+          <a:p>
+            <a:pPr algn="l">
+              <a:spcAft>
+                <a:spcPts val="400"/>
+              </a:spcAft>
+            </a:pPr>
+            <a:r>
+              <a:rPr sz="1300" b="1" i="0">
+                <a:solidFill>
+                  <a:srgbClr val="0E2268"/>
+                </a:solidFill>
+                <a:latin typeface="Arial"/>
+              </a:rPr>
+              <a:t>Source and termination: R + L + C</a:t>
+            </a:r>
+          </a:p>
+        </p:txBody>
+      </p:sp>
+      <mc:AlternateContent xmlns:mc="http://schemas.openxmlformats.org/markup-compatibility/2006" xmlns:a14="http://schemas.microsoft.com/office/drawing/2010/main">
+        <mc:Choice Requires="a14">
+          <p:sp>
+            <p:nvSpPr>
+              <p:cNvPr id="10" name="Equation 10"/>
+              <p:cNvSpPr txBox="1"/>
+              <p:nvPr/>
+            </p:nvSpPr>
+            <p:spPr>
+              <a:xfrm>
+                <a:off x="914400" y="4709160"/>
+                <a:ext cx="5090160" cy="472440"/>
+              </a:xfrm>
+              <a:prstGeom prst="rect">
+                <a:avLst/>
+              </a:prstGeom>
+              <a:noFill/>
+            </p:spPr>
+            <p:txBody>
+              <a:bodyPr wrap="none" lIns="0" tIns="0" rIns="0" bIns="0">
+                <a:spAutoFit/>
+              </a:bodyPr>
+              <a:lstStyle/>
+              <a:p>
+                <a:pPr algn="l"/>
+                <a14:m>
+                  <m:oMathPara xmlns:m="http://schemas.openxmlformats.org/officeDocument/2006/math">
+                    <m:oMathParaPr>
+                      <m:jc m:val="left"/>
+                    </m:oMathParaPr>
+                    <m:oMath>
+                      <m:r>
+                        <a:rPr lang="en-US" sz="1400" i="1">
+                          <a:solidFill>
+                            <a:srgbClr val="1A1A1A"/>
+                          </a:solidFill>
+                          <a:latin typeface="Cambria Math" panose="02040503050406030204" pitchFamily="18" charset="0"/>
+                        </a:rPr>
+                        <m:t>𝑍</m:t>
+                      </m:r>
+                      <m:r>
+                        <m:rPr>
+                          <m:sty m:val="p"/>
+                        </m:rPr>
+                        <a:rPr lang="en-US" sz="1400" i="0">
+                          <a:solidFill>
+                            <a:srgbClr val="1A1A1A"/>
+                          </a:solidFill>
+                          <a:latin typeface="Cambria Math" panose="02040503050406030204" pitchFamily="18" charset="0"/>
+                        </a:rPr>
+                        <m:t>=</m:t>
+                      </m:r>
+                      <m:r>
+                        <m:rPr>
+                          <m:sty m:val="p"/>
+                        </m:rPr>
+                        <a:rPr lang="en-US" sz="1400" i="0">
+                          <a:solidFill>
+                            <a:srgbClr val="1A1A1A"/>
+                          </a:solidFill>
+                          <a:latin typeface="Cambria Math" panose="02040503050406030204" pitchFamily="18" charset="0"/>
+                        </a:rPr>
+                        <m:t>(</m:t>
+                      </m:r>
+                      <m:r>
+                        <a:rPr lang="en-US" sz="1400" i="1">
+                          <a:solidFill>
+                            <a:srgbClr val="1A1A1A"/>
+                          </a:solidFill>
+                          <a:latin typeface="Cambria Math" panose="02040503050406030204" pitchFamily="18" charset="0"/>
+                        </a:rPr>
+                        <m:t>𝑅</m:t>
+                      </m:r>
+                      <m:r>
+                        <m:rPr>
+                          <m:sty m:val="p"/>
+                        </m:rPr>
+                        <a:rPr lang="en-US" sz="1400" i="0">
+                          <a:solidFill>
+                            <a:srgbClr val="1A1A1A"/>
+                          </a:solidFill>
+                          <a:latin typeface="Cambria Math" panose="02040503050406030204" pitchFamily="18" charset="0"/>
+                        </a:rPr>
+                        <m:t>+</m:t>
+                      </m:r>
+                      <m:r>
+                        <a:rPr lang="en-US" sz="1400" i="1">
+                          <a:solidFill>
+                            <a:srgbClr val="1A1A1A"/>
+                          </a:solidFill>
+                          <a:latin typeface="Cambria Math" panose="02040503050406030204" pitchFamily="18" charset="0"/>
+                        </a:rPr>
+                        <m:t>𝑗</m:t>
+                      </m:r>
+                      <m:r>
+                        <a:rPr lang="en-US" sz="1400" i="1">
+                          <a:solidFill>
+                            <a:srgbClr val="1A1A1A"/>
+                          </a:solidFill>
+                          <a:latin typeface="Cambria Math" panose="02040503050406030204" pitchFamily="18" charset="0"/>
+                        </a:rPr>
+                        <m:t>𝜔</m:t>
+                      </m:r>
+                      <m:r>
+                        <a:rPr lang="en-US" sz="1400" i="1">
+                          <a:solidFill>
+                            <a:srgbClr val="1A1A1A"/>
+                          </a:solidFill>
+                          <a:latin typeface="Cambria Math" panose="02040503050406030204" pitchFamily="18" charset="0"/>
+                        </a:rPr>
+                        <m:t>𝐿</m:t>
+                      </m:r>
+                      <m:r>
+                        <m:rPr>
+                          <m:sty m:val="p"/>
+                        </m:rPr>
+                        <a:rPr lang="en-US" sz="1400" i="0">
+                          <a:solidFill>
+                            <a:srgbClr val="1A1A1A"/>
+                          </a:solidFill>
+                          <a:latin typeface="Cambria Math" panose="02040503050406030204" pitchFamily="18" charset="0"/>
+                        </a:rPr>
+                        <m:t>)</m:t>
+                      </m:r>
+                      <m:r>
+                        <m:rPr>
+                          <m:sty m:val="p"/>
+                        </m:rPr>
+                        <a:rPr lang="en-US" sz="1400" i="0">
+                          <a:solidFill>
+                            <a:srgbClr val="1A1A1A"/>
+                          </a:solidFill>
+                          <a:latin typeface="Cambria Math" panose="02040503050406030204" pitchFamily="18" charset="0"/>
+                        </a:rPr>
+                        <m:t>∥</m:t>
+                      </m:r>
+                      <m:f>
+                        <m:fPr>
+                          <m:type m:val="bar"/>
+                        </m:fPr>
+                        <m:num>
+                          <m:r>
+                            <a:rPr lang="en-US" sz="1400" i="0">
+                              <a:solidFill>
+                                <a:srgbClr val="1A1A1A"/>
+                              </a:solidFill>
+                              <a:latin typeface="Cambria Math" panose="02040503050406030204" pitchFamily="18" charset="0"/>
+                            </a:rPr>
+                            <m:t>1</m:t>
+                          </m:r>
+                        </m:num>
+                        <m:den>
+                          <m:r>
+                            <a:rPr lang="en-US" sz="1400" i="1">
+                              <a:solidFill>
+                                <a:srgbClr val="1A1A1A"/>
+                              </a:solidFill>
+                              <a:latin typeface="Cambria Math" panose="02040503050406030204" pitchFamily="18" charset="0"/>
+                            </a:rPr>
+                            <m:t>𝑗</m:t>
+                          </m:r>
+                          <m:r>
+                            <a:rPr lang="en-US" sz="1400" i="1">
+                              <a:solidFill>
+                                <a:srgbClr val="1A1A1A"/>
+                              </a:solidFill>
+                              <a:latin typeface="Cambria Math" panose="02040503050406030204" pitchFamily="18" charset="0"/>
+                            </a:rPr>
+                            <m:t>𝜔</m:t>
+                          </m:r>
+                          <m:r>
+                            <a:rPr lang="en-US" sz="1400" i="1">
+                              <a:solidFill>
+                                <a:srgbClr val="1A1A1A"/>
+                              </a:solidFill>
+                              <a:latin typeface="Cambria Math" panose="02040503050406030204" pitchFamily="18" charset="0"/>
+                            </a:rPr>
+                            <m:t>𝐶</m:t>
+                          </m:r>
+                        </m:den>
+                      </m:f>
+                      <m:r>
+                        <m:rPr>
+                          <m:sty m:val="p"/>
+                        </m:rPr>
+                        <a:rPr lang="en-US" sz="1400" i="0">
+                          <a:solidFill>
+                            <a:srgbClr val="1A1A1A"/>
+                          </a:solidFill>
+                          <a:latin typeface="Cambria Math" panose="02040503050406030204" pitchFamily="18" charset="0"/>
+                        </a:rPr>
+                        <m:t>,</m:t>
+                      </m:r>
+                      <m:r>
+                        <a:rPr lang="en-US" sz="1400" i="0">
+                          <a:solidFill>
+                            <a:srgbClr val="1A1A1A"/>
+                          </a:solidFill>
+                          <a:latin typeface="Cambria Math" panose="02040503050406030204" pitchFamily="18" charset="0"/>
+                        </a:rPr>
+                        <m:t>  </m:t>
+                      </m:r>
+                      <m:sSub>
+                        <m:e>
+                          <m:r>
+                            <m:rPr>
+                              <m:sty m:val="p"/>
+                            </m:rPr>
+                            <a:rPr lang="en-US" sz="1400" i="0">
+                              <a:solidFill>
+                                <a:srgbClr val="1A1A1A"/>
+                              </a:solidFill>
+                              <a:latin typeface="Cambria Math" panose="02040503050406030204" pitchFamily="18" charset="0"/>
+                            </a:rPr>
+                            <m:t>Γ</m:t>
+                          </m:r>
+                        </m:e>
+                        <m:sub>
+                          <m:r>
+                            <a:rPr lang="en-US" sz="1400" i="1">
+                              <a:solidFill>
+                                <a:srgbClr val="1A1A1A"/>
+                              </a:solidFill>
+                              <a:latin typeface="Cambria Math" panose="02040503050406030204" pitchFamily="18" charset="0"/>
+                            </a:rPr>
+                            <m:t>𝑠</m:t>
+                          </m:r>
+                          <m:r>
+                            <m:rPr>
+                              <m:sty m:val="p"/>
+                            </m:rPr>
+                            <a:rPr lang="en-US" sz="1400" i="0">
+                              <a:solidFill>
+                                <a:srgbClr val="1A1A1A"/>
+                              </a:solidFill>
+                              <a:latin typeface="Cambria Math" panose="02040503050406030204" pitchFamily="18" charset="0"/>
+                            </a:rPr>
+                            <m:t>,</m:t>
+                          </m:r>
+                          <m:r>
+                            <a:rPr lang="en-US" sz="1400" i="1">
+                              <a:solidFill>
+                                <a:srgbClr val="1A1A1A"/>
+                              </a:solidFill>
+                              <a:latin typeface="Cambria Math" panose="02040503050406030204" pitchFamily="18" charset="0"/>
+                            </a:rPr>
+                            <m:t>𝑡</m:t>
+                          </m:r>
+                        </m:sub>
+                      </m:sSub>
+                      <m:r>
+                        <m:rPr>
+                          <m:sty m:val="p"/>
+                        </m:rPr>
+                        <a:rPr lang="en-US" sz="1400" i="0">
+                          <a:solidFill>
+                            <a:srgbClr val="1A1A1A"/>
+                          </a:solidFill>
+                          <a:latin typeface="Cambria Math" panose="02040503050406030204" pitchFamily="18" charset="0"/>
+                        </a:rPr>
+                        <m:t>=</m:t>
+                      </m:r>
+                      <m:f>
+                        <m:fPr>
+                          <m:type m:val="bar"/>
+                        </m:fPr>
+                        <m:num>
+                          <m:sSub>
+                            <m:e>
+                              <m:r>
+                                <a:rPr lang="en-US" sz="1400" i="1">
+                                  <a:solidFill>
+                                    <a:srgbClr val="1A1A1A"/>
+                                  </a:solidFill>
+                                  <a:latin typeface="Cambria Math" panose="02040503050406030204" pitchFamily="18" charset="0"/>
+                                </a:rPr>
+                                <m:t>𝑍</m:t>
+                              </m:r>
+                            </m:e>
+                            <m:sub>
+                              <m:r>
+                                <a:rPr lang="en-US" sz="1400" i="1">
+                                  <a:solidFill>
+                                    <a:srgbClr val="1A1A1A"/>
+                                  </a:solidFill>
+                                  <a:latin typeface="Cambria Math" panose="02040503050406030204" pitchFamily="18" charset="0"/>
+                                </a:rPr>
+                                <m:t>𝑠</m:t>
+                              </m:r>
+                              <m:r>
+                                <m:rPr>
+                                  <m:sty m:val="p"/>
+                                </m:rPr>
+                                <a:rPr lang="en-US" sz="1400" i="0">
+                                  <a:solidFill>
+                                    <a:srgbClr val="1A1A1A"/>
+                                  </a:solidFill>
+                                  <a:latin typeface="Cambria Math" panose="02040503050406030204" pitchFamily="18" charset="0"/>
+                                </a:rPr>
+                                <m:t>,</m:t>
+                              </m:r>
+                              <m:r>
+                                <a:rPr lang="en-US" sz="1400" i="1">
+                                  <a:solidFill>
+                                    <a:srgbClr val="1A1A1A"/>
+                                  </a:solidFill>
+                                  <a:latin typeface="Cambria Math" panose="02040503050406030204" pitchFamily="18" charset="0"/>
+                                </a:rPr>
+                                <m:t>𝑡</m:t>
+                              </m:r>
+                            </m:sub>
+                          </m:sSub>
+                          <m:r>
+                            <m:rPr>
+                              <m:sty m:val="p"/>
+                            </m:rPr>
+                            <a:rPr lang="en-US" sz="1400" i="0">
+                              <a:solidFill>
+                                <a:srgbClr val="1A1A1A"/>
+                              </a:solidFill>
+                              <a:latin typeface="Cambria Math" panose="02040503050406030204" pitchFamily="18" charset="0"/>
+                            </a:rPr>
+                            <m:t>−</m:t>
+                          </m:r>
+                          <m:sSub>
+                            <m:e>
+                              <m:r>
+                                <a:rPr lang="en-US" sz="1400" i="1">
+                                  <a:solidFill>
+                                    <a:srgbClr val="1A1A1A"/>
+                                  </a:solidFill>
+                                  <a:latin typeface="Cambria Math" panose="02040503050406030204" pitchFamily="18" charset="0"/>
+                                </a:rPr>
+                                <m:t>𝑅</m:t>
+                              </m:r>
+                            </m:e>
+                            <m:sub>
+                              <m:r>
+                                <a:rPr lang="en-US" sz="1400" i="0">
+                                  <a:solidFill>
+                                    <a:srgbClr val="1A1A1A"/>
+                                  </a:solidFill>
+                                  <a:latin typeface="Cambria Math" panose="02040503050406030204" pitchFamily="18" charset="0"/>
+                                </a:rPr>
+                                <m:t>0</m:t>
+                              </m:r>
+                            </m:sub>
+                          </m:sSub>
+                        </m:num>
+                        <m:den>
+                          <m:sSub>
+                            <m:e>
+                              <m:r>
+                                <a:rPr lang="en-US" sz="1400" i="1">
+                                  <a:solidFill>
+                                    <a:srgbClr val="1A1A1A"/>
+                                  </a:solidFill>
+                                  <a:latin typeface="Cambria Math" panose="02040503050406030204" pitchFamily="18" charset="0"/>
+                                </a:rPr>
+                                <m:t>𝑍</m:t>
+                              </m:r>
+                            </m:e>
+                            <m:sub>
+                              <m:r>
+                                <a:rPr lang="en-US" sz="1400" i="1">
+                                  <a:solidFill>
+                                    <a:srgbClr val="1A1A1A"/>
+                                  </a:solidFill>
+                                  <a:latin typeface="Cambria Math" panose="02040503050406030204" pitchFamily="18" charset="0"/>
+                                </a:rPr>
+                                <m:t>𝑠</m:t>
+                              </m:r>
+                              <m:r>
+                                <m:rPr>
+                                  <m:sty m:val="p"/>
+                                </m:rPr>
+                                <a:rPr lang="en-US" sz="1400" i="0">
+                                  <a:solidFill>
+                                    <a:srgbClr val="1A1A1A"/>
+                                  </a:solidFill>
+                                  <a:latin typeface="Cambria Math" panose="02040503050406030204" pitchFamily="18" charset="0"/>
+                                </a:rPr>
+                                <m:t>,</m:t>
+                              </m:r>
+                              <m:r>
+                                <a:rPr lang="en-US" sz="1400" i="1">
+                                  <a:solidFill>
+                                    <a:srgbClr val="1A1A1A"/>
+                                  </a:solidFill>
+                                  <a:latin typeface="Cambria Math" panose="02040503050406030204" pitchFamily="18" charset="0"/>
+                                </a:rPr>
+                                <m:t>𝑡</m:t>
+                              </m:r>
+                            </m:sub>
+                          </m:sSub>
+                          <m:r>
+                            <m:rPr>
+                              <m:sty m:val="p"/>
+                            </m:rPr>
+                            <a:rPr lang="en-US" sz="1400" i="0">
+                              <a:solidFill>
+                                <a:srgbClr val="1A1A1A"/>
+                              </a:solidFill>
+                              <a:latin typeface="Cambria Math" panose="02040503050406030204" pitchFamily="18" charset="0"/>
+                            </a:rPr>
+                            <m:t>+</m:t>
+                          </m:r>
+                          <m:sSub>
+                            <m:e>
+                              <m:r>
+                                <a:rPr lang="en-US" sz="1400" i="1">
+                                  <a:solidFill>
+                                    <a:srgbClr val="1A1A1A"/>
+                                  </a:solidFill>
+                                  <a:latin typeface="Cambria Math" panose="02040503050406030204" pitchFamily="18" charset="0"/>
+                                </a:rPr>
+                                <m:t>𝑅</m:t>
+                              </m:r>
+                            </m:e>
+                            <m:sub>
+                              <m:r>
+                                <a:rPr lang="en-US" sz="1400" i="0">
+                                  <a:solidFill>
+                                    <a:srgbClr val="1A1A1A"/>
+                                  </a:solidFill>
+                                  <a:latin typeface="Cambria Math" panose="02040503050406030204" pitchFamily="18" charset="0"/>
+                                </a:rPr>
+                                <m:t>0</m:t>
+                              </m:r>
+                            </m:sub>
+                          </m:sSub>
+                        </m:den>
+                      </m:f>
+                      <m:r>
+                        <m:rPr>
+                          <m:sty m:val="p"/>
+                        </m:rPr>
+                        <a:rPr lang="en-US" sz="1400" i="0">
+                          <a:solidFill>
+                            <a:srgbClr val="1A1A1A"/>
+                          </a:solidFill>
+                          <a:latin typeface="Cambria Math" panose="02040503050406030204" pitchFamily="18" charset="0"/>
+                        </a:rPr>
+                        <m:t>,</m:t>
+                      </m:r>
+                      <m:r>
+                        <a:rPr lang="en-US" sz="1400" i="0">
+                          <a:solidFill>
+                            <a:srgbClr val="1A1A1A"/>
+                          </a:solidFill>
+                          <a:latin typeface="Cambria Math" panose="02040503050406030204" pitchFamily="18" charset="0"/>
+                        </a:rPr>
+                        <m:t>  </m:t>
+                      </m:r>
+                      <m:sSub>
+                        <m:e>
+                          <m:r>
+                            <a:rPr lang="en-US" sz="1400" i="1">
+                              <a:solidFill>
+                                <a:srgbClr val="1A1A1A"/>
+                              </a:solidFill>
+                              <a:latin typeface="Cambria Math" panose="02040503050406030204" pitchFamily="18" charset="0"/>
+                            </a:rPr>
+                            <m:t>𝑏</m:t>
+                          </m:r>
+                        </m:e>
+                        <m:sub>
+                          <m:r>
+                            <a:rPr lang="en-US" sz="1400" i="0">
+                              <a:solidFill>
+                                <a:srgbClr val="1A1A1A"/>
+                              </a:solidFill>
+                              <a:latin typeface="Cambria Math" panose="02040503050406030204" pitchFamily="18" charset="0"/>
+                            </a:rPr>
+                            <m:t>2</m:t>
+                          </m:r>
+                        </m:sub>
+                      </m:sSub>
+                      <m:r>
+                        <m:rPr>
+                          <m:sty m:val="p"/>
+                        </m:rPr>
+                        <a:rPr lang="en-US" sz="1400" i="0">
+                          <a:solidFill>
+                            <a:srgbClr val="1A1A1A"/>
+                          </a:solidFill>
+                          <a:latin typeface="Cambria Math" panose="02040503050406030204" pitchFamily="18" charset="0"/>
+                        </a:rPr>
+                        <m:t>=</m:t>
+                      </m:r>
+                      <m:f>
+                        <m:fPr>
+                          <m:type m:val="bar"/>
+                        </m:fPr>
+                        <m:num>
+                          <m:r>
+                            <a:rPr lang="en-US" sz="1400" i="0">
+                              <a:solidFill>
+                                <a:srgbClr val="1A1A1A"/>
+                              </a:solidFill>
+                              <a:latin typeface="Cambria Math" panose="02040503050406030204" pitchFamily="18" charset="0"/>
+                            </a:rPr>
+                            <m:t>2</m:t>
+                          </m:r>
+                          <m:sSub>
+                            <m:e>
+                              <m:r>
+                                <a:rPr lang="en-US" sz="1400" i="1">
+                                  <a:solidFill>
+                                    <a:srgbClr val="1A1A1A"/>
+                                  </a:solidFill>
+                                  <a:latin typeface="Cambria Math" panose="02040503050406030204" pitchFamily="18" charset="0"/>
+                                </a:rPr>
+                                <m:t>𝑅</m:t>
+                              </m:r>
+                            </m:e>
+                            <m:sub>
+                              <m:r>
+                                <a:rPr lang="en-US" sz="1400" i="0">
+                                  <a:solidFill>
+                                    <a:srgbClr val="1A1A1A"/>
+                                  </a:solidFill>
+                                  <a:latin typeface="Cambria Math" panose="02040503050406030204" pitchFamily="18" charset="0"/>
+                                </a:rPr>
+                                <m:t>0</m:t>
+                              </m:r>
+                            </m:sub>
+                          </m:sSub>
+                        </m:num>
+                        <m:den>
+                          <m:sSub>
+                            <m:e>
+                              <m:r>
+                                <a:rPr lang="en-US" sz="1400" i="1">
+                                  <a:solidFill>
+                                    <a:srgbClr val="1A1A1A"/>
+                                  </a:solidFill>
+                                  <a:latin typeface="Cambria Math" panose="02040503050406030204" pitchFamily="18" charset="0"/>
+                                </a:rPr>
+                                <m:t>𝑍</m:t>
+                              </m:r>
+                            </m:e>
+                            <m:sub>
+                              <m:r>
+                                <a:rPr lang="en-US" sz="1400" i="1">
+                                  <a:solidFill>
+                                    <a:srgbClr val="1A1A1A"/>
+                                  </a:solidFill>
+                                  <a:latin typeface="Cambria Math" panose="02040503050406030204" pitchFamily="18" charset="0"/>
+                                </a:rPr>
+                                <m:t>𝑠</m:t>
+                              </m:r>
+                            </m:sub>
+                          </m:sSub>
+                          <m:r>
+                            <m:rPr>
+                              <m:sty m:val="p"/>
+                            </m:rPr>
+                            <a:rPr lang="en-US" sz="1400" i="0">
+                              <a:solidFill>
+                                <a:srgbClr val="1A1A1A"/>
+                              </a:solidFill>
+                              <a:latin typeface="Cambria Math" panose="02040503050406030204" pitchFamily="18" charset="0"/>
+                            </a:rPr>
+                            <m:t>+</m:t>
+                          </m:r>
+                          <m:sSub>
+                            <m:e>
+                              <m:r>
+                                <a:rPr lang="en-US" sz="1400" i="1">
+                                  <a:solidFill>
+                                    <a:srgbClr val="1A1A1A"/>
+                                  </a:solidFill>
+                                  <a:latin typeface="Cambria Math" panose="02040503050406030204" pitchFamily="18" charset="0"/>
+                                </a:rPr>
+                                <m:t>𝑅</m:t>
+                              </m:r>
+                            </m:e>
+                            <m:sub>
+                              <m:r>
+                                <a:rPr lang="en-US" sz="1400" i="0">
+                                  <a:solidFill>
+                                    <a:srgbClr val="1A1A1A"/>
+                                  </a:solidFill>
+                                  <a:latin typeface="Cambria Math" panose="02040503050406030204" pitchFamily="18" charset="0"/>
+                                </a:rPr>
+                                <m:t>0</m:t>
+                              </m:r>
+                            </m:sub>
+                          </m:sSub>
+                        </m:den>
+                      </m:f>
+                      <m:r>
+                        <a:rPr lang="en-US" sz="1400" i="0">
+                          <a:solidFill>
+                            <a:srgbClr val="1A1A1A"/>
+                          </a:solidFill>
+                          <a:latin typeface="Cambria Math" panose="02040503050406030204" pitchFamily="18" charset="0"/>
+                        </a:rPr>
+                        <m:t> </m:t>
+                      </m:r>
+                      <m:sSub>
+                        <m:e>
+                          <m:r>
+                            <a:rPr lang="en-US" sz="1400" i="1">
+                              <a:solidFill>
+                                <a:srgbClr val="1A1A1A"/>
+                              </a:solidFill>
+                              <a:latin typeface="Cambria Math" panose="02040503050406030204" pitchFamily="18" charset="0"/>
+                            </a:rPr>
+                            <m:t>𝑎</m:t>
+                          </m:r>
+                        </m:e>
+                        <m:sub>
+                          <m:r>
+                            <a:rPr lang="en-US" sz="1400" i="0">
+                              <a:solidFill>
+                                <a:srgbClr val="1A1A1A"/>
+                              </a:solidFill>
+                              <a:latin typeface="Cambria Math" panose="02040503050406030204" pitchFamily="18" charset="0"/>
+                            </a:rPr>
+                            <m:t>1</m:t>
+                          </m:r>
+                        </m:sub>
+                      </m:sSub>
+                      <m:r>
+                        <m:rPr>
+                          <m:sty m:val="p"/>
+                        </m:rPr>
+                        <a:rPr lang="en-US" sz="1400" i="0">
+                          <a:solidFill>
+                            <a:srgbClr val="1A1A1A"/>
+                          </a:solidFill>
+                          <a:latin typeface="Cambria Math" panose="02040503050406030204" pitchFamily="18" charset="0"/>
+                        </a:rPr>
+                        <m:t>+</m:t>
+                      </m:r>
+                      <m:sSub>
+                        <m:e>
+                          <m:r>
+                            <m:rPr>
+                              <m:sty m:val="p"/>
+                            </m:rPr>
+                            <a:rPr lang="en-US" sz="1400" i="0">
+                              <a:solidFill>
+                                <a:srgbClr val="1A1A1A"/>
+                              </a:solidFill>
+                              <a:latin typeface="Cambria Math" panose="02040503050406030204" pitchFamily="18" charset="0"/>
+                            </a:rPr>
+                            <m:t>Γ</m:t>
+                          </m:r>
+                        </m:e>
+                        <m:sub>
+                          <m:r>
+                            <a:rPr lang="en-US" sz="1400" i="1">
+                              <a:solidFill>
+                                <a:srgbClr val="1A1A1A"/>
+                              </a:solidFill>
+                              <a:latin typeface="Cambria Math" panose="02040503050406030204" pitchFamily="18" charset="0"/>
+                            </a:rPr>
+                            <m:t>𝑠</m:t>
+                          </m:r>
+                        </m:sub>
+                      </m:sSub>
+                      <m:r>
+                        <a:rPr lang="en-US" sz="1400" i="0">
+                          <a:solidFill>
+                            <a:srgbClr val="1A1A1A"/>
+                          </a:solidFill>
+                          <a:latin typeface="Cambria Math" panose="02040503050406030204" pitchFamily="18" charset="0"/>
+                        </a:rPr>
+                        <m:t> </m:t>
+                      </m:r>
+                      <m:sSub>
+                        <m:e>
+                          <m:r>
+                            <a:rPr lang="en-US" sz="1400" i="1">
+                              <a:solidFill>
+                                <a:srgbClr val="1A1A1A"/>
+                              </a:solidFill>
+                              <a:latin typeface="Cambria Math" panose="02040503050406030204" pitchFamily="18" charset="0"/>
+                            </a:rPr>
+                            <m:t>𝑎</m:t>
+                          </m:r>
+                        </m:e>
+                        <m:sub>
+                          <m:r>
+                            <a:rPr lang="en-US" sz="1400" i="0">
+                              <a:solidFill>
+                                <a:srgbClr val="1A1A1A"/>
+                              </a:solidFill>
+                              <a:latin typeface="Cambria Math" panose="02040503050406030204" pitchFamily="18" charset="0"/>
+                            </a:rPr>
+                            <m:t>2</m:t>
+                          </m:r>
+                        </m:sub>
+                      </m:sSub>
+                    </m:oMath>
+                  </m:oMathPara>
+                </a14:m>
+                <a:endParaRPr lang="en-US" sz="1400"/>
+              </a:p>
+            </p:txBody>
+          </p:sp>
+        </mc:Choice>
+        <mc:Fallback>
+          <p:sp>
+            <p:nvSpPr>
+              <p:cNvPr id="10" name="Equation 10"/>
+              <p:cNvSpPr txBox="1">
+                <a:spLocks noRot="1" noChangeAspect="1" noMove="1" noResize="1" noEditPoints="1" noAdjustHandles="1" noChangeArrowheads="1" noChangeShapeType="1" noTextEdit="1"/>
+              </p:cNvSpPr>
+              <p:nvPr/>
+            </p:nvSpPr>
+            <p:spPr>
+              <a:xfrm>
+                <a:off x="914400" y="4709160"/>
+                <a:ext cx="5090160" cy="472440"/>
+              </a:xfrm>
+              <a:prstGeom prst="rect">
+                <a:avLst/>
+              </a:prstGeom>
+              <a:blipFill>
+                <a:blip r:embed="rId6"/>
+                <a:stretch>
+                  <a:fillRect/>
+                </a:stretch>
+              </a:blipFill>
+            </p:spPr>
+            <p:txBody>
+              <a:bodyPr/>
+              <a:lstStyle/>
+              <a:p>
+                <a:r>
+                  <a:rPr lang="en-GB">
+                    <a:noFill/>
+                  </a:rPr>
+                  <a:t> </a:t>
+                </a:r>
+              </a:p>
+            </p:txBody>
+          </p:sp>
+        </mc:Fallback>
+      </mc:AlternateContent>
+      <p:sp>
+        <p:nvSpPr>
+          <p:cNvPr id="11" name="TextBox 10"/>
+          <p:cNvSpPr txBox="1"/>
+          <p:nvPr/>
+        </p:nvSpPr>
+        <p:spPr>
+          <a:xfrm>
+            <a:off x="685800" y="5364480"/>
+            <a:ext cx="10515600" cy="274320"/>
+          </a:xfrm>
+          <a:prstGeom prst="rect">
+            <a:avLst/>
+          </a:prstGeom>
+          <a:noFill/>
+        </p:spPr>
+        <p:txBody>
+          <a:bodyPr wrap="square" lIns="27432" rIns="27432" tIns="18288" bIns="18288" anchor="t">
+            <a:spAutoFit/>
+          </a:bodyPr>
+          <a:lstStyle/>
+          <a:p>
+            <a:pPr algn="l">
+              <a:spcAft>
+                <a:spcPts val="400"/>
+              </a:spcAft>
+            </a:pPr>
+            <a:r>
+              <a:rPr sz="1300" b="1" i="0">
+                <a:solidFill>
+                  <a:srgbClr val="0E2268"/>
+                </a:solidFill>
+                <a:latin typeface="Arial"/>
+              </a:rPr>
+              <a:t>TL electrode: cascade of K pieces, shares summed at the electrode exit</a:t>
+            </a:r>
+          </a:p>
+        </p:txBody>
+      </p:sp>
+      <mc:AlternateContent xmlns:mc="http://schemas.openxmlformats.org/markup-compatibility/2006" xmlns:a14="http://schemas.microsoft.com/office/drawing/2010/main">
+        <mc:Choice Requires="a14">
+          <p:sp>
+            <p:nvSpPr>
+              <p:cNvPr id="12" name="Equation 12"/>
+              <p:cNvSpPr txBox="1"/>
+              <p:nvPr/>
+            </p:nvSpPr>
+            <p:spPr>
+              <a:xfrm>
+                <a:off x="914400" y="5693664"/>
+                <a:ext cx="5471160" cy="457200"/>
+              </a:xfrm>
+              <a:prstGeom prst="rect">
+                <a:avLst/>
+              </a:prstGeom>
+              <a:noFill/>
+            </p:spPr>
+            <p:txBody>
+              <a:bodyPr wrap="none" lIns="0" tIns="0" rIns="0" bIns="0">
+                <a:spAutoFit/>
+              </a:bodyPr>
+              <a:lstStyle/>
+              <a:p>
+                <a:pPr algn="l"/>
+                <a14:m>
+                  <m:oMathPara xmlns:m="http://schemas.openxmlformats.org/officeDocument/2006/math">
+                    <m:oMathParaPr>
+                      <m:jc m:val="left"/>
+                    </m:oMathParaPr>
+                    <m:oMath>
+                      <m:r>
+                        <a:rPr lang="en-US" sz="1400" i="1">
+                          <a:solidFill>
+                            <a:srgbClr val="1A1A1A"/>
+                          </a:solidFill>
+                          <a:latin typeface="Cambria Math" panose="02040503050406030204" pitchFamily="18" charset="0"/>
+                        </a:rPr>
+                        <m:t>𝑇</m:t>
+                      </m:r>
+                      <m:r>
+                        <m:rPr>
+                          <m:sty m:val="p"/>
+                        </m:rPr>
+                        <a:rPr lang="en-US" sz="1400" i="0">
+                          <a:solidFill>
+                            <a:srgbClr val="1A1A1A"/>
+                          </a:solidFill>
+                          <a:latin typeface="Cambria Math" panose="02040503050406030204" pitchFamily="18" charset="0"/>
+                        </a:rPr>
+                        <m:t>=</m:t>
+                      </m:r>
+                      <m:sSub>
+                        <m:e>
+                          <m:r>
+                            <a:rPr lang="en-US" sz="1400" i="1">
+                              <a:solidFill>
+                                <a:srgbClr val="1A1A1A"/>
+                              </a:solidFill>
+                              <a:latin typeface="Cambria Math" panose="02040503050406030204" pitchFamily="18" charset="0"/>
+                            </a:rPr>
+                            <m:t>𝑇</m:t>
+                          </m:r>
+                        </m:e>
+                        <m:sub>
+                          <m:r>
+                            <a:rPr lang="en-US" sz="1400" i="0">
+                              <a:solidFill>
+                                <a:srgbClr val="1A1A1A"/>
+                              </a:solidFill>
+                              <a:latin typeface="Cambria Math" panose="02040503050406030204" pitchFamily="18" charset="0"/>
+                            </a:rPr>
+                            <m:t>1</m:t>
+                          </m:r>
+                        </m:sub>
+                      </m:sSub>
+                      <m:sSub>
+                        <m:e>
+                          <m:r>
+                            <a:rPr lang="en-US" sz="1400" i="1">
+                              <a:solidFill>
+                                <a:srgbClr val="1A1A1A"/>
+                              </a:solidFill>
+                              <a:latin typeface="Cambria Math" panose="02040503050406030204" pitchFamily="18" charset="0"/>
+                            </a:rPr>
+                            <m:t>𝑇</m:t>
+                          </m:r>
+                        </m:e>
+                        <m:sub>
+                          <m:r>
+                            <a:rPr lang="en-US" sz="1400" i="0">
+                              <a:solidFill>
+                                <a:srgbClr val="1A1A1A"/>
+                              </a:solidFill>
+                              <a:latin typeface="Cambria Math" panose="02040503050406030204" pitchFamily="18" charset="0"/>
+                            </a:rPr>
+                            <m:t>2</m:t>
+                          </m:r>
+                        </m:sub>
+                      </m:sSub>
+                      <m:r>
+                        <m:rPr>
+                          <m:sty m:val="p"/>
+                        </m:rPr>
+                        <a:rPr lang="en-US" sz="1400" i="0">
+                          <a:solidFill>
+                            <a:srgbClr val="1A1A1A"/>
+                          </a:solidFill>
+                          <a:latin typeface="Cambria Math" panose="02040503050406030204" pitchFamily="18" charset="0"/>
+                        </a:rPr>
+                        <m:t>⋯</m:t>
+                      </m:r>
+                      <m:sSub>
+                        <m:e>
+                          <m:r>
+                            <a:rPr lang="en-US" sz="1400" i="1">
+                              <a:solidFill>
+                                <a:srgbClr val="1A1A1A"/>
+                              </a:solidFill>
+                              <a:latin typeface="Cambria Math" panose="02040503050406030204" pitchFamily="18" charset="0"/>
+                            </a:rPr>
+                            <m:t>𝑇</m:t>
+                          </m:r>
+                        </m:e>
+                        <m:sub>
+                          <m:r>
+                            <a:rPr lang="en-US" sz="1400" i="1">
+                              <a:solidFill>
+                                <a:srgbClr val="1A1A1A"/>
+                              </a:solidFill>
+                              <a:latin typeface="Cambria Math" panose="02040503050406030204" pitchFamily="18" charset="0"/>
+                            </a:rPr>
+                            <m:t>𝐾</m:t>
+                          </m:r>
+                        </m:sub>
+                      </m:sSub>
+                      <m:r>
+                        <m:rPr>
+                          <m:sty m:val="p"/>
+                        </m:rPr>
+                        <a:rPr lang="en-US" sz="1400" i="0">
+                          <a:solidFill>
+                            <a:srgbClr val="1A1A1A"/>
+                          </a:solidFill>
+                          <a:latin typeface="Cambria Math" panose="02040503050406030204" pitchFamily="18" charset="0"/>
+                        </a:rPr>
+                        <m:t>,</m:t>
+                      </m:r>
+                      <m:r>
+                        <a:rPr lang="en-US" sz="1400" i="0">
+                          <a:solidFill>
+                            <a:srgbClr val="1A1A1A"/>
+                          </a:solidFill>
+                          <a:latin typeface="Cambria Math" panose="02040503050406030204" pitchFamily="18" charset="0"/>
+                        </a:rPr>
+                        <m:t>  </m:t>
+                      </m:r>
+                      <m:sSub>
+                        <m:e>
+                          <m:r>
+                            <a:rPr lang="en-US" sz="1400" i="1">
+                              <a:solidFill>
+                                <a:srgbClr val="1A1A1A"/>
+                              </a:solidFill>
+                              <a:latin typeface="Cambria Math" panose="02040503050406030204" pitchFamily="18" charset="0"/>
+                            </a:rPr>
+                            <m:t>𝑇</m:t>
+                          </m:r>
+                        </m:e>
+                        <m:sub>
+                          <m:r>
+                            <a:rPr lang="en-US" sz="1400" i="1">
+                              <a:solidFill>
+                                <a:srgbClr val="1A1A1A"/>
+                              </a:solidFill>
+                              <a:latin typeface="Cambria Math" panose="02040503050406030204" pitchFamily="18" charset="0"/>
+                            </a:rPr>
+                            <m:t>𝑘</m:t>
+                          </m:r>
+                        </m:sub>
+                      </m:sSub>
+                      <m:r>
+                        <m:rPr>
+                          <m:sty m:val="p"/>
+                        </m:rPr>
+                        <a:rPr lang="en-US" sz="1400" i="0">
+                          <a:solidFill>
+                            <a:srgbClr val="1A1A1A"/>
+                          </a:solidFill>
+                          <a:latin typeface="Cambria Math" panose="02040503050406030204" pitchFamily="18" charset="0"/>
+                        </a:rPr>
+                        <m:t>:</m:t>
+                      </m:r>
+                      <m:r>
+                        <a:rPr lang="en-US" sz="1400" i="0">
+                          <a:solidFill>
+                            <a:srgbClr val="1A1A1A"/>
+                          </a:solidFill>
+                          <a:latin typeface="Cambria Math" panose="02040503050406030204" pitchFamily="18" charset="0"/>
+                        </a:rPr>
+                        <m:t> </m:t>
+                      </m:r>
+                      <m:r>
+                        <a:rPr lang="en-US" sz="1400" i="1">
+                          <a:solidFill>
+                            <a:srgbClr val="1A1A1A"/>
+                          </a:solidFill>
+                          <a:latin typeface="Cambria Math" panose="02040503050406030204" pitchFamily="18" charset="0"/>
+                        </a:rPr>
+                        <m:t>𝐴</m:t>
+                      </m:r>
+                      <m:r>
+                        <m:rPr>
+                          <m:sty m:val="p"/>
+                        </m:rPr>
+                        <a:rPr lang="en-US" sz="1400" i="0">
+                          <a:solidFill>
+                            <a:srgbClr val="1A1A1A"/>
+                          </a:solidFill>
+                          <a:latin typeface="Cambria Math" panose="02040503050406030204" pitchFamily="18" charset="0"/>
+                        </a:rPr>
+                        <m:t>=</m:t>
+                      </m:r>
+                      <m:r>
+                        <a:rPr lang="en-US" sz="1400" i="1">
+                          <a:solidFill>
+                            <a:srgbClr val="1A1A1A"/>
+                          </a:solidFill>
+                          <a:latin typeface="Cambria Math" panose="02040503050406030204" pitchFamily="18" charset="0"/>
+                        </a:rPr>
+                        <m:t>𝐷</m:t>
+                      </m:r>
+                      <m:r>
+                        <m:rPr>
+                          <m:sty m:val="p"/>
+                        </m:rPr>
+                        <a:rPr lang="en-US" sz="1400" i="0">
+                          <a:solidFill>
+                            <a:srgbClr val="1A1A1A"/>
+                          </a:solidFill>
+                          <a:latin typeface="Cambria Math" panose="02040503050406030204" pitchFamily="18" charset="0"/>
+                        </a:rPr>
+                        <m:t>=</m:t>
+                      </m:r>
+                      <m:r>
+                        <m:rPr>
+                          <m:sty m:val="p"/>
+                        </m:rPr>
+                        <a:rPr lang="en-US" sz="1400" i="0">
+                          <a:solidFill>
+                            <a:srgbClr val="1A1A1A"/>
+                          </a:solidFill>
+                          <a:latin typeface="Cambria Math" panose="02040503050406030204" pitchFamily="18" charset="0"/>
+                        </a:rPr>
+                        <m:t>cosh</m:t>
+                      </m:r>
+                      <m:sSub>
+                        <m:e>
+                          <m:r>
+                            <a:rPr lang="en-US" sz="1400" i="1">
+                              <a:solidFill>
+                                <a:srgbClr val="1A1A1A"/>
+                              </a:solidFill>
+                              <a:latin typeface="Cambria Math" panose="02040503050406030204" pitchFamily="18" charset="0"/>
+                            </a:rPr>
+                            <m:t>𝛾</m:t>
+                          </m:r>
+                        </m:e>
+                        <m:sub>
+                          <m:r>
+                            <a:rPr lang="en-US" sz="1400" i="1">
+                              <a:solidFill>
+                                <a:srgbClr val="1A1A1A"/>
+                              </a:solidFill>
+                              <a:latin typeface="Cambria Math" panose="02040503050406030204" pitchFamily="18" charset="0"/>
+                            </a:rPr>
+                            <m:t>𝑘</m:t>
+                          </m:r>
+                        </m:sub>
+                      </m:sSub>
+                      <m:sSub>
+                        <m:e>
+                          <m:r>
+                            <a:rPr lang="en-US" sz="1400" i="1">
+                              <a:solidFill>
+                                <a:srgbClr val="1A1A1A"/>
+                              </a:solidFill>
+                              <a:latin typeface="Cambria Math" panose="02040503050406030204" pitchFamily="18" charset="0"/>
+                            </a:rPr>
+                            <m:t>𝐿</m:t>
+                          </m:r>
+                        </m:e>
+                        <m:sub>
+                          <m:r>
+                            <a:rPr lang="en-US" sz="1400" i="1">
+                              <a:solidFill>
+                                <a:srgbClr val="1A1A1A"/>
+                              </a:solidFill>
+                              <a:latin typeface="Cambria Math" panose="02040503050406030204" pitchFamily="18" charset="0"/>
+                            </a:rPr>
+                            <m:t>𝑘</m:t>
+                          </m:r>
+                        </m:sub>
+                      </m:sSub>
+                      <m:r>
+                        <m:rPr>
+                          <m:sty m:val="p"/>
+                        </m:rPr>
+                        <a:rPr lang="en-US" sz="1400" i="0">
+                          <a:solidFill>
+                            <a:srgbClr val="1A1A1A"/>
+                          </a:solidFill>
+                          <a:latin typeface="Cambria Math" panose="02040503050406030204" pitchFamily="18" charset="0"/>
+                        </a:rPr>
+                        <m:t>,</m:t>
+                      </m:r>
+                      <m:r>
+                        <a:rPr lang="en-US" sz="1400" i="0">
+                          <a:solidFill>
+                            <a:srgbClr val="1A1A1A"/>
+                          </a:solidFill>
+                          <a:latin typeface="Cambria Math" panose="02040503050406030204" pitchFamily="18" charset="0"/>
+                        </a:rPr>
+                        <m:t> </m:t>
+                      </m:r>
+                      <m:r>
+                        <a:rPr lang="en-US" sz="1400" i="0">
+                          <a:solidFill>
+                            <a:srgbClr val="1A1A1A"/>
+                          </a:solidFill>
+                          <a:latin typeface="Cambria Math" panose="02040503050406030204" pitchFamily="18" charset="0"/>
+                        </a:rPr>
+                        <m:t> </m:t>
+                      </m:r>
+                      <m:r>
+                        <a:rPr lang="en-US" sz="1400" i="1">
+                          <a:solidFill>
+                            <a:srgbClr val="1A1A1A"/>
+                          </a:solidFill>
+                          <a:latin typeface="Cambria Math" panose="02040503050406030204" pitchFamily="18" charset="0"/>
+                        </a:rPr>
+                        <m:t>𝐵</m:t>
+                      </m:r>
+                      <m:r>
+                        <m:rPr>
+                          <m:sty m:val="p"/>
+                        </m:rPr>
+                        <a:rPr lang="en-US" sz="1400" i="0">
+                          <a:solidFill>
+                            <a:srgbClr val="1A1A1A"/>
+                          </a:solidFill>
+                          <a:latin typeface="Cambria Math" panose="02040503050406030204" pitchFamily="18" charset="0"/>
+                        </a:rPr>
+                        <m:t>=</m:t>
+                      </m:r>
+                      <m:sSub>
+                        <m:e>
+                          <m:r>
+                            <a:rPr lang="en-US" sz="1400" i="1">
+                              <a:solidFill>
+                                <a:srgbClr val="1A1A1A"/>
+                              </a:solidFill>
+                              <a:latin typeface="Cambria Math" panose="02040503050406030204" pitchFamily="18" charset="0"/>
+                            </a:rPr>
+                            <m:t>𝑍</m:t>
+                          </m:r>
+                        </m:e>
+                        <m:sub>
+                          <m:r>
+                            <a:rPr lang="en-US" sz="1400" i="1">
+                              <a:solidFill>
+                                <a:srgbClr val="1A1A1A"/>
+                              </a:solidFill>
+                              <a:latin typeface="Cambria Math" panose="02040503050406030204" pitchFamily="18" charset="0"/>
+                            </a:rPr>
+                            <m:t>𝑘</m:t>
+                          </m:r>
+                        </m:sub>
+                      </m:sSub>
+                      <m:r>
+                        <m:rPr>
+                          <m:sty m:val="p"/>
+                        </m:rPr>
+                        <a:rPr lang="en-US" sz="1400" i="0">
+                          <a:solidFill>
+                            <a:srgbClr val="1A1A1A"/>
+                          </a:solidFill>
+                          <a:latin typeface="Cambria Math" panose="02040503050406030204" pitchFamily="18" charset="0"/>
+                        </a:rPr>
+                        <m:t>sinh</m:t>
+                      </m:r>
+                      <m:sSub>
+                        <m:e>
+                          <m:r>
+                            <a:rPr lang="en-US" sz="1400" i="1">
+                              <a:solidFill>
+                                <a:srgbClr val="1A1A1A"/>
+                              </a:solidFill>
+                              <a:latin typeface="Cambria Math" panose="02040503050406030204" pitchFamily="18" charset="0"/>
+                            </a:rPr>
+                            <m:t>𝛾</m:t>
+                          </m:r>
+                        </m:e>
+                        <m:sub>
+                          <m:r>
+                            <a:rPr lang="en-US" sz="1400" i="1">
+                              <a:solidFill>
+                                <a:srgbClr val="1A1A1A"/>
+                              </a:solidFill>
+                              <a:latin typeface="Cambria Math" panose="02040503050406030204" pitchFamily="18" charset="0"/>
+                            </a:rPr>
+                            <m:t>𝑘</m:t>
+                          </m:r>
+                        </m:sub>
+                      </m:sSub>
+                      <m:sSub>
+                        <m:e>
+                          <m:r>
+                            <a:rPr lang="en-US" sz="1400" i="1">
+                              <a:solidFill>
+                                <a:srgbClr val="1A1A1A"/>
+                              </a:solidFill>
+                              <a:latin typeface="Cambria Math" panose="02040503050406030204" pitchFamily="18" charset="0"/>
+                            </a:rPr>
+                            <m:t>𝐿</m:t>
+                          </m:r>
+                        </m:e>
+                        <m:sub>
+                          <m:r>
+                            <a:rPr lang="en-US" sz="1400" i="1">
+                              <a:solidFill>
+                                <a:srgbClr val="1A1A1A"/>
+                              </a:solidFill>
+                              <a:latin typeface="Cambria Math" panose="02040503050406030204" pitchFamily="18" charset="0"/>
+                            </a:rPr>
+                            <m:t>𝑘</m:t>
+                          </m:r>
+                        </m:sub>
+                      </m:sSub>
+                      <m:r>
+                        <m:rPr>
+                          <m:sty m:val="p"/>
+                        </m:rPr>
+                        <a:rPr lang="en-US" sz="1400" i="0">
+                          <a:solidFill>
+                            <a:srgbClr val="1A1A1A"/>
+                          </a:solidFill>
+                          <a:latin typeface="Cambria Math" panose="02040503050406030204" pitchFamily="18" charset="0"/>
+                        </a:rPr>
+                        <m:t>,</m:t>
+                      </m:r>
+                      <m:r>
+                        <a:rPr lang="en-US" sz="1400" i="0">
+                          <a:solidFill>
+                            <a:srgbClr val="1A1A1A"/>
+                          </a:solidFill>
+                          <a:latin typeface="Cambria Math" panose="02040503050406030204" pitchFamily="18" charset="0"/>
+                        </a:rPr>
+                        <m:t> </m:t>
+                      </m:r>
+                      <m:r>
+                        <a:rPr lang="en-US" sz="1400" i="0">
+                          <a:solidFill>
+                            <a:srgbClr val="1A1A1A"/>
+                          </a:solidFill>
+                          <a:latin typeface="Cambria Math" panose="02040503050406030204" pitchFamily="18" charset="0"/>
+                        </a:rPr>
+                        <m:t> </m:t>
+                      </m:r>
+                      <m:r>
+                        <a:rPr lang="en-US" sz="1400" i="1">
+                          <a:solidFill>
+                            <a:srgbClr val="1A1A1A"/>
+                          </a:solidFill>
+                          <a:latin typeface="Cambria Math" panose="02040503050406030204" pitchFamily="18" charset="0"/>
+                        </a:rPr>
+                        <m:t>𝐶</m:t>
+                      </m:r>
+                      <m:r>
+                        <m:rPr>
+                          <m:sty m:val="p"/>
+                        </m:rPr>
+                        <a:rPr lang="en-US" sz="1400" i="0">
+                          <a:solidFill>
+                            <a:srgbClr val="1A1A1A"/>
+                          </a:solidFill>
+                          <a:latin typeface="Cambria Math" panose="02040503050406030204" pitchFamily="18" charset="0"/>
+                        </a:rPr>
+                        <m:t>=</m:t>
+                      </m:r>
+                      <m:f>
+                        <m:fPr>
+                          <m:type m:val="bar"/>
+                        </m:fPr>
+                        <m:num>
+                          <m:r>
+                            <m:rPr>
+                              <m:sty m:val="p"/>
+                            </m:rPr>
+                            <a:rPr lang="en-US" sz="1400" i="0">
+                              <a:solidFill>
+                                <a:srgbClr val="1A1A1A"/>
+                              </a:solidFill>
+                              <a:latin typeface="Cambria Math" panose="02040503050406030204" pitchFamily="18" charset="0"/>
+                            </a:rPr>
+                            <m:t>sinh</m:t>
+                          </m:r>
+                          <m:sSub>
+                            <m:e>
+                              <m:r>
+                                <a:rPr lang="en-US" sz="1400" i="1">
+                                  <a:solidFill>
+                                    <a:srgbClr val="1A1A1A"/>
+                                  </a:solidFill>
+                                  <a:latin typeface="Cambria Math" panose="02040503050406030204" pitchFamily="18" charset="0"/>
+                                </a:rPr>
+                                <m:t>𝛾</m:t>
+                              </m:r>
+                            </m:e>
+                            <m:sub>
+                              <m:r>
+                                <a:rPr lang="en-US" sz="1400" i="1">
+                                  <a:solidFill>
+                                    <a:srgbClr val="1A1A1A"/>
+                                  </a:solidFill>
+                                  <a:latin typeface="Cambria Math" panose="02040503050406030204" pitchFamily="18" charset="0"/>
+                                </a:rPr>
+                                <m:t>𝑘</m:t>
+                              </m:r>
+                            </m:sub>
+                          </m:sSub>
+                          <m:sSub>
+                            <m:e>
+                              <m:r>
+                                <a:rPr lang="en-US" sz="1400" i="1">
+                                  <a:solidFill>
+                                    <a:srgbClr val="1A1A1A"/>
+                                  </a:solidFill>
+                                  <a:latin typeface="Cambria Math" panose="02040503050406030204" pitchFamily="18" charset="0"/>
+                                </a:rPr>
+                                <m:t>𝐿</m:t>
+                              </m:r>
+                            </m:e>
+                            <m:sub>
+                              <m:r>
+                                <a:rPr lang="en-US" sz="1400" i="1">
+                                  <a:solidFill>
+                                    <a:srgbClr val="1A1A1A"/>
+                                  </a:solidFill>
+                                  <a:latin typeface="Cambria Math" panose="02040503050406030204" pitchFamily="18" charset="0"/>
+                                </a:rPr>
+                                <m:t>𝑘</m:t>
+                              </m:r>
+                            </m:sub>
+                          </m:sSub>
+                        </m:num>
+                        <m:den>
+                          <m:sSub>
+                            <m:e>
+                              <m:r>
+                                <a:rPr lang="en-US" sz="1400" i="1">
+                                  <a:solidFill>
+                                    <a:srgbClr val="1A1A1A"/>
+                                  </a:solidFill>
+                                  <a:latin typeface="Cambria Math" panose="02040503050406030204" pitchFamily="18" charset="0"/>
+                                </a:rPr>
+                                <m:t>𝑍</m:t>
+                              </m:r>
+                            </m:e>
+                            <m:sub>
+                              <m:r>
+                                <a:rPr lang="en-US" sz="1400" i="1">
+                                  <a:solidFill>
+                                    <a:srgbClr val="1A1A1A"/>
+                                  </a:solidFill>
+                                  <a:latin typeface="Cambria Math" panose="02040503050406030204" pitchFamily="18" charset="0"/>
+                                </a:rPr>
+                                <m:t>𝑘</m:t>
+                              </m:r>
+                            </m:sub>
+                          </m:sSub>
+                        </m:den>
+                      </m:f>
+                    </m:oMath>
+                  </m:oMathPara>
+                </a14:m>
+                <a:endParaRPr lang="en-US" sz="1400"/>
+              </a:p>
+            </p:txBody>
+          </p:sp>
+        </mc:Choice>
+        <mc:Fallback>
+          <p:sp>
+            <p:nvSpPr>
+              <p:cNvPr id="12" name="Equation 12"/>
+              <p:cNvSpPr txBox="1">
+                <a:spLocks noRot="1" noChangeAspect="1" noMove="1" noResize="1" noEditPoints="1" noAdjustHandles="1" noChangeArrowheads="1" noChangeShapeType="1" noTextEdit="1"/>
+              </p:cNvSpPr>
+              <p:nvPr/>
+            </p:nvSpPr>
+            <p:spPr>
+              <a:xfrm>
+                <a:off x="914400" y="5693664"/>
+                <a:ext cx="5471160" cy="457200"/>
+              </a:xfrm>
+              <a:prstGeom prst="rect">
+                <a:avLst/>
+              </a:prstGeom>
+              <a:blipFill>
+                <a:blip r:embed="rId7"/>
+                <a:stretch>
+                  <a:fillRect/>
+                </a:stretch>
+              </a:blipFill>
+            </p:spPr>
+            <p:txBody>
+              <a:bodyPr/>
+              <a:lstStyle/>
+              <a:p>
+                <a:r>
+                  <a:rPr lang="en-GB">
+                    <a:noFill/>
+                  </a:rPr>
+                  <a:t> </a:t>
+                </a:r>
+              </a:p>
+            </p:txBody>
+          </p:sp>
+        </mc:Fallback>
+      </mc:AlternateContent>
+      <mc:AlternateContent xmlns:mc="http://schemas.openxmlformats.org/markup-compatibility/2006" xmlns:a14="http://schemas.microsoft.com/office/drawing/2010/main">
+        <mc:Choice Requires="a14">
+          <p:sp>
+            <p:nvSpPr>
+              <p:cNvPr id="13" name="Equation 13"/>
+              <p:cNvSpPr txBox="1"/>
+              <p:nvPr/>
+            </p:nvSpPr>
+            <p:spPr>
+              <a:xfrm>
+                <a:off x="914400" y="6224016"/>
+                <a:ext cx="5266944" cy="457200"/>
+              </a:xfrm>
+              <a:prstGeom prst="rect">
+                <a:avLst/>
+              </a:prstGeom>
+              <a:noFill/>
+            </p:spPr>
+            <p:txBody>
+              <a:bodyPr wrap="none" lIns="0" tIns="0" rIns="0" bIns="0">
+                <a:spAutoFit/>
+              </a:bodyPr>
+              <a:lstStyle/>
+              <a:p>
+                <a:pPr algn="l"/>
+                <a14:m>
+                  <m:oMathPara xmlns:m="http://schemas.openxmlformats.org/officeDocument/2006/math">
+                    <m:oMathParaPr>
+                      <m:jc m:val="left"/>
+                    </m:oMathParaPr>
+                    <m:oMath>
+                      <m:sSub>
+                        <m:e>
+                          <m:r>
+                            <a:rPr lang="en-US" sz="1400" i="1">
+                              <a:solidFill>
+                                <a:srgbClr val="1A1A1A"/>
+                              </a:solidFill>
+                              <a:latin typeface="Cambria Math" panose="02040503050406030204" pitchFamily="18" charset="0"/>
+                            </a:rPr>
+                            <m:t>𝑉</m:t>
+                          </m:r>
+                        </m:e>
+                        <m:sub>
+                          <m:r>
+                            <a:rPr lang="en-US" sz="1400" i="1">
+                              <a:solidFill>
+                                <a:srgbClr val="1A1A1A"/>
+                              </a:solidFill>
+                              <a:latin typeface="Cambria Math" panose="02040503050406030204" pitchFamily="18" charset="0"/>
+                            </a:rPr>
+                            <m:t>𝑚</m:t>
+                          </m:r>
+                          <m:r>
+                            <a:rPr lang="en-US" sz="1400" i="1">
+                              <a:solidFill>
+                                <a:srgbClr val="1A1A1A"/>
+                              </a:solidFill>
+                              <a:latin typeface="Cambria Math" panose="02040503050406030204" pitchFamily="18" charset="0"/>
+                            </a:rPr>
+                            <m:t>𝑜</m:t>
+                          </m:r>
+                          <m:r>
+                            <a:rPr lang="en-US" sz="1400" i="1">
+                              <a:solidFill>
+                                <a:srgbClr val="1A1A1A"/>
+                              </a:solidFill>
+                              <a:latin typeface="Cambria Math" panose="02040503050406030204" pitchFamily="18" charset="0"/>
+                            </a:rPr>
+                            <m:t>𝑑</m:t>
+                          </m:r>
+                        </m:sub>
+                      </m:sSub>
+                      <m:r>
+                        <m:rPr>
+                          <m:sty m:val="p"/>
+                        </m:rPr>
+                        <a:rPr lang="en-US" sz="1400" i="0">
+                          <a:solidFill>
+                            <a:srgbClr val="1A1A1A"/>
+                          </a:solidFill>
+                          <a:latin typeface="Cambria Math" panose="02040503050406030204" pitchFamily="18" charset="0"/>
+                        </a:rPr>
+                        <m:t>=</m:t>
+                      </m:r>
+                      <m:nary>
+                        <m:naryPr>
+                          <m:chr m:val="∑"/>
+                          <m:limLoc m:val="undOvr"/>
+                          <m:subHide m:val="off"/>
+                          <m:supHide m:val="on"/>
+                        </m:naryPr>
+                        <m:sub>
+                          <m:r>
+                            <a:rPr lang="en-US" sz="1400" i="1">
+                              <a:solidFill>
+                                <a:srgbClr val="1A1A1A"/>
+                              </a:solidFill>
+                              <a:latin typeface="Cambria Math" panose="02040503050406030204" pitchFamily="18" charset="0"/>
+                            </a:rPr>
+                            <m:t>𝑘</m:t>
+                          </m:r>
+                          <m:r>
+                            <a:rPr lang="en-US" sz="1400" i="0">
+                              <a:solidFill>
+                                <a:srgbClr val="1A1A1A"/>
+                              </a:solidFill>
+                              <a:latin typeface="Cambria Math" panose="02040503050406030204" pitchFamily="18" charset="0"/>
+                            </a:rPr>
+                            <m:t> </m:t>
+                          </m:r>
+                          <m:r>
+                            <m:rPr>
+                              <m:sty m:val="p"/>
+                            </m:rPr>
+                            <a:rPr lang="en-US" sz="1400" i="0">
+                              <a:solidFill>
+                                <a:srgbClr val="1A1A1A"/>
+                              </a:solidFill>
+                              <a:latin typeface="Cambria Math" panose="02040503050406030204" pitchFamily="18" charset="0"/>
+                            </a:rPr>
+                            <m:t>∈</m:t>
+                          </m:r>
+                          <m:r>
+                            <a:rPr lang="en-US" sz="1400" i="0">
+                              <a:solidFill>
+                                <a:srgbClr val="1A1A1A"/>
+                              </a:solidFill>
+                              <a:latin typeface="Cambria Math" panose="02040503050406030204" pitchFamily="18" charset="0"/>
+                            </a:rPr>
+                            <m:t> </m:t>
+                          </m:r>
+                          <m:r>
+                            <m:rPr>
+                              <m:sty m:val="p"/>
+                            </m:rPr>
+                            <a:rPr lang="en-US" sz="1400" i="0">
+                              <a:solidFill>
+                                <a:srgbClr val="1A1A1A"/>
+                              </a:solidFill>
+                              <a:latin typeface="Cambria Math" panose="02040503050406030204" pitchFamily="18" charset="0"/>
+                            </a:rPr>
+                            <m:t>s</m:t>
+                          </m:r>
+                          <m:r>
+                            <m:rPr>
+                              <m:sty m:val="p"/>
+                            </m:rPr>
+                            <a:rPr lang="en-US" sz="1400" i="0">
+                              <a:solidFill>
+                                <a:srgbClr val="1A1A1A"/>
+                              </a:solidFill>
+                              <a:latin typeface="Cambria Math" panose="02040503050406030204" pitchFamily="18" charset="0"/>
+                            </a:rPr>
+                            <m:t>e</m:t>
+                          </m:r>
+                          <m:r>
+                            <m:rPr>
+                              <m:sty m:val="p"/>
+                            </m:rPr>
+                            <a:rPr lang="en-US" sz="1400" i="0">
+                              <a:solidFill>
+                                <a:srgbClr val="1A1A1A"/>
+                              </a:solidFill>
+                              <a:latin typeface="Cambria Math" panose="02040503050406030204" pitchFamily="18" charset="0"/>
+                            </a:rPr>
+                            <m:t>c</m:t>
+                          </m:r>
+                          <m:r>
+                            <m:rPr>
+                              <m:sty m:val="p"/>
+                            </m:rPr>
+                            <a:rPr lang="en-US" sz="1400" i="0">
+                              <a:solidFill>
+                                <a:srgbClr val="1A1A1A"/>
+                              </a:solidFill>
+                              <a:latin typeface="Cambria Math" panose="02040503050406030204" pitchFamily="18" charset="0"/>
+                            </a:rPr>
+                            <m:t>t</m:t>
+                          </m:r>
+                          <m:r>
+                            <m:rPr>
+                              <m:sty m:val="p"/>
+                            </m:rPr>
+                            <a:rPr lang="en-US" sz="1400" i="0">
+                              <a:solidFill>
+                                <a:srgbClr val="1A1A1A"/>
+                              </a:solidFill>
+                              <a:latin typeface="Cambria Math" panose="02040503050406030204" pitchFamily="18" charset="0"/>
+                            </a:rPr>
+                            <m:t>i</m:t>
+                          </m:r>
+                          <m:r>
+                            <m:rPr>
+                              <m:sty m:val="p"/>
+                            </m:rPr>
+                            <a:rPr lang="en-US" sz="1400" i="0">
+                              <a:solidFill>
+                                <a:srgbClr val="1A1A1A"/>
+                              </a:solidFill>
+                              <a:latin typeface="Cambria Math" panose="02040503050406030204" pitchFamily="18" charset="0"/>
+                            </a:rPr>
+                            <m:t>o</m:t>
+                          </m:r>
+                          <m:r>
+                            <m:rPr>
+                              <m:sty m:val="p"/>
+                            </m:rPr>
+                            <a:rPr lang="en-US" sz="1400" i="0">
+                              <a:solidFill>
+                                <a:srgbClr val="1A1A1A"/>
+                              </a:solidFill>
+                              <a:latin typeface="Cambria Math" panose="02040503050406030204" pitchFamily="18" charset="0"/>
+                            </a:rPr>
+                            <m:t>n</m:t>
+                          </m:r>
+                          <m:r>
+                            <m:rPr>
+                              <m:sty m:val="p"/>
+                            </m:rPr>
+                            <a:rPr lang="en-US" sz="1400" i="0">
+                              <a:solidFill>
+                                <a:srgbClr val="1A1A1A"/>
+                              </a:solidFill>
+                              <a:latin typeface="Cambria Math" panose="02040503050406030204" pitchFamily="18" charset="0"/>
+                            </a:rPr>
+                            <m:t>s</m:t>
+                          </m:r>
+                        </m:sub>
+                        <m:sup>
+                          <m:r>
+                            <a:rPr lang="en-US" sz="1400" i="0">
+                              <a:solidFill>
+                                <a:srgbClr val="1A1A1A"/>
+                              </a:solidFill>
+                              <a:latin typeface="Cambria Math" panose="02040503050406030204" pitchFamily="18" charset="0"/>
+                            </a:rPr>
+                            <m:t>​</m:t>
+                          </m:r>
+                        </m:sup>
+                        <m:e>
+                          <m:f>
+                            <m:fPr>
+                              <m:type m:val="bar"/>
+                            </m:fPr>
+                            <m:num>
+                              <m:sSub>
+                                <m:e>
+                                  <m:r>
+                                    <a:rPr lang="en-US" sz="1400" i="1">
+                                      <a:solidFill>
+                                        <a:srgbClr val="1A1A1A"/>
+                                      </a:solidFill>
+                                      <a:latin typeface="Cambria Math" panose="02040503050406030204" pitchFamily="18" charset="0"/>
+                                    </a:rPr>
+                                    <m:t>𝐿</m:t>
+                                  </m:r>
+                                </m:e>
+                                <m:sub>
+                                  <m:r>
+                                    <a:rPr lang="en-US" sz="1400" i="1">
+                                      <a:solidFill>
+                                        <a:srgbClr val="1A1A1A"/>
+                                      </a:solidFill>
+                                      <a:latin typeface="Cambria Math" panose="02040503050406030204" pitchFamily="18" charset="0"/>
+                                    </a:rPr>
+                                    <m:t>𝑘</m:t>
+                                  </m:r>
+                                </m:sub>
+                              </m:sSub>
+                            </m:num>
+                            <m:den>
+                              <m:sSub>
+                                <m:e>
+                                  <m:r>
+                                    <a:rPr lang="en-US" sz="1400" i="1">
+                                      <a:solidFill>
+                                        <a:srgbClr val="1A1A1A"/>
+                                      </a:solidFill>
+                                      <a:latin typeface="Cambria Math" panose="02040503050406030204" pitchFamily="18" charset="0"/>
+                                    </a:rPr>
+                                    <m:t>𝐿</m:t>
+                                  </m:r>
+                                </m:e>
+                                <m:sub>
+                                  <m:r>
+                                    <a:rPr lang="en-US" sz="1400" i="1">
+                                      <a:solidFill>
+                                        <a:srgbClr val="1A1A1A"/>
+                                      </a:solidFill>
+                                      <a:latin typeface="Cambria Math" panose="02040503050406030204" pitchFamily="18" charset="0"/>
+                                    </a:rPr>
+                                    <m:t>𝑚</m:t>
+                                  </m:r>
+                                  <m:r>
+                                    <a:rPr lang="en-US" sz="1400" i="1">
+                                      <a:solidFill>
+                                        <a:srgbClr val="1A1A1A"/>
+                                      </a:solidFill>
+                                      <a:latin typeface="Cambria Math" panose="02040503050406030204" pitchFamily="18" charset="0"/>
+                                    </a:rPr>
+                                    <m:t>𝑜</m:t>
+                                  </m:r>
+                                  <m:r>
+                                    <a:rPr lang="en-US" sz="1400" i="1">
+                                      <a:solidFill>
+                                        <a:srgbClr val="1A1A1A"/>
+                                      </a:solidFill>
+                                      <a:latin typeface="Cambria Math" panose="02040503050406030204" pitchFamily="18" charset="0"/>
+                                    </a:rPr>
+                                    <m:t>𝑑</m:t>
+                                  </m:r>
+                                </m:sub>
+                              </m:sSub>
+                            </m:den>
+                          </m:f>
+                        </m:e>
+                      </m:nary>
+                      <m:r>
+                        <a:rPr lang="en-US" sz="1400" i="0">
+                          <a:solidFill>
+                            <a:srgbClr val="1A1A1A"/>
+                          </a:solidFill>
+                          <a:latin typeface="Cambria Math" panose="02040503050406030204" pitchFamily="18" charset="0"/>
+                        </a:rPr>
+                        <m:t> </m:t>
+                      </m:r>
+                      <m:sSub>
+                        <m:e>
+                          <m:r>
+                            <a:rPr lang="en-US" sz="1400" i="1">
+                              <a:solidFill>
+                                <a:srgbClr val="1A1A1A"/>
+                              </a:solidFill>
+                              <a:latin typeface="Cambria Math" panose="02040503050406030204" pitchFamily="18" charset="0"/>
+                            </a:rPr>
+                            <m:t>𝑉</m:t>
+                          </m:r>
+                        </m:e>
+                        <m:sub>
+                          <m:r>
+                            <a:rPr lang="en-US" sz="1400" i="1">
+                              <a:solidFill>
+                                <a:srgbClr val="1A1A1A"/>
+                              </a:solidFill>
+                              <a:latin typeface="Cambria Math" panose="02040503050406030204" pitchFamily="18" charset="0"/>
+                            </a:rPr>
+                            <m:t>𝑚</m:t>
+                          </m:r>
+                          <m:r>
+                            <a:rPr lang="en-US" sz="1400" i="1">
+                              <a:solidFill>
+                                <a:srgbClr val="1A1A1A"/>
+                              </a:solidFill>
+                              <a:latin typeface="Cambria Math" panose="02040503050406030204" pitchFamily="18" charset="0"/>
+                            </a:rPr>
+                            <m:t>𝑜</m:t>
+                          </m:r>
+                          <m:r>
+                            <a:rPr lang="en-US" sz="1400" i="1">
+                              <a:solidFill>
+                                <a:srgbClr val="1A1A1A"/>
+                              </a:solidFill>
+                              <a:latin typeface="Cambria Math" panose="02040503050406030204" pitchFamily="18" charset="0"/>
+                            </a:rPr>
+                            <m:t>𝑑</m:t>
+                          </m:r>
+                          <m:r>
+                            <m:rPr>
+                              <m:sty m:val="p"/>
+                            </m:rPr>
+                            <a:rPr lang="en-US" sz="1400" i="0">
+                              <a:solidFill>
+                                <a:srgbClr val="1A1A1A"/>
+                              </a:solidFill>
+                              <a:latin typeface="Cambria Math" panose="02040503050406030204" pitchFamily="18" charset="0"/>
+                            </a:rPr>
+                            <m:t>,</m:t>
+                          </m:r>
+                          <m:r>
+                            <a:rPr lang="en-US" sz="1400" i="1">
+                              <a:solidFill>
+                                <a:srgbClr val="1A1A1A"/>
+                              </a:solidFill>
+                              <a:latin typeface="Cambria Math" panose="02040503050406030204" pitchFamily="18" charset="0"/>
+                            </a:rPr>
+                            <m:t>𝑘</m:t>
+                          </m:r>
+                        </m:sub>
+                      </m:sSub>
+                      <m:r>
+                        <a:rPr lang="en-US" sz="1400" i="0">
+                          <a:solidFill>
+                            <a:srgbClr val="1A1A1A"/>
+                          </a:solidFill>
+                          <a:latin typeface="Cambria Math" panose="02040503050406030204" pitchFamily="18" charset="0"/>
+                        </a:rPr>
+                        <m:t> </m:t>
+                      </m:r>
+                      <m:sSup>
+                        <m:e>
+                          <m:r>
+                            <a:rPr lang="en-US" sz="1400" i="1">
+                              <a:solidFill>
+                                <a:srgbClr val="1A1A1A"/>
+                              </a:solidFill>
+                              <a:latin typeface="Cambria Math" panose="02040503050406030204" pitchFamily="18" charset="0"/>
+                            </a:rPr>
+                            <m:t>𝑒</m:t>
+                          </m:r>
+                        </m:e>
+                        <m:sup>
+                          <m:r>
+                            <m:rPr>
+                              <m:sty m:val="p"/>
+                            </m:rPr>
+                            <a:rPr lang="en-US" sz="1400" i="0">
+                              <a:solidFill>
+                                <a:srgbClr val="1A1A1A"/>
+                              </a:solidFill>
+                              <a:latin typeface="Cambria Math" panose="02040503050406030204" pitchFamily="18" charset="0"/>
+                            </a:rPr>
+                            <m:t>−</m:t>
+                          </m:r>
+                          <m:r>
+                            <a:rPr lang="en-US" sz="1400" i="1">
+                              <a:solidFill>
+                                <a:srgbClr val="1A1A1A"/>
+                              </a:solidFill>
+                              <a:latin typeface="Cambria Math" panose="02040503050406030204" pitchFamily="18" charset="0"/>
+                            </a:rPr>
+                            <m:t>𝑗</m:t>
+                          </m:r>
+                          <m:sSub>
+                            <m:e>
+                              <m:r>
+                                <a:rPr lang="en-US" sz="1400" i="1">
+                                  <a:solidFill>
+                                    <a:srgbClr val="1A1A1A"/>
+                                  </a:solidFill>
+                                  <a:latin typeface="Cambria Math" panose="02040503050406030204" pitchFamily="18" charset="0"/>
+                                </a:rPr>
+                                <m:t>𝛽</m:t>
+                              </m:r>
+                            </m:e>
+                            <m:sub>
+                              <m:r>
+                                <a:rPr lang="en-US" sz="1400" i="1">
+                                  <a:solidFill>
+                                    <a:srgbClr val="1A1A1A"/>
+                                  </a:solidFill>
+                                  <a:latin typeface="Cambria Math" panose="02040503050406030204" pitchFamily="18" charset="0"/>
+                                </a:rPr>
+                                <m:t>𝑜</m:t>
+                              </m:r>
+                            </m:sub>
+                          </m:sSub>
+                          <m:r>
+                            <a:rPr lang="en-US" sz="1400" i="0">
+                              <a:solidFill>
+                                <a:srgbClr val="1A1A1A"/>
+                              </a:solidFill>
+                              <a:latin typeface="Cambria Math" panose="02040503050406030204" pitchFamily="18" charset="0"/>
+                            </a:rPr>
+                            <m:t> </m:t>
+                          </m:r>
+                          <m:sSub>
+                            <m:e>
+                              <m:r>
+                                <a:rPr lang="en-US" sz="1400" i="1">
+                                  <a:solidFill>
+                                    <a:srgbClr val="1A1A1A"/>
+                                  </a:solidFill>
+                                  <a:latin typeface="Cambria Math" panose="02040503050406030204" pitchFamily="18" charset="0"/>
+                                </a:rPr>
+                                <m:t>ℓ</m:t>
+                              </m:r>
+                            </m:e>
+                            <m:sub>
+                              <m:r>
+                                <a:rPr lang="en-US" sz="1400" i="1">
+                                  <a:solidFill>
+                                    <a:srgbClr val="1A1A1A"/>
+                                  </a:solidFill>
+                                  <a:latin typeface="Cambria Math" panose="02040503050406030204" pitchFamily="18" charset="0"/>
+                                </a:rPr>
+                                <m:t>𝑘</m:t>
+                              </m:r>
+                            </m:sub>
+                          </m:sSub>
+                        </m:sup>
+                      </m:sSup>
+                      <m:r>
+                        <m:rPr>
+                          <m:sty m:val="p"/>
+                        </m:rPr>
+                        <a:rPr lang="en-US" sz="1400" i="0">
+                          <a:solidFill>
+                            <a:srgbClr val="1A1A1A"/>
+                          </a:solidFill>
+                          <a:latin typeface="Cambria Math" panose="02040503050406030204" pitchFamily="18" charset="0"/>
+                        </a:rPr>
+                        <m:t>,</m:t>
+                      </m:r>
+                      <m:r>
+                        <a:rPr lang="en-US" sz="1400" i="0">
+                          <a:solidFill>
+                            <a:srgbClr val="1A1A1A"/>
+                          </a:solidFill>
+                          <a:latin typeface="Cambria Math" panose="02040503050406030204" pitchFamily="18" charset="0"/>
+                        </a:rPr>
+                        <m:t>  </m:t>
+                      </m:r>
+                      <m:sSub>
+                        <m:e>
+                          <m:r>
+                            <a:rPr lang="en-US" sz="1400" i="1">
+                              <a:solidFill>
+                                <a:srgbClr val="1A1A1A"/>
+                              </a:solidFill>
+                              <a:latin typeface="Cambria Math" panose="02040503050406030204" pitchFamily="18" charset="0"/>
+                            </a:rPr>
+                            <m:t>ℓ</m:t>
+                          </m:r>
+                        </m:e>
+                        <m:sub>
+                          <m:r>
+                            <a:rPr lang="en-US" sz="1400" i="1">
+                              <a:solidFill>
+                                <a:srgbClr val="1A1A1A"/>
+                              </a:solidFill>
+                              <a:latin typeface="Cambria Math" panose="02040503050406030204" pitchFamily="18" charset="0"/>
+                            </a:rPr>
+                            <m:t>𝑘</m:t>
+                          </m:r>
+                        </m:sub>
+                      </m:sSub>
+                      <m:r>
+                        <m:rPr>
+                          <m:sty m:val="p"/>
+                        </m:rPr>
+                        <a:rPr lang="en-US" sz="1400" i="0">
+                          <a:solidFill>
+                            <a:srgbClr val="1A1A1A"/>
+                          </a:solidFill>
+                          <a:latin typeface="Cambria Math" panose="02040503050406030204" pitchFamily="18" charset="0"/>
+                        </a:rPr>
+                        <m:t>=</m:t>
+                      </m:r>
+                      <m:r>
+                        <m:rPr>
+                          <m:sty m:val="p"/>
+                        </m:rPr>
+                        <a:rPr lang="en-US" sz="1400" i="0">
+                          <a:solidFill>
+                            <a:srgbClr val="1A1A1A"/>
+                          </a:solidFill>
+                          <a:latin typeface="Cambria Math" panose="02040503050406030204" pitchFamily="18" charset="0"/>
+                        </a:rPr>
+                        <m:t>o</m:t>
+                      </m:r>
+                      <m:r>
+                        <m:rPr>
+                          <m:sty m:val="p"/>
+                        </m:rPr>
+                        <a:rPr lang="en-US" sz="1400" i="0">
+                          <a:solidFill>
+                            <a:srgbClr val="1A1A1A"/>
+                          </a:solidFill>
+                          <a:latin typeface="Cambria Math" panose="02040503050406030204" pitchFamily="18" charset="0"/>
+                        </a:rPr>
+                        <m:t>p</m:t>
+                      </m:r>
+                      <m:r>
+                        <m:rPr>
+                          <m:sty m:val="p"/>
+                        </m:rPr>
+                        <a:rPr lang="en-US" sz="1400" i="0">
+                          <a:solidFill>
+                            <a:srgbClr val="1A1A1A"/>
+                          </a:solidFill>
+                          <a:latin typeface="Cambria Math" panose="02040503050406030204" pitchFamily="18" charset="0"/>
+                        </a:rPr>
+                        <m:t>t</m:t>
+                      </m:r>
+                      <m:r>
+                        <m:rPr>
+                          <m:sty m:val="p"/>
+                        </m:rPr>
+                        <a:rPr lang="en-US" sz="1400" i="0">
+                          <a:solidFill>
+                            <a:srgbClr val="1A1A1A"/>
+                          </a:solidFill>
+                          <a:latin typeface="Cambria Math" panose="02040503050406030204" pitchFamily="18" charset="0"/>
+                        </a:rPr>
+                        <m:t>i</m:t>
+                      </m:r>
+                      <m:r>
+                        <m:rPr>
+                          <m:sty m:val="p"/>
+                        </m:rPr>
+                        <a:rPr lang="en-US" sz="1400" i="0">
+                          <a:solidFill>
+                            <a:srgbClr val="1A1A1A"/>
+                          </a:solidFill>
+                          <a:latin typeface="Cambria Math" panose="02040503050406030204" pitchFamily="18" charset="0"/>
+                        </a:rPr>
+                        <m:t>c</m:t>
+                      </m:r>
+                      <m:r>
+                        <m:rPr>
+                          <m:sty m:val="p"/>
+                        </m:rPr>
+                        <a:rPr lang="en-US" sz="1400" i="0">
+                          <a:solidFill>
+                            <a:srgbClr val="1A1A1A"/>
+                          </a:solidFill>
+                          <a:latin typeface="Cambria Math" panose="02040503050406030204" pitchFamily="18" charset="0"/>
+                        </a:rPr>
+                        <m:t>a</m:t>
+                      </m:r>
+                      <m:r>
+                        <m:rPr>
+                          <m:sty m:val="p"/>
+                        </m:rPr>
+                        <a:rPr lang="en-US" sz="1400" i="0">
+                          <a:solidFill>
+                            <a:srgbClr val="1A1A1A"/>
+                          </a:solidFill>
+                          <a:latin typeface="Cambria Math" panose="02040503050406030204" pitchFamily="18" charset="0"/>
+                        </a:rPr>
+                        <m:t>l</m:t>
+                      </m:r>
+                      <m:r>
+                        <m:rPr>
+                          <m:sty m:val="p"/>
+                        </m:rPr>
+                        <a:rPr lang="en-US" sz="1400" i="0">
+                          <a:solidFill>
+                            <a:srgbClr val="1A1A1A"/>
+                          </a:solidFill>
+                          <a:latin typeface="Cambria Math" panose="02040503050406030204" pitchFamily="18" charset="0"/>
+                        </a:rPr>
+                        <m:t> </m:t>
+                      </m:r>
+                      <m:r>
+                        <m:rPr>
+                          <m:sty m:val="p"/>
+                        </m:rPr>
+                        <a:rPr lang="en-US" sz="1400" i="0">
+                          <a:solidFill>
+                            <a:srgbClr val="1A1A1A"/>
+                          </a:solidFill>
+                          <a:latin typeface="Cambria Math" panose="02040503050406030204" pitchFamily="18" charset="0"/>
+                        </a:rPr>
+                        <m:t>l</m:t>
+                      </m:r>
+                      <m:r>
+                        <m:rPr>
+                          <m:sty m:val="p"/>
+                        </m:rPr>
+                        <a:rPr lang="en-US" sz="1400" i="0">
+                          <a:solidFill>
+                            <a:srgbClr val="1A1A1A"/>
+                          </a:solidFill>
+                          <a:latin typeface="Cambria Math" panose="02040503050406030204" pitchFamily="18" charset="0"/>
+                        </a:rPr>
+                        <m:t>e</m:t>
+                      </m:r>
+                      <m:r>
+                        <m:rPr>
+                          <m:sty m:val="p"/>
+                        </m:rPr>
+                        <a:rPr lang="en-US" sz="1400" i="0">
+                          <a:solidFill>
+                            <a:srgbClr val="1A1A1A"/>
+                          </a:solidFill>
+                          <a:latin typeface="Cambria Math" panose="02040503050406030204" pitchFamily="18" charset="0"/>
+                        </a:rPr>
+                        <m:t>n</m:t>
+                      </m:r>
+                      <m:r>
+                        <m:rPr>
+                          <m:sty m:val="p"/>
+                        </m:rPr>
+                        <a:rPr lang="en-US" sz="1400" i="0">
+                          <a:solidFill>
+                            <a:srgbClr val="1A1A1A"/>
+                          </a:solidFill>
+                          <a:latin typeface="Cambria Math" panose="02040503050406030204" pitchFamily="18" charset="0"/>
+                        </a:rPr>
+                        <m:t>g</m:t>
+                      </m:r>
+                      <m:r>
+                        <m:rPr>
+                          <m:sty m:val="p"/>
+                        </m:rPr>
+                        <a:rPr lang="en-US" sz="1400" i="0">
+                          <a:solidFill>
+                            <a:srgbClr val="1A1A1A"/>
+                          </a:solidFill>
+                          <a:latin typeface="Cambria Math" panose="02040503050406030204" pitchFamily="18" charset="0"/>
+                        </a:rPr>
+                        <m:t>t</m:t>
+                      </m:r>
+                      <m:r>
+                        <m:rPr>
+                          <m:sty m:val="p"/>
+                        </m:rPr>
+                        <a:rPr lang="en-US" sz="1400" i="0">
+                          <a:solidFill>
+                            <a:srgbClr val="1A1A1A"/>
+                          </a:solidFill>
+                          <a:latin typeface="Cambria Math" panose="02040503050406030204" pitchFamily="18" charset="0"/>
+                        </a:rPr>
+                        <m:t>h</m:t>
+                      </m:r>
+                      <m:r>
+                        <m:rPr>
+                          <m:sty m:val="p"/>
+                        </m:rPr>
+                        <a:rPr lang="en-US" sz="1400" i="0">
+                          <a:solidFill>
+                            <a:srgbClr val="1A1A1A"/>
+                          </a:solidFill>
+                          <a:latin typeface="Cambria Math" panose="02040503050406030204" pitchFamily="18" charset="0"/>
+                        </a:rPr>
+                        <m:t> </m:t>
+                      </m:r>
+                      <m:r>
+                        <m:rPr>
+                          <m:sty m:val="p"/>
+                        </m:rPr>
+                        <a:rPr lang="en-US" sz="1400" i="0">
+                          <a:solidFill>
+                            <a:srgbClr val="1A1A1A"/>
+                          </a:solidFill>
+                          <a:latin typeface="Cambria Math" panose="02040503050406030204" pitchFamily="18" charset="0"/>
+                        </a:rPr>
+                        <m:t>a</m:t>
+                      </m:r>
+                      <m:r>
+                        <m:rPr>
+                          <m:sty m:val="p"/>
+                        </m:rPr>
+                        <a:rPr lang="en-US" sz="1400" i="0">
+                          <a:solidFill>
+                            <a:srgbClr val="1A1A1A"/>
+                          </a:solidFill>
+                          <a:latin typeface="Cambria Math" panose="02040503050406030204" pitchFamily="18" charset="0"/>
+                        </a:rPr>
+                        <m:t>f</m:t>
+                      </m:r>
+                      <m:r>
+                        <m:rPr>
+                          <m:sty m:val="p"/>
+                        </m:rPr>
+                        <a:rPr lang="en-US" sz="1400" i="0">
+                          <a:solidFill>
+                            <a:srgbClr val="1A1A1A"/>
+                          </a:solidFill>
+                          <a:latin typeface="Cambria Math" panose="02040503050406030204" pitchFamily="18" charset="0"/>
+                        </a:rPr>
+                        <m:t>t</m:t>
+                      </m:r>
+                      <m:r>
+                        <m:rPr>
+                          <m:sty m:val="p"/>
+                        </m:rPr>
+                        <a:rPr lang="en-US" sz="1400" i="0">
+                          <a:solidFill>
+                            <a:srgbClr val="1A1A1A"/>
+                          </a:solidFill>
+                          <a:latin typeface="Cambria Math" panose="02040503050406030204" pitchFamily="18" charset="0"/>
+                        </a:rPr>
+                        <m:t>e</m:t>
+                      </m:r>
+                      <m:r>
+                        <m:rPr>
+                          <m:sty m:val="p"/>
+                        </m:rPr>
+                        <a:rPr lang="en-US" sz="1400" i="0">
+                          <a:solidFill>
+                            <a:srgbClr val="1A1A1A"/>
+                          </a:solidFill>
+                          <a:latin typeface="Cambria Math" panose="02040503050406030204" pitchFamily="18" charset="0"/>
+                        </a:rPr>
+                        <m:t>r</m:t>
+                      </m:r>
+                      <m:r>
+                        <m:rPr>
+                          <m:sty m:val="p"/>
+                        </m:rPr>
+                        <a:rPr lang="en-US" sz="1400" i="0">
+                          <a:solidFill>
+                            <a:srgbClr val="1A1A1A"/>
+                          </a:solidFill>
+                          <a:latin typeface="Cambria Math" panose="02040503050406030204" pitchFamily="18" charset="0"/>
+                        </a:rPr>
+                        <m:t> </m:t>
+                      </m:r>
+                      <m:r>
+                        <m:rPr>
+                          <m:sty m:val="p"/>
+                        </m:rPr>
+                        <a:rPr lang="en-US" sz="1400" i="0">
+                          <a:solidFill>
+                            <a:srgbClr val="1A1A1A"/>
+                          </a:solidFill>
+                          <a:latin typeface="Cambria Math" panose="02040503050406030204" pitchFamily="18" charset="0"/>
+                        </a:rPr>
+                        <m:t>p</m:t>
+                      </m:r>
+                      <m:r>
+                        <m:rPr>
+                          <m:sty m:val="p"/>
+                        </m:rPr>
+                        <a:rPr lang="en-US" sz="1400" i="0">
+                          <a:solidFill>
+                            <a:srgbClr val="1A1A1A"/>
+                          </a:solidFill>
+                          <a:latin typeface="Cambria Math" panose="02040503050406030204" pitchFamily="18" charset="0"/>
+                        </a:rPr>
+                        <m:t>i</m:t>
+                      </m:r>
+                      <m:r>
+                        <m:rPr>
+                          <m:sty m:val="p"/>
+                        </m:rPr>
+                        <a:rPr lang="en-US" sz="1400" i="0">
+                          <a:solidFill>
+                            <a:srgbClr val="1A1A1A"/>
+                          </a:solidFill>
+                          <a:latin typeface="Cambria Math" panose="02040503050406030204" pitchFamily="18" charset="0"/>
+                        </a:rPr>
+                        <m:t>e</m:t>
+                      </m:r>
+                      <m:r>
+                        <m:rPr>
+                          <m:sty m:val="p"/>
+                        </m:rPr>
+                        <a:rPr lang="en-US" sz="1400" i="0">
+                          <a:solidFill>
+                            <a:srgbClr val="1A1A1A"/>
+                          </a:solidFill>
+                          <a:latin typeface="Cambria Math" panose="02040503050406030204" pitchFamily="18" charset="0"/>
+                        </a:rPr>
+                        <m:t>c</m:t>
+                      </m:r>
+                      <m:r>
+                        <m:rPr>
+                          <m:sty m:val="p"/>
+                        </m:rPr>
+                        <a:rPr lang="en-US" sz="1400" i="0">
+                          <a:solidFill>
+                            <a:srgbClr val="1A1A1A"/>
+                          </a:solidFill>
+                          <a:latin typeface="Cambria Math" panose="02040503050406030204" pitchFamily="18" charset="0"/>
+                        </a:rPr>
+                        <m:t>e</m:t>
+                      </m:r>
+                      <m:r>
+                        <a:rPr lang="en-US" sz="1400" i="0">
+                          <a:solidFill>
+                            <a:srgbClr val="1A1A1A"/>
+                          </a:solidFill>
+                          <a:latin typeface="Cambria Math" panose="02040503050406030204" pitchFamily="18" charset="0"/>
+                        </a:rPr>
+                        <m:t> </m:t>
+                      </m:r>
+                      <m:r>
+                        <a:rPr lang="en-US" sz="1400" i="1">
+                          <a:solidFill>
+                            <a:srgbClr val="1A1A1A"/>
+                          </a:solidFill>
+                          <a:latin typeface="Cambria Math" panose="02040503050406030204" pitchFamily="18" charset="0"/>
+                        </a:rPr>
+                        <m:t>𝑘</m:t>
+                      </m:r>
+                    </m:oMath>
+                  </m:oMathPara>
+                </a14:m>
+                <a:endParaRPr lang="en-US" sz="1400"/>
+              </a:p>
+            </p:txBody>
+          </p:sp>
+        </mc:Choice>
+        <mc:Fallback>
+          <p:sp>
+            <p:nvSpPr>
+              <p:cNvPr id="13" name="Equation 13"/>
+              <p:cNvSpPr txBox="1">
+                <a:spLocks noRot="1" noChangeAspect="1" noMove="1" noResize="1" noEditPoints="1" noAdjustHandles="1" noChangeArrowheads="1" noChangeShapeType="1" noTextEdit="1"/>
+              </p:cNvSpPr>
+              <p:nvPr/>
+            </p:nvSpPr>
+            <p:spPr>
+              <a:xfrm>
+                <a:off x="914400" y="6224016"/>
+                <a:ext cx="5266944" cy="457200"/>
+              </a:xfrm>
+              <a:prstGeom prst="rect">
+                <a:avLst/>
+              </a:prstGeom>
+              <a:blipFill>
+                <a:blip r:embed="rId8"/>
+                <a:stretch>
+                  <a:fillRect/>
+                </a:stretch>
+              </a:blipFill>
+            </p:spPr>
+            <p:txBody>
+              <a:bodyPr/>
+              <a:lstStyle/>
+              <a:p>
+                <a:r>
+                  <a:rPr lang="en-GB">
+                    <a:noFill/>
+                  </a:rPr>
+                  <a:t> </a:t>
+                </a:r>
+              </a:p>
+            </p:txBody>
+          </p:sp>
+        </mc:Fallback>
+      </mc:AlternateContent>
+    </p:spTree>
+  </p:cSld>
+  <p:clrMapOvr>
+    <a:masterClrMapping/>
+  </p:clrMapOvr>
+</p:sld>
+</file>
+
+<file path=ppt/slides/slide23.xml><?xml version="1.0" encoding="utf-8"?>
+<p:sld xmlns:a="http://schemas.openxmlformats.org/drawingml/2006/main" xmlns:p="http://schemas.openxmlformats.org/presentationml/2006/main" xmlns:r="http://schemas.openxmlformats.org/officeDocument/2006/relationships">
+  <p:cSld>
+    <p:spTree>
+      <p:nvGrpSpPr>
+        <p:cNvPr id="1" name=""/>
+        <p:cNvGrpSpPr/>
+        <p:nvPr/>
+      </p:nvGrpSpPr>
+      <p:grpSpPr/>
+      <p:sp>
+        <p:nvSpPr>
+          <p:cNvPr id="2" name="TextBox 1"/>
+          <p:cNvSpPr txBox="1"/>
+          <p:nvPr/>
+        </p:nvSpPr>
+        <p:spPr>
+          <a:xfrm>
+            <a:off x="502920" y="411480"/>
+            <a:ext cx="9509760" cy="685800"/>
+          </a:xfrm>
+          <a:prstGeom prst="rect">
+            <a:avLst/>
+          </a:prstGeom>
+          <a:noFill/>
+        </p:spPr>
+        <p:txBody>
+          <a:bodyPr wrap="square" lIns="27432" rIns="27432" tIns="18288" bIns="18288" anchor="t">
+            <a:spAutoFit/>
+          </a:bodyPr>
+          <a:lstStyle/>
+          <a:p>
+            <a:pPr algn="l">
+              <a:spcAft>
+                <a:spcPts val="400"/>
+              </a:spcAft>
+            </a:pPr>
+            <a:r>
+              <a:rPr sz="3000" b="0" i="0">
+                <a:solidFill>
+                  <a:srgbClr val="1A1A1A"/>
+                </a:solidFill>
+                <a:latin typeface="Arial"/>
+              </a:rPr>
+              <a:t>A2  EO read-back: two INTERCONNECT artefacts</a:t>
+            </a:r>
+          </a:p>
+        </p:txBody>
+      </p:sp>
+      <p:sp>
+        <p:nvSpPr>
+          <p:cNvPr id="3" name="TextBox 2"/>
+          <p:cNvSpPr txBox="1"/>
+          <p:nvPr/>
+        </p:nvSpPr>
+        <p:spPr>
+          <a:xfrm>
+            <a:off x="548640" y="1005840"/>
+            <a:ext cx="9418320" cy="365760"/>
+          </a:xfrm>
+          <a:prstGeom prst="rect">
+            <a:avLst/>
+          </a:prstGeom>
+          <a:noFill/>
+        </p:spPr>
+        <p:txBody>
+          <a:bodyPr wrap="square" lIns="27432" rIns="27432" tIns="18288" bIns="18288" anchor="t">
+            <a:spAutoFit/>
+          </a:bodyPr>
+          <a:lstStyle/>
+          <a:p>
+            <a:pPr algn="l">
+              <a:spcAft>
+                <a:spcPts val="400"/>
+              </a:spcAft>
+            </a:pPr>
+            <a:r>
+              <a:rPr sz="1500" b="0" i="1">
+                <a:solidFill>
+                  <a:srgbClr val="5A606E"/>
+                </a:solidFill>
+                <a:latin typeface="Arial"/>
+              </a:rPr>
+              <a:t>Same in the TW-block and the TL builds; corrected when the trace is read</a:t>
+            </a:r>
+          </a:p>
+        </p:txBody>
+      </p:sp>
+      <p:pic>
+        <p:nvPicPr>
+          <p:cNvPr id="4" name="Picture 3" descr="app_readback.png"/>
+          <p:cNvPicPr>
+            <a:picLocks noChangeAspect="1"/>
+          </p:cNvPicPr>
+          <p:nvPr/>
+        </p:nvPicPr>
+        <p:blipFill>
+          <a:blip r:embed="rId2"/>
+          <a:stretch>
+            <a:fillRect/>
+          </a:stretch>
+        </p:blipFill>
+        <p:spPr>
+          <a:xfrm>
+            <a:off x="1005840" y="1463040"/>
+            <a:ext cx="10058400" cy="3708803"/>
+          </a:xfrm>
+          <a:prstGeom prst="rect">
+            <a:avLst/>
+          </a:prstGeom>
+        </p:spPr>
+      </p:pic>
+      <p:sp>
+        <p:nvSpPr>
+          <p:cNvPr id="5" name="Rounded Rectangle 4"/>
+          <p:cNvSpPr/>
+          <p:nvPr/>
+        </p:nvSpPr>
+        <p:spPr>
+          <a:xfrm>
+            <a:off x="685800" y="5120640"/>
+            <a:ext cx="5349240" cy="1234440"/>
+          </a:xfrm>
+          <a:prstGeom prst="roundRect">
+            <a:avLst>
+              <a:gd name="adj" fmla="val 14000"/>
+            </a:avLst>
+          </a:prstGeom>
+          <a:solidFill>
+            <a:srgbClr val="F1F3F8"/>
+          </a:solidFill>
+          <a:ln>
+            <a:noFill/>
+          </a:ln>
+          <a:effectLst/>
+        </p:spPr>
+        <p:style>
+          <a:lnRef idx="1">
+            <a:schemeClr val="accent1"/>
+          </a:lnRef>
+          <a:fillRef idx="3">
+            <a:schemeClr val="accent1"/>
+          </a:fillRef>
+          <a:effectRef idx="2">
+            <a:schemeClr val="accent1"/>
+          </a:effectRef>
+          <a:fontRef idx="minor">
+            <a:schemeClr val="lt1"/>
+          </a:fontRef>
+        </p:style>
+        <p:txBody>
+          <a:bodyPr rtlCol="0" anchor="ctr" lIns="27432" rIns="27432" tIns="9144" bIns="9144" wrap="square"/>
+          <a:lstStyle/>
+          <a:p>
+            <a:pPr algn="ctr"/>
+          </a:p>
+        </p:txBody>
+      </p:sp>
+      <p:sp>
+        <p:nvSpPr>
+          <p:cNvPr id="6" name="TextBox 5"/>
+          <p:cNvSpPr txBox="1"/>
+          <p:nvPr/>
+        </p:nvSpPr>
+        <p:spPr>
+          <a:xfrm>
+            <a:off x="822960" y="5184648"/>
+            <a:ext cx="5120640" cy="320040"/>
+          </a:xfrm>
+          <a:prstGeom prst="rect">
+            <a:avLst/>
+          </a:prstGeom>
+          <a:noFill/>
+        </p:spPr>
+        <p:txBody>
+          <a:bodyPr wrap="square" lIns="27432" rIns="27432" tIns="18288" bIns="18288" anchor="t">
+            <a:spAutoFit/>
+          </a:bodyPr>
+          <a:lstStyle/>
+          <a:p>
+            <a:pPr algn="l">
+              <a:spcAft>
+                <a:spcPts val="400"/>
+              </a:spcAft>
+            </a:pPr>
+            <a:r>
+              <a:rPr sz="1300" b="1" i="0">
+                <a:solidFill>
+                  <a:srgbClr val="F20013"/>
+                </a:solidFill>
+                <a:latin typeface="Arial"/>
+              </a:rPr>
+              <a:t>Start-up spike</a:t>
+            </a:r>
+          </a:p>
+        </p:txBody>
+      </p:sp>
+      <p:sp>
+        <p:nvSpPr>
+          <p:cNvPr id="7" name="TextBox 6"/>
+          <p:cNvSpPr txBox="1"/>
+          <p:nvPr/>
+        </p:nvSpPr>
+        <p:spPr>
+          <a:xfrm>
+            <a:off x="822960" y="5513832"/>
+            <a:ext cx="5120640" cy="822960"/>
+          </a:xfrm>
+          <a:prstGeom prst="rect">
+            <a:avLst/>
+          </a:prstGeom>
+          <a:noFill/>
+        </p:spPr>
+        <p:txBody>
+          <a:bodyPr wrap="square" lIns="27432" rIns="27432" tIns="18288" bIns="18288" anchor="t">
+            <a:spAutoFit/>
+          </a:bodyPr>
+          <a:lstStyle/>
+          <a:p>
+            <a:pPr algn="l">
+              <a:spcAft>
+                <a:spcPts val="400"/>
+              </a:spcAft>
+            </a:pPr>
+            <a:r>
+              <a:rPr sz="1150" b="0" i="0">
+                <a:solidFill>
+                  <a:srgbClr val="1A1A1A"/>
+                </a:solidFill>
+                <a:latin typeface="Arial"/>
+              </a:rPr>
+              <a:t>light at the photodiode is missing for half a sample at t = 0 → after the analyser's DC removal: a spike 10× the real response → flat −16 dB floor</a:t>
+            </a:r>
+          </a:p>
+        </p:txBody>
+      </p:sp>
+      <p:sp>
+        <p:nvSpPr>
+          <p:cNvPr id="8" name="Rounded Rectangle 7"/>
+          <p:cNvSpPr/>
+          <p:nvPr/>
+        </p:nvSpPr>
+        <p:spPr>
+          <a:xfrm>
+            <a:off x="6309360" y="5120640"/>
+            <a:ext cx="5349240" cy="1234440"/>
+          </a:xfrm>
+          <a:prstGeom prst="roundRect">
+            <a:avLst>
+              <a:gd name="adj" fmla="val 14000"/>
+            </a:avLst>
+          </a:prstGeom>
+          <a:solidFill>
+            <a:srgbClr val="F1F3F8"/>
+          </a:solidFill>
+          <a:ln>
+            <a:noFill/>
+          </a:ln>
+          <a:effectLst/>
+        </p:spPr>
+        <p:style>
+          <a:lnRef idx="1">
+            <a:schemeClr val="accent1"/>
+          </a:lnRef>
+          <a:fillRef idx="3">
+            <a:schemeClr val="accent1"/>
+          </a:fillRef>
+          <a:effectRef idx="2">
+            <a:schemeClr val="accent1"/>
+          </a:effectRef>
+          <a:fontRef idx="minor">
+            <a:schemeClr val="lt1"/>
+          </a:fontRef>
+        </p:style>
+        <p:txBody>
+          <a:bodyPr rtlCol="0" anchor="ctr" lIns="27432" rIns="27432" tIns="9144" bIns="9144" wrap="square"/>
+          <a:lstStyle/>
+          <a:p>
+            <a:pPr algn="ctr"/>
+          </a:p>
+        </p:txBody>
+      </p:sp>
+      <p:sp>
+        <p:nvSpPr>
+          <p:cNvPr id="9" name="TextBox 8"/>
+          <p:cNvSpPr txBox="1"/>
+          <p:nvPr/>
+        </p:nvSpPr>
+        <p:spPr>
+          <a:xfrm>
+            <a:off x="6446520" y="5184648"/>
+            <a:ext cx="5120640" cy="320040"/>
+          </a:xfrm>
+          <a:prstGeom prst="rect">
+            <a:avLst/>
+          </a:prstGeom>
+          <a:noFill/>
+        </p:spPr>
+        <p:txBody>
+          <a:bodyPr wrap="square" lIns="27432" rIns="27432" tIns="18288" bIns="18288" anchor="t">
+            <a:spAutoFit/>
+          </a:bodyPr>
+          <a:lstStyle/>
+          <a:p>
+            <a:pPr algn="l">
+              <a:spcAft>
+                <a:spcPts val="400"/>
+              </a:spcAft>
+            </a:pPr>
+            <a:r>
+              <a:rPr sz="1300" b="1" i="0">
+                <a:solidFill>
+                  <a:srgbClr val="0E2268"/>
+                </a:solidFill>
+                <a:latin typeface="Arial"/>
+              </a:rPr>
+              <a:t>Two-sample average</a:t>
+            </a:r>
+          </a:p>
+        </p:txBody>
+      </p:sp>
+      <p:sp>
+        <p:nvSpPr>
+          <p:cNvPr id="10" name="TextBox 9"/>
+          <p:cNvSpPr txBox="1"/>
+          <p:nvPr/>
+        </p:nvSpPr>
+        <p:spPr>
+          <a:xfrm>
+            <a:off x="6446520" y="5513832"/>
+            <a:ext cx="5120640" cy="822960"/>
+          </a:xfrm>
+          <a:prstGeom prst="rect">
+            <a:avLst/>
+          </a:prstGeom>
+          <a:noFill/>
+        </p:spPr>
+        <p:txBody>
+          <a:bodyPr wrap="square" lIns="27432" rIns="27432" tIns="18288" bIns="18288" anchor="t">
+            <a:spAutoFit/>
+          </a:bodyPr>
+          <a:lstStyle/>
+          <a:p>
+            <a:pPr algn="l">
+              <a:spcAft>
+                <a:spcPts val="400"/>
+              </a:spcAft>
+            </a:pPr>
+            <a:r>
+              <a:rPr sz="1150" b="0" i="0">
+                <a:solidFill>
+                  <a:srgbClr val="1A1A1A"/>
+                </a:solidFill>
+                <a:latin typeface="Arial"/>
+              </a:rPr>
+              <a:t>spike removed, the trace is Python × |cos(πf/f</a:t>
+            </a:r>
+            <a:r>
+              <a:rPr sz="1150" b="0" i="0" baseline="-25000">
+                <a:solidFill>
+                  <a:srgbClr val="1A1A1A"/>
+                </a:solidFill>
+                <a:latin typeface="Arial"/>
+              </a:rPr>
+              <a:t>s</a:t>
+            </a:r>
+            <a:r>
+              <a:rPr sz="1150" b="0" i="0">
+                <a:solidFill>
+                  <a:srgbClr val="1A1A1A"/>
+                </a:solidFill>
+                <a:latin typeface="Arial"/>
+              </a:rPr>
+              <a:t>)|: −3 dB at f</a:t>
+            </a:r>
+            <a:r>
+              <a:rPr sz="1150" b="0" i="0" baseline="-25000">
+                <a:solidFill>
+                  <a:srgbClr val="1A1A1A"/>
+                </a:solidFill>
+                <a:latin typeface="Arial"/>
+              </a:rPr>
+              <a:t>s</a:t>
+            </a:r>
+            <a:r>
+              <a:rPr sz="1150" b="0" i="0">
+                <a:solidFill>
+                  <a:srgbClr val="1A1A1A"/>
+                </a:solidFill>
+                <a:latin typeface="Arial"/>
+              </a:rPr>
+              <a:t>/4, zero at Nyquist → divided out</a:t>
+            </a:r>
+          </a:p>
+        </p:txBody>
+      </p:sp>
+    </p:spTree>
+  </p:cSld>
+  <p:clrMapOvr>
+    <a:masterClrMapping/>
+  </p:clrMapOvr>
+</p:sld>
+</file>
+
+<file path=ppt/slides/slide24.xml><?xml version="1.0" encoding="utf-8"?>
+<p:sld xmlns:a="http://schemas.openxmlformats.org/drawingml/2006/main" xmlns:p="http://schemas.openxmlformats.org/presentationml/2006/main" xmlns:r="http://schemas.openxmlformats.org/officeDocument/2006/relationships">
+  <p:cSld>
+    <p:spTree>
+      <p:nvGrpSpPr>
+        <p:cNvPr id="1" name=""/>
+        <p:cNvGrpSpPr/>
+        <p:nvPr/>
+      </p:nvGrpSpPr>
+      <p:grpSpPr/>
+      <p:sp>
+        <p:nvSpPr>
+          <p:cNvPr id="2" name="TextBox 1"/>
+          <p:cNvSpPr txBox="1"/>
+          <p:nvPr/>
+        </p:nvSpPr>
+        <p:spPr>
+          <a:xfrm>
+            <a:off x="502920" y="411480"/>
+            <a:ext cx="9509760" cy="685800"/>
+          </a:xfrm>
+          <a:prstGeom prst="rect">
+            <a:avLst/>
+          </a:prstGeom>
+          <a:noFill/>
+        </p:spPr>
+        <p:txBody>
+          <a:bodyPr wrap="square" lIns="27432" rIns="27432" tIns="18288" bIns="18288" anchor="t">
+            <a:spAutoFit/>
+          </a:bodyPr>
+          <a:lstStyle/>
+          <a:p>
+            <a:pPr algn="l">
+              <a:spcAft>
+                <a:spcPts val="400"/>
+              </a:spcAft>
+            </a:pPr>
+            <a:r>
+              <a:rPr sz="3000" b="0" i="0">
+                <a:solidFill>
+                  <a:srgbClr val="1A1A1A"/>
+                </a:solidFill>
+                <a:latin typeface="Arial"/>
+              </a:rPr>
+              <a:t>A3  Why the bends do not use Optical Delay blocks</a:t>
+            </a:r>
+          </a:p>
+        </p:txBody>
+      </p:sp>
+      <p:pic>
+        <p:nvPicPr>
+          <p:cNvPr id="3" name="Picture 2" descr="app_odl.png"/>
+          <p:cNvPicPr>
+            <a:picLocks noChangeAspect="1"/>
+          </p:cNvPicPr>
+          <p:nvPr/>
+        </p:nvPicPr>
+        <p:blipFill>
+          <a:blip r:embed="rId2"/>
+          <a:stretch>
+            <a:fillRect/>
+          </a:stretch>
+        </p:blipFill>
+        <p:spPr>
+          <a:xfrm>
+            <a:off x="1005840" y="1417320"/>
+            <a:ext cx="10058400" cy="3637237"/>
+          </a:xfrm>
+          <a:prstGeom prst="rect">
+            <a:avLst/>
+          </a:prstGeom>
+        </p:spPr>
+      </p:pic>
+      <p:sp>
+        <p:nvSpPr>
+          <p:cNvPr id="4" name="Rounded Rectangle 3"/>
+          <p:cNvSpPr/>
+          <p:nvPr/>
+        </p:nvSpPr>
+        <p:spPr>
+          <a:xfrm>
+            <a:off x="685800" y="5074920"/>
+            <a:ext cx="10881360" cy="1188720"/>
+          </a:xfrm>
+          <a:prstGeom prst="roundRect">
+            <a:avLst>
+              <a:gd name="adj" fmla="val 14000"/>
+            </a:avLst>
+          </a:prstGeom>
+          <a:solidFill>
+            <a:srgbClr val="F1F3F8"/>
+          </a:solidFill>
+          <a:ln>
+            <a:noFill/>
+          </a:ln>
+          <a:effectLst/>
+        </p:spPr>
+        <p:style>
+          <a:lnRef idx="1">
+            <a:schemeClr val="accent1"/>
+          </a:lnRef>
+          <a:fillRef idx="3">
+            <a:schemeClr val="accent1"/>
+          </a:fillRef>
+          <a:effectRef idx="2">
+            <a:schemeClr val="accent1"/>
+          </a:effectRef>
+          <a:fontRef idx="minor">
+            <a:schemeClr val="lt1"/>
+          </a:fontRef>
+        </p:style>
+        <p:txBody>
+          <a:bodyPr rtlCol="0" anchor="ctr" lIns="27432" rIns="27432" tIns="9144" bIns="9144" wrap="square"/>
+          <a:lstStyle/>
+          <a:p>
+            <a:pPr algn="ctr"/>
+          </a:p>
+        </p:txBody>
+      </p:sp>
+      <p:sp>
+        <p:nvSpPr>
+          <p:cNvPr id="5" name="TextBox 4"/>
+          <p:cNvSpPr txBox="1"/>
+          <p:nvPr/>
+        </p:nvSpPr>
+        <p:spPr>
+          <a:xfrm>
+            <a:off x="822960" y="5138928"/>
+            <a:ext cx="10607040" cy="1097280"/>
+          </a:xfrm>
+          <a:prstGeom prst="rect">
+            <a:avLst/>
+          </a:prstGeom>
+          <a:noFill/>
+        </p:spPr>
+        <p:txBody>
+          <a:bodyPr wrap="square" lIns="27432" rIns="27432" tIns="18288" bIns="18288" anchor="t">
+            <a:spAutoFit/>
+          </a:bodyPr>
+          <a:lstStyle/>
+          <a:p>
+            <a:pPr algn="l">
+              <a:spcAft>
+                <a:spcPts val="300"/>
+              </a:spcAft>
+            </a:pPr>
+            <a:r>
+              <a:rPr sz="1200" b="1" i="0">
+                <a:solidFill>
+                  <a:srgbClr val="0E2268"/>
+                </a:solidFill>
+                <a:latin typeface="Arial"/>
+              </a:rPr>
+              <a:t>First bend build: one modulator per section, Optical Delay blocks in between</a:t>
+            </a:r>
+          </a:p>
+          <a:p>
+            <a:pPr algn="l">
+              <a:spcAft>
+                <a:spcPts val="300"/>
+              </a:spcAft>
+            </a:pPr>
+            <a:r>
+              <a:rPr sz="1200" b="0" i="0">
+                <a:solidFill>
+                  <a:srgbClr val="1A1A1A"/>
+                </a:solidFill>
+                <a:latin typeface="Arial"/>
+              </a:rPr>
+              <a:t>the photodiode is dark for τ = 59 ps at the start → a 59 ps rectangle after DC removal, ~400× the real response</a:t>
+            </a:r>
+          </a:p>
+          <a:p>
+            <a:pPr algn="l">
+              <a:spcAft>
+                <a:spcPts val="300"/>
+              </a:spcAft>
+            </a:pPr>
+            <a:r>
+              <a:rPr sz="1200" b="0" i="0">
+                <a:solidFill>
+                  <a:srgbClr val="1A1A1A"/>
+                </a:solidFill>
+                <a:latin typeface="Arial"/>
+              </a:rPr>
+              <a:t>fix: the light's delays are phases inside the TL electrode block → no Optical Delay, one modulator per arm</a:t>
+            </a:r>
+          </a:p>
+        </p:txBody>
+      </p:sp>
+    </p:spTree>
+  </p:cSld>
+  <p:clrMapOvr>
+    <a:masterClrMapping/>
+  </p:clrMapOvr>
+</p:sld>
+</file>
+
+<file path=ppt/slides/slide25.xml><?xml version="1.0" encoding="utf-8"?>
+<p:sld xmlns:a="http://schemas.openxmlformats.org/drawingml/2006/main" xmlns:p="http://schemas.openxmlformats.org/presentationml/2006/main" xmlns:r="http://schemas.openxmlformats.org/officeDocument/2006/relationships">
+  <p:cSld>
+    <p:spTree>
+      <p:nvGrpSpPr>
+        <p:cNvPr id="1" name=""/>
+        <p:cNvGrpSpPr/>
+        <p:nvPr/>
+      </p:nvGrpSpPr>
+      <p:grpSpPr/>
+      <p:sp>
+        <p:nvSpPr>
+          <p:cNvPr id="2" name="TextBox 1"/>
+          <p:cNvSpPr txBox="1"/>
+          <p:nvPr/>
+        </p:nvSpPr>
+        <p:spPr>
+          <a:xfrm>
+            <a:off x="502920" y="411480"/>
+            <a:ext cx="9509760" cy="685800"/>
+          </a:xfrm>
+          <a:prstGeom prst="rect">
+            <a:avLst/>
+          </a:prstGeom>
+          <a:noFill/>
+        </p:spPr>
+        <p:txBody>
+          <a:bodyPr wrap="square" lIns="27432" rIns="27432" tIns="18288" bIns="18288" anchor="t">
+            <a:spAutoFit/>
+          </a:bodyPr>
+          <a:lstStyle/>
+          <a:p>
+            <a:pPr algn="l">
+              <a:spcAft>
+                <a:spcPts val="400"/>
+              </a:spcAft>
+            </a:pPr>
+            <a:r>
+              <a:rPr sz="3000" b="0" i="0">
+                <a:solidFill>
+                  <a:srgbClr val="1A1A1A"/>
+                </a:solidFill>
+                <a:latin typeface="Arial"/>
+              </a:rPr>
+              <a:t>A4  Eye check: fold after the modulation arrives</a:t>
+            </a:r>
+          </a:p>
+        </p:txBody>
+      </p:sp>
+      <p:sp>
+        <p:nvSpPr>
+          <p:cNvPr id="3" name="Rounded Rectangle 2"/>
+          <p:cNvSpPr/>
+          <p:nvPr/>
+        </p:nvSpPr>
+        <p:spPr>
+          <a:xfrm>
+            <a:off x="731520" y="1828800"/>
+            <a:ext cx="2377440" cy="822960"/>
+          </a:xfrm>
+          <a:prstGeom prst="roundRect">
+            <a:avLst>
+              <a:gd name="adj" fmla="val 14000"/>
+            </a:avLst>
+          </a:prstGeom>
+          <a:solidFill>
+            <a:srgbClr val="8A8F99"/>
+          </a:solidFill>
+          <a:ln>
+            <a:noFill/>
+          </a:ln>
+          <a:effectLst/>
+        </p:spPr>
+        <p:style>
+          <a:lnRef idx="1">
+            <a:schemeClr val="accent1"/>
+          </a:lnRef>
+          <a:fillRef idx="3">
+            <a:schemeClr val="accent1"/>
+          </a:fillRef>
+          <a:effectRef idx="2">
+            <a:schemeClr val="accent1"/>
+          </a:effectRef>
+          <a:fontRef idx="minor">
+            <a:schemeClr val="lt1"/>
+          </a:fontRef>
+        </p:style>
+        <p:txBody>
+          <a:bodyPr rtlCol="0" anchor="ctr" lIns="27432" rIns="27432" tIns="9144" bIns="9144" wrap="square"/>
+          <a:lstStyle/>
+          <a:p>
+            <a:pPr algn="ctr"/>
+            <a:r>
+              <a:rPr sz="1300" b="1" i="0">
+                <a:solidFill>
+                  <a:srgbClr val="FFFFFF"/>
+                </a:solidFill>
+                <a:latin typeface="Arial"/>
+              </a:rPr>
+              <a:t>start of run</a:t>
+            </a:r>
+          </a:p>
+        </p:txBody>
+      </p:sp>
+      <p:sp>
+        <p:nvSpPr>
+          <p:cNvPr id="4" name="Rounded Rectangle 3"/>
+          <p:cNvSpPr/>
+          <p:nvPr/>
+        </p:nvSpPr>
+        <p:spPr>
+          <a:xfrm>
+            <a:off x="3200400" y="1828800"/>
+            <a:ext cx="3291840" cy="822960"/>
+          </a:xfrm>
+          <a:prstGeom prst="roundRect">
+            <a:avLst>
+              <a:gd name="adj" fmla="val 14000"/>
+            </a:avLst>
+          </a:prstGeom>
+          <a:solidFill>
+            <a:srgbClr val="F20013"/>
+          </a:solidFill>
+          <a:ln>
+            <a:noFill/>
+          </a:ln>
+          <a:effectLst/>
+        </p:spPr>
+        <p:style>
+          <a:lnRef idx="1">
+            <a:schemeClr val="accent1"/>
+          </a:lnRef>
+          <a:fillRef idx="3">
+            <a:schemeClr val="accent1"/>
+          </a:fillRef>
+          <a:effectRef idx="2">
+            <a:schemeClr val="accent1"/>
+          </a:effectRef>
+          <a:fontRef idx="minor">
+            <a:schemeClr val="lt1"/>
+          </a:fontRef>
+        </p:style>
+        <p:txBody>
+          <a:bodyPr rtlCol="0" anchor="ctr" lIns="27432" rIns="27432" tIns="9144" bIns="9144" wrap="square"/>
+          <a:lstStyle/>
+          <a:p>
+            <a:pPr algn="ctr"/>
+            <a:r>
+              <a:rPr sz="1300" b="1" i="0">
+                <a:solidFill>
+                  <a:srgbClr val="FFFFFF"/>
+                </a:solidFill>
+                <a:latin typeface="Arial"/>
+              </a:rPr>
+              <a:t>photodiode flat at the bias level</a:t>
+            </a:r>
+          </a:p>
+          <a:p>
+            <a:pPr algn="ctr"/>
+            <a:r>
+              <a:rPr sz="900" b="0" i="0">
+                <a:solidFill>
+                  <a:srgbClr val="FFFFFF"/>
+                </a:solidFill>
+                <a:latin typeface="Arial"/>
+              </a:rPr>
+              <a:t>filter latency of the Compound: 512 samples = 32 UI</a:t>
+            </a:r>
+          </a:p>
+        </p:txBody>
+      </p:sp>
+      <p:sp>
+        <p:nvSpPr>
+          <p:cNvPr id="5" name="Rounded Rectangle 4"/>
+          <p:cNvSpPr/>
+          <p:nvPr/>
+        </p:nvSpPr>
+        <p:spPr>
+          <a:xfrm>
+            <a:off x="6583680" y="1828800"/>
+            <a:ext cx="4937760" cy="822960"/>
+          </a:xfrm>
+          <a:prstGeom prst="roundRect">
+            <a:avLst>
+              <a:gd name="adj" fmla="val 14000"/>
+            </a:avLst>
+          </a:prstGeom>
+          <a:solidFill>
+            <a:srgbClr val="1C8C82"/>
+          </a:solidFill>
+          <a:ln>
+            <a:noFill/>
+          </a:ln>
+          <a:effectLst/>
+        </p:spPr>
+        <p:style>
+          <a:lnRef idx="1">
+            <a:schemeClr val="accent1"/>
+          </a:lnRef>
+          <a:fillRef idx="3">
+            <a:schemeClr val="accent1"/>
+          </a:fillRef>
+          <a:effectRef idx="2">
+            <a:schemeClr val="accent1"/>
+          </a:effectRef>
+          <a:fontRef idx="minor">
+            <a:schemeClr val="lt1"/>
+          </a:fontRef>
+        </p:style>
+        <p:txBody>
+          <a:bodyPr rtlCol="0" anchor="ctr" lIns="27432" rIns="27432" tIns="9144" bIns="9144" wrap="square"/>
+          <a:lstStyle/>
+          <a:p>
+            <a:pPr algn="ctr"/>
+            <a:r>
+              <a:rPr sz="1300" b="1" i="0">
+                <a:solidFill>
+                  <a:srgbClr val="FFFFFF"/>
+                </a:solidFill>
+                <a:latin typeface="Arial"/>
+              </a:rPr>
+              <a:t>modulated signal → eye</a:t>
+            </a:r>
+          </a:p>
+        </p:txBody>
+      </p:sp>
+      <p:cxnSp>
+        <p:nvCxnSpPr>
+          <p:cNvPr id="6" name="Connector 5"/>
+          <p:cNvCxnSpPr/>
+          <p:nvPr/>
+        </p:nvCxnSpPr>
+        <p:spPr>
+          <a:xfrm flipV="1">
+            <a:off x="3429000" y="2697480"/>
+            <a:ext cx="0" cy="228600"/>
+          </a:xfrm>
+          <a:prstGeom prst="line">
+            <a:avLst/>
+          </a:prstGeom>
+          <a:ln w="25400">
+            <a:solidFill>
+              <a:srgbClr val="F20013"/>
+            </a:solidFill>
+            <a:tailEnd type="triangle" w="med" len="med"/>
+          </a:ln>
+        </p:spPr>
+        <p:style>
+          <a:lnRef idx="2">
+            <a:schemeClr val="accent1"/>
+          </a:lnRef>
+          <a:fillRef idx="0">
+            <a:schemeClr val="accent1"/>
+          </a:fillRef>
+          <a:effectRef idx="1">
+            <a:schemeClr val="accent1"/>
+          </a:effectRef>
+          <a:fontRef idx="minor">
+            <a:schemeClr val="tx1"/>
+          </a:fontRef>
+        </p:style>
+      </p:cxnSp>
+      <p:sp>
+        <p:nvSpPr>
+          <p:cNvPr id="7" name="TextBox 6"/>
+          <p:cNvSpPr txBox="1"/>
+          <p:nvPr/>
+        </p:nvSpPr>
+        <p:spPr>
+          <a:xfrm>
+            <a:off x="2057400" y="2971800"/>
+            <a:ext cx="2743200" cy="274320"/>
+          </a:xfrm>
+          <a:prstGeom prst="rect">
+            <a:avLst/>
+          </a:prstGeom>
+          <a:noFill/>
+        </p:spPr>
+        <p:txBody>
+          <a:bodyPr wrap="square" lIns="27432" rIns="27432" tIns="18288" bIns="18288" anchor="t">
+            <a:spAutoFit/>
+          </a:bodyPr>
+          <a:lstStyle/>
+          <a:p>
+            <a:pPr algn="ctr">
+              <a:spcAft>
+                <a:spcPts val="0"/>
+              </a:spcAft>
+            </a:pPr>
+            <a:r>
+              <a:rPr sz="1100" b="0" i="0">
+                <a:solidFill>
+                  <a:srgbClr val="F20013"/>
+                </a:solidFill>
+                <a:latin typeface="Arial"/>
+              </a:rPr>
+              <a:t>first run folded from 8 UI</a:t>
+            </a:r>
+          </a:p>
+        </p:txBody>
+      </p:sp>
+      <p:cxnSp>
+        <p:nvCxnSpPr>
+          <p:cNvPr id="8" name="Connector 7"/>
+          <p:cNvCxnSpPr/>
+          <p:nvPr/>
+        </p:nvCxnSpPr>
+        <p:spPr>
+          <a:xfrm flipV="1">
+            <a:off x="6766559" y="2697480"/>
+            <a:ext cx="0" cy="228600"/>
+          </a:xfrm>
+          <a:prstGeom prst="line">
+            <a:avLst/>
+          </a:prstGeom>
+          <a:ln w="25400">
+            <a:solidFill>
+              <a:srgbClr val="1C8C82"/>
+            </a:solidFill>
+            <a:tailEnd type="triangle" w="med" len="med"/>
+          </a:ln>
+        </p:spPr>
+        <p:style>
+          <a:lnRef idx="2">
+            <a:schemeClr val="accent1"/>
+          </a:lnRef>
+          <a:fillRef idx="0">
+            <a:schemeClr val="accent1"/>
+          </a:fillRef>
+          <a:effectRef idx="1">
+            <a:schemeClr val="accent1"/>
+          </a:effectRef>
+          <a:fontRef idx="minor">
+            <a:schemeClr val="tx1"/>
+          </a:fontRef>
+        </p:style>
+      </p:cxnSp>
+      <p:sp>
+        <p:nvSpPr>
+          <p:cNvPr id="9" name="TextBox 8"/>
+          <p:cNvSpPr txBox="1"/>
+          <p:nvPr/>
+        </p:nvSpPr>
+        <p:spPr>
+          <a:xfrm>
+            <a:off x="4937759" y="2971800"/>
+            <a:ext cx="3657600" cy="274320"/>
+          </a:xfrm>
+          <a:prstGeom prst="rect">
+            <a:avLst/>
+          </a:prstGeom>
+          <a:noFill/>
+        </p:spPr>
+        <p:txBody>
+          <a:bodyPr wrap="square" lIns="27432" rIns="27432" tIns="18288" bIns="18288" anchor="t">
+            <a:spAutoFit/>
+          </a:bodyPr>
+          <a:lstStyle/>
+          <a:p>
+            <a:pPr algn="ctr">
+              <a:spcAft>
+                <a:spcPts val="0"/>
+              </a:spcAft>
+            </a:pPr>
+            <a:r>
+              <a:rPr sz="1100" b="0" i="0">
+                <a:solidFill>
+                  <a:srgbClr val="1C8C82"/>
+                </a:solidFill>
+                <a:latin typeface="Arial"/>
+              </a:rPr>
+              <a:t>now: from where the signal moves + 4 UI</a:t>
+            </a:r>
+          </a:p>
+        </p:txBody>
+      </p:sp>
+      <p:pic>
+        <p:nvPicPr>
+          <p:cNvPr id="10" name="Picture 9" descr="app_eyestart.png"/>
+          <p:cNvPicPr>
+            <a:picLocks noChangeAspect="1"/>
+          </p:cNvPicPr>
+          <p:nvPr/>
+        </p:nvPicPr>
+        <p:blipFill>
+          <a:blip r:embed="rId2"/>
+          <a:stretch>
+            <a:fillRect/>
+          </a:stretch>
+        </p:blipFill>
+        <p:spPr>
+          <a:xfrm>
+            <a:off x="1280160" y="3337560"/>
+            <a:ext cx="9144000" cy="2540281"/>
+          </a:xfrm>
+          <a:prstGeom prst="rect">
+            <a:avLst/>
+          </a:prstGeom>
+        </p:spPr>
+      </p:pic>
+      <p:sp>
+        <p:nvSpPr>
+          <p:cNvPr id="11" name="Rounded Rectangle 10"/>
+          <p:cNvSpPr/>
+          <p:nvPr/>
+        </p:nvSpPr>
+        <p:spPr>
+          <a:xfrm>
+            <a:off x="731520" y="5989320"/>
+            <a:ext cx="10789920" cy="685800"/>
+          </a:xfrm>
+          <a:prstGeom prst="roundRect">
+            <a:avLst>
+              <a:gd name="adj" fmla="val 14000"/>
+            </a:avLst>
+          </a:prstGeom>
+          <a:solidFill>
+            <a:srgbClr val="F1F3F8"/>
+          </a:solidFill>
+          <a:ln>
+            <a:noFill/>
+          </a:ln>
+          <a:effectLst/>
+        </p:spPr>
+        <p:style>
+          <a:lnRef idx="1">
+            <a:schemeClr val="accent1"/>
+          </a:lnRef>
+          <a:fillRef idx="3">
+            <a:schemeClr val="accent1"/>
+          </a:fillRef>
+          <a:effectRef idx="2">
+            <a:schemeClr val="accent1"/>
+          </a:effectRef>
+          <a:fontRef idx="minor">
+            <a:schemeClr val="lt1"/>
+          </a:fontRef>
+        </p:style>
+        <p:txBody>
+          <a:bodyPr rtlCol="0" anchor="ctr" lIns="27432" rIns="27432" tIns="9144" bIns="9144" wrap="square"/>
+          <a:lstStyle/>
+          <a:p>
+            <a:pPr algn="ctr"/>
+          </a:p>
+        </p:txBody>
+      </p:sp>
+      <p:sp>
+        <p:nvSpPr>
+          <p:cNvPr id="12" name="TextBox 11"/>
+          <p:cNvSpPr txBox="1"/>
+          <p:nvPr/>
+        </p:nvSpPr>
+        <p:spPr>
+          <a:xfrm>
+            <a:off x="914400" y="6007608"/>
+            <a:ext cx="10424160" cy="640080"/>
+          </a:xfrm>
+          <a:prstGeom prst="rect">
+            <a:avLst/>
+          </a:prstGeom>
+          <a:noFill/>
+        </p:spPr>
+        <p:txBody>
+          <a:bodyPr wrap="square" lIns="27432" rIns="27432" tIns="18288" bIns="18288" anchor="t">
+            <a:spAutoFit/>
+          </a:bodyPr>
+          <a:lstStyle/>
+          <a:p>
+            <a:pPr algn="l">
+              <a:spcAft>
+                <a:spcPts val="200"/>
+              </a:spcAft>
+            </a:pPr>
+            <a:r>
+              <a:rPr sz="1200" b="0" i="0">
+                <a:solidFill>
+                  <a:srgbClr val="1A1A1A"/>
+                </a:solidFill>
+                <a:latin typeface="Arial"/>
+              </a:rPr>
+              <a:t>first run: ~24 flat traces at the bias level sit between the '1' and '0' levels → eye height ≈ 0, ER pulled down</a:t>
+            </a:r>
+          </a:p>
+          <a:p>
+            <a:pPr algn="l">
+              <a:spcAft>
+                <a:spcPts val="200"/>
+              </a:spcAft>
+            </a:pPr>
+            <a:r>
+              <a:rPr sz="1200" b="0" i="0">
+                <a:solidFill>
+                  <a:srgbClr val="1A1A1A"/>
+                </a:solidFill>
+                <a:latin typeface="Arial"/>
+              </a:rPr>
+              <a:t>fixed in the eye check; saved traces can be re-analysed without re-running INTERCONNECT</a:t>
             </a:r>
           </a:p>
         </p:txBody>

--- a/docs/Bends_in_INTERCONNECT.pptx
+++ b/docs/Bends_in_INTERCONNECT.pptx
@@ -1233,7 +1233,7 @@
           <a:lstStyle/>
           <a:p>
             <a:r>
-              <a:t>Eye validation for zero to four bends. Navy: the Python eye of each device. The bends close the eye slightly (height and ER drop with N), consistent with the lower EO bandwidth. The INTERCONNECT eyes are recorded by an oscilloscope on the photodiode and folded by exactly the same code as the Python eye, so the numbers compare directly. The first INTERCONNECT run cannot be used: the folding started 8 UI into the run, inside the 32-UI start-up interval in which the electrode Compound's filter has not yet delivered any modulation; those flat traces sit between the levels and zero the eye height. The folding now starts where the modulation arrives; the saved traces will be re-analysed.</a:t>
+              <a:t>Validation of the final eye schematic against the Python eye, for 0 to 4 bends (same devices as the EO validation). An oscilloscope records the INTERCONNECT photocurrent; it is folded into a two-symbol eye and measured by exactly the same code as the Python eye (eye height = lowest '1' minus highest '0' at the best instant; OMA = mean '1' minus mean '0'). Top: navy = Python, orange = INTERCONNECT, on top of each other for every N. Eye height agrees within 0.4 % and OMA within 0.2 %; both tools show the same slow closure of the eye as bends are added. The extinction ratio is the ratio of the '1' level to a '0' level of only about 0.1 mA (the modulator is driven close to full extinction), so a 0.01 mA difference in the mean '0' level moves it by up to 0.7 dB; the two tools also use different bit patterns, which changes the mean '0' level slightly when there is inter-symbol interference. INTERCONNECT's own start-up interval (32 symbols, appendix A4) is excluded from the folding.</a:t>
             </a:r>
           </a:p>
         </p:txBody>
@@ -17928,7 +17928,7 @@
                 </a:solidFill>
                 <a:latin typeface="Arial"/>
               </a:rPr>
-              <a:t>Eye with bends: INTERCONNECT vs Python</a:t>
+              <a:t>Eye with bends: validation</a:t>
             </a:r>
           </a:p>
         </p:txBody>
@@ -17967,7 +17967,7 @@
                 </a:solidFill>
                 <a:latin typeface="Arial"/>
               </a:rPr>
-              <a:t>100 Gb/s NRZ, 2 Vpp, noise off, no receiver filter</a:t>
+              <a:t>INTERCONNECT (TL electrode) vs Python, 100 Gb/s NRZ, 2 Vpp, noise off, no receiver filter</a:t>
             </a:r>
           </a:p>
         </p:txBody>
@@ -17988,8 +17988,32 @@
         </p:blipFill>
         <p:spPr>
           <a:xfrm>
-            <a:off x="822960" y="1463040"/>
-            <a:ext cx="10515600" cy="2867891"/>
+            <a:off x="1051560" y="1371600"/>
+            <a:ext cx="9966960" cy="2981767"/>
+          </a:xfrm>
+          <a:prstGeom prst="rect">
+            <a:avLst/>
+          </a:prstGeom>
+        </p:spPr>
+      </p:pic>
+      <p:pic>
+        <p:nvPicPr>
+          <p:cNvPr id="6" name="Picture 5" descr="final_eye_metrics.png"/>
+          <p:cNvPicPr>
+            <a:picLocks noChangeAspect="1"/>
+          </p:cNvPicPr>
+          <p:nvPr/>
+        </p:nvPicPr>
+        <p:blipFill>
+          <a:blip r:embed="rId3"/>
+          <a:stretch>
+            <a:fillRect/>
+          </a:stretch>
+        </p:blipFill>
+        <p:spPr>
+          <a:xfrm>
+            <a:off x="502920" y="4572000"/>
+            <a:ext cx="5081534" cy="2148840"/>
           </a:xfrm>
           <a:prstGeom prst="rect">
             <a:avLst/>
@@ -17998,28 +18022,28 @@
       </p:pic>
       <p:graphicFrame>
         <p:nvGraphicFramePr>
-          <p:cNvPr id="6" name="Table 5"/>
+          <p:cNvPr id="7" name="Table 6"/>
           <p:cNvGraphicFramePr>
             <a:graphicFrameLocks noGrp="1"/>
           </p:cNvGraphicFramePr>
           <p:nvPr/>
         </p:nvGraphicFramePr>
         <p:xfrm>
-          <a:off x="731520" y="4251960"/>
-          <a:ext cx="7315196" cy="2194560"/>
+          <a:off x="6812280" y="4617720"/>
+          <a:ext cx="2743197" cy="1810512"/>
         </p:xfrm>
         <a:graphic>
           <a:graphicData uri="http://schemas.openxmlformats.org/drawingml/2006/table">
             <a:tbl>
               <a:tblPr firstRow="0" bandRow="0"/>
               <a:tblGrid>
-                <a:gridCol w="599606"/>
-                <a:gridCol w="1918740"/>
-                <a:gridCol w="1439055"/>
-                <a:gridCol w="1918740"/>
-                <a:gridCol w="1439055"/>
+                <a:gridCol w="256031"/>
+                <a:gridCol w="694943"/>
+                <a:gridCol w="694943"/>
+                <a:gridCol w="548640"/>
+                <a:gridCol w="548640"/>
               </a:tblGrid>
-              <a:tr h="365760">
+              <a:tr h="301752">
                 <a:tc>
                   <a:txBody>
                     <a:bodyPr wrap="square"/>
@@ -18027,7 +18051,7 @@
                     <a:p>
                       <a:pPr algn="l"/>
                       <a:r>
-                        <a:rPr sz="1150" b="1" i="0">
+                        <a:rPr sz="1000" b="1" i="0">
                           <a:solidFill>
                             <a:srgbClr val="FFFFFF"/>
                           </a:solidFill>
@@ -18050,13 +18074,13 @@
                     <a:p>
                       <a:pPr algn="ctr"/>
                       <a:r>
-                        <a:rPr sz="1150" b="1" i="0">
+                        <a:rPr sz="1000" b="1" i="0">
                           <a:solidFill>
                             <a:srgbClr val="FFFFFF"/>
                           </a:solidFill>
                           <a:latin typeface="Arial"/>
                         </a:rPr>
-                        <a:t>eye height Python</a:t>
+                        <a:t>height Py</a:t>
                       </a:r>
                     </a:p>
                   </a:txBody>
@@ -18073,13 +18097,13 @@
                     <a:p>
                       <a:pPr algn="ctr"/>
                       <a:r>
-                        <a:rPr sz="1150" b="1" i="0">
+                        <a:rPr sz="1000" b="1" i="0">
                           <a:solidFill>
                             <a:srgbClr val="FFFFFF"/>
                           </a:solidFill>
                           <a:latin typeface="Arial"/>
                         </a:rPr>
-                        <a:t>ER Python</a:t>
+                        <a:t>height IC</a:t>
                       </a:r>
                     </a:p>
                   </a:txBody>
@@ -18096,13 +18120,13 @@
                     <a:p>
                       <a:pPr algn="ctr"/>
                       <a:r>
-                        <a:rPr sz="1150" b="1" i="0">
+                        <a:rPr sz="1000" b="1" i="0">
                           <a:solidFill>
                             <a:srgbClr val="FFFFFF"/>
                           </a:solidFill>
                           <a:latin typeface="Arial"/>
                         </a:rPr>
-                        <a:t>height IC / Python</a:t>
+                        <a:t>ER Py</a:t>
                       </a:r>
                     </a:p>
                   </a:txBody>
@@ -18119,7 +18143,7 @@
                     <a:p>
                       <a:pPr algn="ctr"/>
                       <a:r>
-                        <a:rPr sz="1150" b="1" i="0">
+                        <a:rPr sz="1000" b="1" i="0">
                           <a:solidFill>
                             <a:srgbClr val="FFFFFF"/>
                           </a:solidFill>
@@ -18136,7 +18160,7 @@
                   </a:tcPr>
                 </a:tc>
               </a:tr>
-              <a:tr h="365760">
+              <a:tr h="301752">
                 <a:tc>
                   <a:txBody>
                     <a:bodyPr wrap="square"/>
@@ -18144,7 +18168,7 @@
                     <a:p>
                       <a:pPr algn="l"/>
                       <a:r>
-                        <a:rPr sz="1150" b="1" i="0">
+                        <a:rPr sz="1000" b="1" i="0">
                           <a:solidFill>
                             <a:srgbClr val="1A1A1A"/>
                           </a:solidFill>
@@ -18167,13 +18191,13 @@
                     <a:p>
                       <a:pPr algn="ctr"/>
                       <a:r>
-                        <a:rPr sz="1150" b="0" i="0">
+                        <a:rPr sz="1000" b="0" i="0">
                           <a:solidFill>
                             <a:srgbClr val="1A1A1A"/>
                           </a:solidFill>
                           <a:latin typeface="Arial"/>
                         </a:rPr>
-                        <a:t>17.96 mA</a:t>
+                        <a:t>19.46</a:t>
                       </a:r>
                     </a:p>
                   </a:txBody>
@@ -18190,13 +18214,13 @@
                     <a:p>
                       <a:pPr algn="ctr"/>
                       <a:r>
-                        <a:rPr sz="1150" b="0" i="0">
+                        <a:rPr sz="1000" b="0" i="0">
                           <a:solidFill>
                             <a:srgbClr val="1A1A1A"/>
                           </a:solidFill>
                           <a:latin typeface="Arial"/>
                         </a:rPr>
-                        <a:t>18.3 dB</a:t>
+                        <a:t>19.46</a:t>
                       </a:r>
                     </a:p>
                   </a:txBody>
@@ -18213,13 +18237,13 @@
                     <a:p>
                       <a:pPr algn="ctr"/>
                       <a:r>
-                        <a:rPr sz="1150" b="0" i="0">
+                        <a:rPr sz="1000" b="0" i="0">
                           <a:solidFill>
                             <a:srgbClr val="1A1A1A"/>
                           </a:solidFill>
                           <a:latin typeface="Arial"/>
                         </a:rPr>
-                        <a:t>re-analysis</a:t>
+                        <a:t>25.2</a:t>
                       </a:r>
                     </a:p>
                   </a:txBody>
@@ -18236,13 +18260,13 @@
                     <a:p>
                       <a:pPr algn="ctr"/>
                       <a:r>
-                        <a:rPr sz="1150" b="0" i="0">
+                        <a:rPr sz="1000" b="0" i="0">
                           <a:solidFill>
                             <a:srgbClr val="1A1A1A"/>
                           </a:solidFill>
                           <a:latin typeface="Arial"/>
                         </a:rPr>
-                        <a:t>re-analysis</a:t>
+                        <a:t>25.3</a:t>
                       </a:r>
                     </a:p>
                   </a:txBody>
@@ -18253,7 +18277,7 @@
                   </a:tcPr>
                 </a:tc>
               </a:tr>
-              <a:tr h="365760">
+              <a:tr h="301752">
                 <a:tc>
                   <a:txBody>
                     <a:bodyPr wrap="square"/>
@@ -18261,7 +18285,7 @@
                     <a:p>
                       <a:pPr algn="l"/>
                       <a:r>
-                        <a:rPr sz="1150" b="1" i="0">
+                        <a:rPr sz="1000" b="1" i="0">
                           <a:solidFill>
                             <a:srgbClr val="1A1A1A"/>
                           </a:solidFill>
@@ -18284,13 +18308,13 @@
                     <a:p>
                       <a:pPr algn="ctr"/>
                       <a:r>
-                        <a:rPr sz="1150" b="0" i="0">
+                        <a:rPr sz="1000" b="0" i="0">
                           <a:solidFill>
                             <a:srgbClr val="1A1A1A"/>
                           </a:solidFill>
                           <a:latin typeface="Arial"/>
                         </a:rPr>
-                        <a:t>17.71 mA</a:t>
+                        <a:t>19.35</a:t>
                       </a:r>
                     </a:p>
                   </a:txBody>
@@ -18307,13 +18331,13 @@
                     <a:p>
                       <a:pPr algn="ctr"/>
                       <a:r>
-                        <a:rPr sz="1150" b="0" i="0">
+                        <a:rPr sz="1000" b="0" i="0">
                           <a:solidFill>
                             <a:srgbClr val="1A1A1A"/>
                           </a:solidFill>
                           <a:latin typeface="Arial"/>
                         </a:rPr>
-                        <a:t>17.9 dB</a:t>
+                        <a:t>19.32</a:t>
                       </a:r>
                     </a:p>
                   </a:txBody>
@@ -18330,13 +18354,13 @@
                     <a:p>
                       <a:pPr algn="ctr"/>
                       <a:r>
-                        <a:rPr sz="1150" b="0" i="0">
+                        <a:rPr sz="1000" b="0" i="0">
                           <a:solidFill>
                             <a:srgbClr val="1A1A1A"/>
                           </a:solidFill>
                           <a:latin typeface="Arial"/>
                         </a:rPr>
-                        <a:t>re-analysis</a:t>
+                        <a:t>24.0</a:t>
                       </a:r>
                     </a:p>
                   </a:txBody>
@@ -18353,13 +18377,13 @@
                     <a:p>
                       <a:pPr algn="ctr"/>
                       <a:r>
-                        <a:rPr sz="1150" b="0" i="0">
+                        <a:rPr sz="1000" b="0" i="0">
                           <a:solidFill>
                             <a:srgbClr val="1A1A1A"/>
                           </a:solidFill>
                           <a:latin typeface="Arial"/>
                         </a:rPr>
-                        <a:t>re-analysis</a:t>
+                        <a:t>24.5</a:t>
                       </a:r>
                     </a:p>
                   </a:txBody>
@@ -18370,7 +18394,7 @@
                   </a:tcPr>
                 </a:tc>
               </a:tr>
-              <a:tr h="365760">
+              <a:tr h="301752">
                 <a:tc>
                   <a:txBody>
                     <a:bodyPr wrap="square"/>
@@ -18378,7 +18402,7 @@
                     <a:p>
                       <a:pPr algn="l"/>
                       <a:r>
-                        <a:rPr sz="1150" b="1" i="0">
+                        <a:rPr sz="1000" b="1" i="0">
                           <a:solidFill>
                             <a:srgbClr val="1A1A1A"/>
                           </a:solidFill>
@@ -18401,13 +18425,13 @@
                     <a:p>
                       <a:pPr algn="ctr"/>
                       <a:r>
-                        <a:rPr sz="1150" b="0" i="0">
+                        <a:rPr sz="1000" b="0" i="0">
                           <a:solidFill>
                             <a:srgbClr val="1A1A1A"/>
                           </a:solidFill>
                           <a:latin typeface="Arial"/>
                         </a:rPr>
-                        <a:t>17.51 mA</a:t>
+                        <a:t>19.20</a:t>
                       </a:r>
                     </a:p>
                   </a:txBody>
@@ -18424,13 +18448,13 @@
                     <a:p>
                       <a:pPr algn="ctr"/>
                       <a:r>
-                        <a:rPr sz="1150" b="0" i="0">
+                        <a:rPr sz="1000" b="0" i="0">
                           <a:solidFill>
                             <a:srgbClr val="1A1A1A"/>
                           </a:solidFill>
                           <a:latin typeface="Arial"/>
                         </a:rPr>
-                        <a:t>17.5 dB</a:t>
+                        <a:t>19.19</a:t>
                       </a:r>
                     </a:p>
                   </a:txBody>
@@ -18447,13 +18471,13 @@
                     <a:p>
                       <a:pPr algn="ctr"/>
                       <a:r>
-                        <a:rPr sz="1150" b="0" i="0">
+                        <a:rPr sz="1000" b="0" i="0">
                           <a:solidFill>
                             <a:srgbClr val="1A1A1A"/>
                           </a:solidFill>
                           <a:latin typeface="Arial"/>
                         </a:rPr>
-                        <a:t>re-analysis</a:t>
+                        <a:t>22.9</a:t>
                       </a:r>
                     </a:p>
                   </a:txBody>
@@ -18470,13 +18494,13 @@
                     <a:p>
                       <a:pPr algn="ctr"/>
                       <a:r>
-                        <a:rPr sz="1150" b="0" i="0">
+                        <a:rPr sz="1000" b="0" i="0">
                           <a:solidFill>
                             <a:srgbClr val="1A1A1A"/>
                           </a:solidFill>
                           <a:latin typeface="Arial"/>
                         </a:rPr>
-                        <a:t>re-analysis</a:t>
+                        <a:t>23.6</a:t>
                       </a:r>
                     </a:p>
                   </a:txBody>
@@ -18487,7 +18511,7 @@
                   </a:tcPr>
                 </a:tc>
               </a:tr>
-              <a:tr h="365760">
+              <a:tr h="301752">
                 <a:tc>
                   <a:txBody>
                     <a:bodyPr wrap="square"/>
@@ -18495,7 +18519,7 @@
                     <a:p>
                       <a:pPr algn="l"/>
                       <a:r>
-                        <a:rPr sz="1150" b="1" i="0">
+                        <a:rPr sz="1000" b="1" i="0">
                           <a:solidFill>
                             <a:srgbClr val="1A1A1A"/>
                           </a:solidFill>
@@ -18518,13 +18542,13 @@
                     <a:p>
                       <a:pPr algn="ctr"/>
                       <a:r>
-                        <a:rPr sz="1150" b="0" i="0">
+                        <a:rPr sz="1000" b="0" i="0">
                           <a:solidFill>
                             <a:srgbClr val="1A1A1A"/>
                           </a:solidFill>
                           <a:latin typeface="Arial"/>
                         </a:rPr>
-                        <a:t>17.22 mA</a:t>
+                        <a:t>18.94</a:t>
                       </a:r>
                     </a:p>
                   </a:txBody>
@@ -18541,13 +18565,13 @@
                     <a:p>
                       <a:pPr algn="ctr"/>
                       <a:r>
-                        <a:rPr sz="1150" b="0" i="0">
+                        <a:rPr sz="1000" b="0" i="0">
                           <a:solidFill>
                             <a:srgbClr val="1A1A1A"/>
                           </a:solidFill>
                           <a:latin typeface="Arial"/>
                         </a:rPr>
-                        <a:t>17.0 dB</a:t>
+                        <a:t>19.01</a:t>
                       </a:r>
                     </a:p>
                   </a:txBody>
@@ -18564,13 +18588,13 @@
                     <a:p>
                       <a:pPr algn="ctr"/>
                       <a:r>
-                        <a:rPr sz="1150" b="0" i="0">
+                        <a:rPr sz="1000" b="0" i="0">
                           <a:solidFill>
                             <a:srgbClr val="1A1A1A"/>
                           </a:solidFill>
                           <a:latin typeface="Arial"/>
                         </a:rPr>
-                        <a:t>re-analysis</a:t>
+                        <a:t>22.1</a:t>
                       </a:r>
                     </a:p>
                   </a:txBody>
@@ -18587,13 +18611,13 @@
                     <a:p>
                       <a:pPr algn="ctr"/>
                       <a:r>
-                        <a:rPr sz="1150" b="0" i="0">
+                        <a:rPr sz="1000" b="0" i="0">
                           <a:solidFill>
                             <a:srgbClr val="1A1A1A"/>
                           </a:solidFill>
                           <a:latin typeface="Arial"/>
                         </a:rPr>
-                        <a:t>re-analysis</a:t>
+                        <a:t>22.7</a:t>
                       </a:r>
                     </a:p>
                   </a:txBody>
@@ -18604,7 +18628,7 @@
                   </a:tcPr>
                 </a:tc>
               </a:tr>
-              <a:tr h="365760">
+              <a:tr h="301752">
                 <a:tc>
                   <a:txBody>
                     <a:bodyPr wrap="square"/>
@@ -18612,7 +18636,7 @@
                     <a:p>
                       <a:pPr algn="l"/>
                       <a:r>
-                        <a:rPr sz="1150" b="1" i="0">
+                        <a:rPr sz="1000" b="1" i="0">
                           <a:solidFill>
                             <a:srgbClr val="1A1A1A"/>
                           </a:solidFill>
@@ -18635,13 +18659,13 @@
                     <a:p>
                       <a:pPr algn="ctr"/>
                       <a:r>
-                        <a:rPr sz="1150" b="0" i="0">
+                        <a:rPr sz="1000" b="0" i="0">
                           <a:solidFill>
                             <a:srgbClr val="1A1A1A"/>
                           </a:solidFill>
                           <a:latin typeface="Arial"/>
                         </a:rPr>
-                        <a:t>17.01 mA</a:t>
+                        <a:t>18.75</a:t>
                       </a:r>
                     </a:p>
                   </a:txBody>
@@ -18658,13 +18682,13 @@
                     <a:p>
                       <a:pPr algn="ctr"/>
                       <a:r>
-                        <a:rPr sz="1150" b="0" i="0">
+                        <a:rPr sz="1000" b="0" i="0">
                           <a:solidFill>
                             <a:srgbClr val="1A1A1A"/>
                           </a:solidFill>
                           <a:latin typeface="Arial"/>
                         </a:rPr>
-                        <a:t>16.7 dB</a:t>
+                        <a:t>18.71</a:t>
                       </a:r>
                     </a:p>
                   </a:txBody>
@@ -18681,13 +18705,13 @@
                     <a:p>
                       <a:pPr algn="ctr"/>
                       <a:r>
-                        <a:rPr sz="1150" b="0" i="0">
+                        <a:rPr sz="1000" b="0" i="0">
                           <a:solidFill>
                             <a:srgbClr val="1A1A1A"/>
                           </a:solidFill>
                           <a:latin typeface="Arial"/>
                         </a:rPr>
-                        <a:t>re-analysis</a:t>
+                        <a:t>21.3</a:t>
                       </a:r>
                     </a:p>
                   </a:txBody>
@@ -18704,13 +18728,13 @@
                     <a:p>
                       <a:pPr algn="ctr"/>
                       <a:r>
-                        <a:rPr sz="1150" b="0" i="0">
+                        <a:rPr sz="1000" b="0" i="0">
                           <a:solidFill>
                             <a:srgbClr val="1A1A1A"/>
                           </a:solidFill>
                           <a:latin typeface="Arial"/>
                         </a:rPr>
-                        <a:t>re-analysis</a:t>
+                        <a:t>21.7</a:t>
                       </a:r>
                     </a:p>
                   </a:txBody>
@@ -18727,55 +18751,196 @@
       </p:graphicFrame>
       <p:sp>
         <p:nvSpPr>
-          <p:cNvPr id="7" name="Rounded Rectangle 6"/>
-          <p:cNvSpPr/>
-          <p:nvPr/>
-        </p:nvSpPr>
-        <p:spPr>
-          <a:xfrm>
-            <a:off x="8503920" y="4434840"/>
-            <a:ext cx="3246120" cy="1371600"/>
-          </a:xfrm>
-          <a:prstGeom prst="roundRect">
-            <a:avLst>
-              <a:gd name="adj" fmla="val 50000"/>
-            </a:avLst>
-          </a:prstGeom>
-          <a:solidFill>
-            <a:srgbClr val="FDEBEC"/>
-          </a:solidFill>
-          <a:ln>
-            <a:noFill/>
-          </a:ln>
-          <a:effectLst/>
-        </p:spPr>
-        <p:style>
-          <a:lnRef idx="1">
-            <a:schemeClr val="accent1"/>
-          </a:lnRef>
-          <a:fillRef idx="3">
-            <a:schemeClr val="accent1"/>
-          </a:fillRef>
-          <a:effectRef idx="2">
-            <a:schemeClr val="accent1"/>
-          </a:effectRef>
-          <a:fontRef idx="minor">
-            <a:schemeClr val="lt1"/>
-          </a:fontRef>
-        </p:style>
-        <p:txBody>
-          <a:bodyPr rtlCol="0" anchor="ctr" lIns="27432" rIns="27432" tIns="9144" bIns="9144" wrap="square"/>
-          <a:lstStyle/>
-          <a:p>
-            <a:pPr algn="ctr"/>
-            <a:r>
-              <a:rPr sz="1100" b="1" i="0">
+          <p:cNvPr id="8" name="TextBox 7"/>
+          <p:cNvSpPr txBox="1"/>
+          <p:nvPr/>
+        </p:nvSpPr>
+        <p:spPr>
+          <a:xfrm>
+            <a:off x="6812280" y="6446520"/>
+            <a:ext cx="2743200" cy="274320"/>
+          </a:xfrm>
+          <a:prstGeom prst="rect">
+            <a:avLst/>
+          </a:prstGeom>
+          <a:noFill/>
+        </p:spPr>
+        <p:txBody>
+          <a:bodyPr wrap="square" lIns="27432" rIns="27432" tIns="18288" bIns="18288" anchor="t">
+            <a:spAutoFit/>
+          </a:bodyPr>
+          <a:lstStyle/>
+          <a:p>
+            <a:pPr algn="l">
+              <a:spcAft>
+                <a:spcPts val="400"/>
+              </a:spcAft>
+            </a:pPr>
+            <a:r>
+              <a:rPr sz="900" b="0" i="1">
                 <a:solidFill>
-                  <a:srgbClr val="F20013"/>
+                  <a:srgbClr val="5A606E"/>
                 </a:solidFill>
                 <a:latin typeface="Arial"/>
               </a:rPr>
-              <a:t>INTERCONNECT eyes: the first run folded the start-up interval; fixed, re-analysis pending</a:t>
+              <a:t>height in mA · ER in dB</a:t>
+            </a:r>
+          </a:p>
+        </p:txBody>
+      </p:sp>
+      <p:sp>
+        <p:nvSpPr>
+          <p:cNvPr id="9" name="TextBox 8"/>
+          <p:cNvSpPr txBox="1"/>
+          <p:nvPr/>
+        </p:nvSpPr>
+        <p:spPr>
+          <a:xfrm>
+            <a:off x="9738360" y="4572000"/>
+            <a:ext cx="2194560" cy="731520"/>
+          </a:xfrm>
+          <a:prstGeom prst="rect">
+            <a:avLst/>
+          </a:prstGeom>
+          <a:noFill/>
+        </p:spPr>
+        <p:txBody>
+          <a:bodyPr wrap="square" lIns="27432" rIns="27432" tIns="18288" bIns="18288" anchor="t">
+            <a:spAutoFit/>
+          </a:bodyPr>
+          <a:lstStyle/>
+          <a:p>
+            <a:pPr algn="l">
+              <a:spcAft>
+                <a:spcPts val="0"/>
+              </a:spcAft>
+            </a:pPr>
+            <a:r>
+              <a:rPr sz="4000" b="1" i="0">
+                <a:solidFill>
+                  <a:srgbClr val="0E2268"/>
+                </a:solidFill>
+                <a:latin typeface="Arial"/>
+              </a:rPr>
+              <a:t>≤ 0.4 %</a:t>
+            </a:r>
+          </a:p>
+        </p:txBody>
+      </p:sp>
+      <p:sp>
+        <p:nvSpPr>
+          <p:cNvPr id="10" name="TextBox 9"/>
+          <p:cNvSpPr txBox="1"/>
+          <p:nvPr/>
+        </p:nvSpPr>
+        <p:spPr>
+          <a:xfrm>
+            <a:off x="9738360" y="5285232"/>
+            <a:ext cx="2194560" cy="457200"/>
+          </a:xfrm>
+          <a:prstGeom prst="rect">
+            <a:avLst/>
+          </a:prstGeom>
+          <a:noFill/>
+        </p:spPr>
+        <p:txBody>
+          <a:bodyPr wrap="square" lIns="27432" rIns="27432" tIns="18288" bIns="18288" anchor="t">
+            <a:spAutoFit/>
+          </a:bodyPr>
+          <a:lstStyle/>
+          <a:p>
+            <a:pPr algn="l">
+              <a:spcAft>
+                <a:spcPts val="0"/>
+              </a:spcAft>
+            </a:pPr>
+            <a:r>
+              <a:rPr sz="1100" b="0" i="0">
+                <a:solidFill>
+                  <a:srgbClr val="5A606E"/>
+                </a:solidFill>
+                <a:latin typeface="Arial"/>
+              </a:rPr>
+              <a:t>eye height,
+every N</a:t>
+            </a:r>
+          </a:p>
+        </p:txBody>
+      </p:sp>
+      <p:sp>
+        <p:nvSpPr>
+          <p:cNvPr id="11" name="TextBox 10"/>
+          <p:cNvSpPr txBox="1"/>
+          <p:nvPr/>
+        </p:nvSpPr>
+        <p:spPr>
+          <a:xfrm>
+            <a:off x="9738360" y="5669280"/>
+            <a:ext cx="2194560" cy="731520"/>
+          </a:xfrm>
+          <a:prstGeom prst="rect">
+            <a:avLst/>
+          </a:prstGeom>
+          <a:noFill/>
+        </p:spPr>
+        <p:txBody>
+          <a:bodyPr wrap="square" lIns="27432" rIns="27432" tIns="18288" bIns="18288" anchor="t">
+            <a:spAutoFit/>
+          </a:bodyPr>
+          <a:lstStyle/>
+          <a:p>
+            <a:pPr algn="l">
+              <a:spcAft>
+                <a:spcPts val="0"/>
+              </a:spcAft>
+            </a:pPr>
+            <a:r>
+              <a:rPr sz="4000" b="1" i="0">
+                <a:solidFill>
+                  <a:srgbClr val="1C8C82"/>
+                </a:solidFill>
+                <a:latin typeface="Arial"/>
+              </a:rPr>
+              <a:t>≤ 0.2 %</a:t>
+            </a:r>
+          </a:p>
+        </p:txBody>
+      </p:sp>
+      <p:sp>
+        <p:nvSpPr>
+          <p:cNvPr id="12" name="TextBox 11"/>
+          <p:cNvSpPr txBox="1"/>
+          <p:nvPr/>
+        </p:nvSpPr>
+        <p:spPr>
+          <a:xfrm>
+            <a:off x="9738360" y="6382512"/>
+            <a:ext cx="2194560" cy="457200"/>
+          </a:xfrm>
+          <a:prstGeom prst="rect">
+            <a:avLst/>
+          </a:prstGeom>
+          <a:noFill/>
+        </p:spPr>
+        <p:txBody>
+          <a:bodyPr wrap="square" lIns="27432" rIns="27432" tIns="18288" bIns="18288" anchor="t">
+            <a:spAutoFit/>
+          </a:bodyPr>
+          <a:lstStyle/>
+          <a:p>
+            <a:pPr algn="l">
+              <a:spcAft>
+                <a:spcPts val="0"/>
+              </a:spcAft>
+            </a:pPr>
+            <a:r>
+              <a:rPr sz="1100" b="0" i="0">
+                <a:solidFill>
+                  <a:srgbClr val="5A606E"/>
+                </a:solidFill>
+                <a:latin typeface="Arial"/>
+              </a:rPr>
+              <a:t>OMA, every N</a:t>
             </a:r>
           </a:p>
         </p:txBody>
@@ -26158,7 +26323,7 @@
                 </a:solidFill>
                 <a:latin typeface="Arial"/>
               </a:rPr>
-              <a:t>fixed in the eye check; saved traces can be re-analysed without re-running INTERCONNECT</a:t>
+              <a:t>fixed; the saved traces re-folded from the arrival: eye height within 0.4 % of Python (slide 19)</a:t>
             </a:r>
           </a:p>
         </p:txBody>
